--- a/results/rflysim/eval-20261010T215531Z/rflysim-evaluation.pptx
+++ b/results/rflysim/eval-20261010T215531Z/rflysim-evaluation.pptx
@@ -2,24 +2,28 @@
 <file path=ppt/presentation.xml><?xml version="1.0" encoding="utf-8"?>
 <p:presentation xmlns:p="http://schemas.openxmlformats.org/presentationml/2006/main">
   <p:sldMasterIdLst>
-    <p:sldMasterId xmlns:r="http://schemas.openxmlformats.org/officeDocument/2006/relationships" id="2147483648" r:id="Ra9829bb22e2d4290"/>
+    <p:sldMasterId xmlns:r="http://schemas.openxmlformats.org/officeDocument/2006/relationships" id="2147483648" r:id="R9d1ad81d6e674c7b"/>
   </p:sldMasterIdLst>
   <p:notesMasterIdLst>
-    <p:notesMasterId xmlns:r="http://schemas.openxmlformats.org/officeDocument/2006/relationships" r:id="Rb7cc4faec024478d"/>
+    <p:notesMasterId xmlns:r="http://schemas.openxmlformats.org/officeDocument/2006/relationships" r:id="R25a997e840ed45e0"/>
   </p:notesMasterIdLst>
   <p:sldIdLst>
-    <p:sldId xmlns:r="http://schemas.openxmlformats.org/officeDocument/2006/relationships" id="256" r:id="R86f2d8654bd948e1"/>
-    <p:sldId xmlns:r="http://schemas.openxmlformats.org/officeDocument/2006/relationships" id="257" r:id="R0adc04a2ed9143bc"/>
-    <p:sldId xmlns:r="http://schemas.openxmlformats.org/officeDocument/2006/relationships" id="258" r:id="Re01c28b462d54048"/>
-    <p:sldId xmlns:r="http://schemas.openxmlformats.org/officeDocument/2006/relationships" id="259" r:id="R1c98944fdc924bad"/>
-    <p:sldId xmlns:r="http://schemas.openxmlformats.org/officeDocument/2006/relationships" id="260" r:id="R70c3879a66f14d69"/>
-    <p:sldId xmlns:r="http://schemas.openxmlformats.org/officeDocument/2006/relationships" id="261" r:id="R0689c56aed35405f"/>
-    <p:sldId xmlns:r="http://schemas.openxmlformats.org/officeDocument/2006/relationships" id="262" r:id="Rfbefc755d4b24662"/>
-    <p:sldId xmlns:r="http://schemas.openxmlformats.org/officeDocument/2006/relationships" id="263" r:id="Rbf9ef1eb35494253"/>
-    <p:sldId xmlns:r="http://schemas.openxmlformats.org/officeDocument/2006/relationships" id="264" r:id="R16ce710c6c994b36"/>
-    <p:sldId xmlns:r="http://schemas.openxmlformats.org/officeDocument/2006/relationships" id="265" r:id="Re14dd958be40403b"/>
-    <p:sldId xmlns:r="http://schemas.openxmlformats.org/officeDocument/2006/relationships" id="266" r:id="R833c3074f4f8478b"/>
-    <p:sldId xmlns:r="http://schemas.openxmlformats.org/officeDocument/2006/relationships" id="267" r:id="R2f7a756dc03b4ed0"/>
+    <p:sldId xmlns:r="http://schemas.openxmlformats.org/officeDocument/2006/relationships" id="256" r:id="Rfd0b5cb34ff44cd7"/>
+    <p:sldId xmlns:r="http://schemas.openxmlformats.org/officeDocument/2006/relationships" id="257" r:id="R804ed562091645d7"/>
+    <p:sldId xmlns:r="http://schemas.openxmlformats.org/officeDocument/2006/relationships" id="258" r:id="R9ef4b1aec466432a"/>
+    <p:sldId xmlns:r="http://schemas.openxmlformats.org/officeDocument/2006/relationships" id="259" r:id="Ra40f763ba42640f9"/>
+    <p:sldId xmlns:r="http://schemas.openxmlformats.org/officeDocument/2006/relationships" id="260" r:id="R66275c6eaf2c4b06"/>
+    <p:sldId xmlns:r="http://schemas.openxmlformats.org/officeDocument/2006/relationships" id="261" r:id="R6ea60c9b1fd2424d"/>
+    <p:sldId xmlns:r="http://schemas.openxmlformats.org/officeDocument/2006/relationships" id="262" r:id="R12a8a10a66294463"/>
+    <p:sldId xmlns:r="http://schemas.openxmlformats.org/officeDocument/2006/relationships" id="263" r:id="R18dca14fa46a4d03"/>
+    <p:sldId xmlns:r="http://schemas.openxmlformats.org/officeDocument/2006/relationships" id="264" r:id="R5586fbb44592402f"/>
+    <p:sldId xmlns:r="http://schemas.openxmlformats.org/officeDocument/2006/relationships" id="265" r:id="R6445380d261347fa"/>
+    <p:sldId xmlns:r="http://schemas.openxmlformats.org/officeDocument/2006/relationships" id="266" r:id="R3a52ff62e51d4e39"/>
+    <p:sldId xmlns:r="http://schemas.openxmlformats.org/officeDocument/2006/relationships" id="267" r:id="R3df7f1764a4842c6"/>
+    <p:sldId xmlns:r="http://schemas.openxmlformats.org/officeDocument/2006/relationships" id="268" r:id="R008d5bd9f8714f79"/>
+    <p:sldId xmlns:r="http://schemas.openxmlformats.org/officeDocument/2006/relationships" id="269" r:id="Re29e694cb6824345"/>
+    <p:sldId xmlns:r="http://schemas.openxmlformats.org/officeDocument/2006/relationships" id="270" r:id="Rb46f5061d3394601"/>
+    <p:sldId xmlns:r="http://schemas.openxmlformats.org/officeDocument/2006/relationships" id="271" r:id="R20cd386d275149eb"/>
   </p:sldIdLst>
   <p:sldSz cx="12192000" cy="6858000"/>
   <p:notesSz cx="6858000" cy="9144000"/>
@@ -453,7 +457,7 @@
           <a:lstStyle xmlns:a="http://schemas.openxmlformats.org/drawingml/2006/main"/>
           <a:p xmlns:a="http://schemas.openxmlformats.org/drawingml/2006/main">
             <a:r>
-              <a:t>Results eval-20261010T215531Z, 10 October 2026. B1/B2/run.json, metrics.json, assets.json. PX4-estimate-based passes only. This is R4R, unrelated to R2R.</a:t>
+              <a:t>B1/B2 run.json, metrics, installed-execution.md. No real capture, reconstruction or learned policy used. Source: measured eval-20261010T215531Z, offline handoff-20261011T220420Z. Measurements remain 10 October 2026.</a:t>
             </a:r>
           </a:p>
         </p:txBody>
@@ -523,7 +527,7 @@
           <a:lstStyle xmlns:a="http://schemas.openxmlformats.org/drawingml/2006/main"/>
           <a:p xmlns:a="http://schemas.openxmlformats.org/drawingml/2006/main">
             <a:r>
-              <a:t>Results eval-20261010T215531Z, 10 October 2026. docs/rflysim/installed-execution.md and interfaces.md. https://rflysim.com/doc/en/4.DevRef/3d-import.html; https://rflysim.com/doc/en/4.DevRef/vis-cfg.html#version-restriction-overview. VisionCaptureApi sendImgBuffer3308 is forwarding, not proven injection. Closed UE/core boundary. No external renderer implemented.</a:t>
+              <a:t>mount-diagnostic.json,camera-clock-diagnostics.json. A2firstimage257.636,camera425.638,nextimage426.759. No rootcause claimed. Desired interpolation linear/SLERP,bracketgap&lt;=0.1s,residual&lt;=0.02s,noextrapolation. These are nativecamera concerns, not universal externalrenderer prerequisites. Source: measured eval-20261010T215531Z, offline handoff-20261011T220420Z. Measurements remain 10 October 2026.</a:t>
             </a:r>
           </a:p>
         </p:txBody>
@@ -593,7 +597,7 @@
           <a:lstStyle xmlns:a="http://schemas.openxmlformats.org/drawingml/2006/main"/>
           <a:p xmlns:a="http://schemas.openxmlformats.org/drawingml/2006/main">
             <a:r>
-              <a:t>Results eval-20261010T215531Z, 10 October 2026. Common evidence dimensions docs/r4r-audit-context.md. NoAirLab dataset/calibration/reconstruction/split/heldoutH/V/downstreammodel/approvedthresholds. Sparseimagecoverage and sparsephysicalcontent differ. NoPSNR/SSIM/LPIPS orrealtransfer. Native worlds/hardware/controllers unmatched, no simulator performance ranking.</a:t>
+              <a:t>resource-coverage.json,process-resources.json. Driver596.86,L423034MiB. VendorWindows10/11documented; Server2025empirical.100samplesperrun~1.05s. B2apparent21.65soverlap underinferredUTC-04. CompleteISO23.15GB expandedsize/currentdiskmissing, compute$1.95/hr excludesunknownstorage/tax. No A6000 need/noLinuxcheapestclaim. Source: measured eval-20261010T215531Z, offline handoff-20261011T220420Z. Measurements remain 10 October 2026.</a:t>
             </a:r>
           </a:p>
         </p:txBody>
@@ -663,7 +667,287 @@
           <a:lstStyle xmlns:a="http://schemas.openxmlformats.org/drawingml/2006/main"/>
           <a:p xmlns:a="http://schemas.openxmlformats.org/drawingml/2006/main">
             <a:r>
-              <a:t>Results eval-20261010T215531Z, 10 October 2026. checkpoint-preservation.json, checkpoint3-preservation.json. ZIP3 651522799bytes sha d601dc38134b20d1287b0d14e991abb3120b9212795eca4517959cde548fb6d2.1360manifestfiles pass. HostunexpectedStopping23:36UTC/Off23:44causeunknown. Priorledgerspreserved. NoMacsimulatorinstall. Presentation editabletext/objects; scientific plots are reproducible PNGs with source JSON/Python. Not tested in native PowerPoint.</a:t>
+              <a:t>B1/B2 run.json and empty cleanup.jsonl. Authored lifecycle/preservation issue, not established upstream simulator failure. Fresh-queue/exit-status correction passed synthetic tests, not on-host validation. Offline B1 ULog additionally recovers660initialparams/11changes and firmware identity, see handoff/native-log-summary.json.</a:t>
+            </a:r>
+          </a:p>
+        </p:txBody>
+      </p:sp>
+      <p:sp>
+        <p:nvSpPr>
+          <p:cNvPr id="4" name="Slide Number Placeholder 3"/>
+          <p:cNvSpPr>
+            <a:spLocks xmlns:a="http://schemas.openxmlformats.org/drawingml/2006/main" noGrp="1"/>
+          </p:cNvSpPr>
+          <p:nvPr>
+            <p:ph type="sldNum" idx="5"/>
+          </p:nvPr>
+        </p:nvSpPr>
+        <p:spPr/>
+        <p:txBody>
+          <a:bodyPr xmlns:a="http://schemas.openxmlformats.org/drawingml/2006/main"/>
+          <a:lstStyle xmlns:a="http://schemas.openxmlformats.org/drawingml/2006/main"/>
+          <a:p xmlns:a="http://schemas.openxmlformats.org/drawingml/2006/main"/>
+        </p:txBody>
+      </p:sp>
+    </p:spTree>
+  </p:cSld>
+  <p:clrMapOvr>
+    <a:masterClrMapping xmlns:a="http://schemas.openxmlformats.org/drawingml/2006/main"/>
+  </p:clrMapOvr>
+</p:notes>
+</file>
+
+<file path=ppt/notesSlides/notesSlide13.xml><?xml version="1.0" encoding="utf-8"?>
+<p:notes xmlns:p="http://schemas.openxmlformats.org/presentationml/2006/main">
+  <p:cSld>
+    <p:spTree>
+      <p:nvGrpSpPr>
+        <p:cNvPr id="1" name=""/>
+        <p:cNvGrpSpPr/>
+        <p:nvPr/>
+      </p:nvGrpSpPr>
+      <p:grpSpPr>
+        <a:xfrm xmlns:a="http://schemas.openxmlformats.org/drawingml/2006/main"/>
+      </p:grpSpPr>
+      <p:sp>
+        <p:nvSpPr>
+          <p:cNvPr id="2" name="Slide Image Placeholder 1"/>
+          <p:cNvSpPr>
+            <a:spLocks xmlns:a="http://schemas.openxmlformats.org/drawingml/2006/main" noGrp="1"/>
+          </p:cNvSpPr>
+          <p:nvPr>
+            <p:ph type="sldImg" idx="0"/>
+          </p:nvPr>
+        </p:nvSpPr>
+        <p:spPr/>
+      </p:sp>
+      <p:sp>
+        <p:nvSpPr>
+          <p:cNvPr id="3" name="Notes Placeholder 2"/>
+          <p:cNvSpPr>
+            <a:spLocks xmlns:a="http://schemas.openxmlformats.org/drawingml/2006/main" noGrp="1"/>
+          </p:cNvSpPr>
+          <p:nvPr>
+            <p:ph type="body" idx="1"/>
+          </p:nvPr>
+        </p:nvSpPr>
+        <p:spPr/>
+        <p:txBody>
+          <a:bodyPr xmlns:a="http://schemas.openxmlformats.org/drawingml/2006/main"/>
+          <a:lstStyle xmlns:a="http://schemas.openxmlformats.org/drawingml/2006/main"/>
+          <a:p xmlns:a="http://schemas.openxmlformats.org/drawingml/2006/main">
+            <a:r>
+              <a:t>Official mesh route https://rflysim.com/doc/en/4.DevRef/3d-import.html accessed2026-10-11. VisionCaptureApi.sendImgBuffer forwarding not proved nativeinjection. Freeonecamera/vehicletested. NoGaussianloaderorrealphoto+posedirectpathverified. Existing externalrenderer no implementation here. Source: measured eval-20261010T215531Z, offline handoff-20261011T220420Z. Measurements remain 10 October 2026.</a:t>
+            </a:r>
+          </a:p>
+        </p:txBody>
+      </p:sp>
+      <p:sp>
+        <p:nvSpPr>
+          <p:cNvPr id="4" name="Slide Number Placeholder 3"/>
+          <p:cNvSpPr>
+            <a:spLocks xmlns:a="http://schemas.openxmlformats.org/drawingml/2006/main" noGrp="1"/>
+          </p:cNvSpPr>
+          <p:nvPr>
+            <p:ph type="sldNum" idx="5"/>
+          </p:nvPr>
+        </p:nvSpPr>
+        <p:spPr/>
+        <p:txBody>
+          <a:bodyPr xmlns:a="http://schemas.openxmlformats.org/drawingml/2006/main"/>
+          <a:lstStyle xmlns:a="http://schemas.openxmlformats.org/drawingml/2006/main"/>
+          <a:p xmlns:a="http://schemas.openxmlformats.org/drawingml/2006/main"/>
+        </p:txBody>
+      </p:sp>
+    </p:spTree>
+  </p:cSld>
+  <p:clrMapOvr>
+    <a:masterClrMapping xmlns:a="http://schemas.openxmlformats.org/drawingml/2006/main"/>
+  </p:clrMapOvr>
+</p:notes>
+</file>
+
+<file path=ppt/notesSlides/notesSlide14.xml><?xml version="1.0" encoding="utf-8"?>
+<p:notes xmlns:p="http://schemas.openxmlformats.org/presentationml/2006/main">
+  <p:cSld>
+    <p:spTree>
+      <p:nvGrpSpPr>
+        <p:cNvPr id="1" name=""/>
+        <p:cNvGrpSpPr/>
+        <p:nvPr/>
+      </p:nvGrpSpPr>
+      <p:grpSpPr>
+        <a:xfrm xmlns:a="http://schemas.openxmlformats.org/drawingml/2006/main"/>
+      </p:grpSpPr>
+      <p:sp>
+        <p:nvSpPr>
+          <p:cNvPr id="2" name="Slide Image Placeholder 1"/>
+          <p:cNvSpPr>
+            <a:spLocks xmlns:a="http://schemas.openxmlformats.org/drawingml/2006/main" noGrp="1"/>
+          </p:cNvSpPr>
+          <p:nvPr>
+            <p:ph type="sldImg" idx="0"/>
+          </p:nvPr>
+        </p:nvSpPr>
+        <p:spPr/>
+      </p:sp>
+      <p:sp>
+        <p:nvSpPr>
+          <p:cNvPr id="3" name="Notes Placeholder 2"/>
+          <p:cNvSpPr>
+            <a:spLocks xmlns:a="http://schemas.openxmlformats.org/drawingml/2006/main" noGrp="1"/>
+          </p:cNvSpPr>
+          <p:nvPr>
+            <p:ph type="body" idx="1"/>
+          </p:nvPr>
+        </p:nvSpPr>
+        <p:spPr/>
+        <p:txBody>
+          <a:bodyPr xmlns:a="http://schemas.openxmlformats.org/drawingml/2006/main"/>
+          <a:lstStyle xmlns:a="http://schemas.openxmlformats.org/drawingml/2006/main"/>
+          <a:p xmlns:a="http://schemas.openxmlformats.org/drawingml/2006/main">
+            <a:r>
+              <a:t>docs/r4r-audit-context.md. Missingrealimagery/poses/calibration/reconstruction/split/heldouthorizontalverticalviews/downstreammodel/approvedthresholds. NoPSNRSSIMLPIPS,policybenchmark,realtransfer. No simulatorrankingusingunmatchedworlds/hardware. Source: measured eval-20261010T215531Z, offline handoff-20261011T220420Z. Measurements remain 10 October 2026.</a:t>
+            </a:r>
+          </a:p>
+        </p:txBody>
+      </p:sp>
+      <p:sp>
+        <p:nvSpPr>
+          <p:cNvPr id="4" name="Slide Number Placeholder 3"/>
+          <p:cNvSpPr>
+            <a:spLocks xmlns:a="http://schemas.openxmlformats.org/drawingml/2006/main" noGrp="1"/>
+          </p:cNvSpPr>
+          <p:nvPr>
+            <p:ph type="sldNum" idx="5"/>
+          </p:nvPr>
+        </p:nvSpPr>
+        <p:spPr/>
+        <p:txBody>
+          <a:bodyPr xmlns:a="http://schemas.openxmlformats.org/drawingml/2006/main"/>
+          <a:lstStyle xmlns:a="http://schemas.openxmlformats.org/drawingml/2006/main"/>
+          <a:p xmlns:a="http://schemas.openxmlformats.org/drawingml/2006/main"/>
+        </p:txBody>
+      </p:sp>
+    </p:spTree>
+  </p:cSld>
+  <p:clrMapOvr>
+    <a:masterClrMapping xmlns:a="http://schemas.openxmlformats.org/drawingml/2006/main"/>
+  </p:clrMapOvr>
+</p:notes>
+</file>
+
+<file path=ppt/notesSlides/notesSlide15.xml><?xml version="1.0" encoding="utf-8"?>
+<p:notes xmlns:p="http://schemas.openxmlformats.org/presentationml/2006/main">
+  <p:cSld>
+    <p:spTree>
+      <p:nvGrpSpPr>
+        <p:cNvPr id="1" name=""/>
+        <p:cNvGrpSpPr/>
+        <p:nvPr/>
+      </p:nvGrpSpPr>
+      <p:grpSpPr>
+        <a:xfrm xmlns:a="http://schemas.openxmlformats.org/drawingml/2006/main"/>
+      </p:grpSpPr>
+      <p:sp>
+        <p:nvSpPr>
+          <p:cNvPr id="2" name="Slide Image Placeholder 1"/>
+          <p:cNvSpPr>
+            <a:spLocks xmlns:a="http://schemas.openxmlformats.org/drawingml/2006/main" noGrp="1"/>
+          </p:cNvSpPr>
+          <p:nvPr>
+            <p:ph type="sldImg" idx="0"/>
+          </p:nvPr>
+        </p:nvSpPr>
+        <p:spPr/>
+      </p:sp>
+      <p:sp>
+        <p:nvSpPr>
+          <p:cNvPr id="3" name="Notes Placeholder 2"/>
+          <p:cNvSpPr>
+            <a:spLocks xmlns:a="http://schemas.openxmlformats.org/drawingml/2006/main" noGrp="1"/>
+          </p:cNvSpPr>
+          <p:nvPr>
+            <p:ph type="body" idx="1"/>
+          </p:nvPr>
+        </p:nvSpPr>
+        <p:spPr/>
+        <p:txBody>
+          <a:bodyPr xmlns:a="http://schemas.openxmlformats.org/drawingml/2006/main"/>
+          <a:lstStyle xmlns:a="http://schemas.openxmlformats.org/drawingml/2006/main"/>
+          <a:p xmlns:a="http://schemas.openxmlformats.org/drawingml/2006/main">
+            <a:r>
+              <a:t>local-source-verification.json,source-before.json,outputs.json,drive-publication.json. Originalreport/deckpreservedGit9749a40andbefore snapshot. Executedsource raw/code-v2 immutable. CompleteISOWindows-only withofficialURL/hash; truncatedMacoriginal preserved. Source: measured eval-20261010T215531Z, offline handoff-20261011T220420Z. Measurements remain 10 October 2026.</a:t>
+            </a:r>
+          </a:p>
+        </p:txBody>
+      </p:sp>
+      <p:sp>
+        <p:nvSpPr>
+          <p:cNvPr id="4" name="Slide Number Placeholder 3"/>
+          <p:cNvSpPr>
+            <a:spLocks xmlns:a="http://schemas.openxmlformats.org/drawingml/2006/main" noGrp="1"/>
+          </p:cNvSpPr>
+          <p:nvPr>
+            <p:ph type="sldNum" idx="5"/>
+          </p:nvPr>
+        </p:nvSpPr>
+        <p:spPr/>
+        <p:txBody>
+          <a:bodyPr xmlns:a="http://schemas.openxmlformats.org/drawingml/2006/main"/>
+          <a:lstStyle xmlns:a="http://schemas.openxmlformats.org/drawingml/2006/main"/>
+          <a:p xmlns:a="http://schemas.openxmlformats.org/drawingml/2006/main"/>
+        </p:txBody>
+      </p:sp>
+    </p:spTree>
+  </p:cSld>
+  <p:clrMapOvr>
+    <a:masterClrMapping xmlns:a="http://schemas.openxmlformats.org/drawingml/2006/main"/>
+  </p:clrMapOvr>
+</p:notes>
+</file>
+
+<file path=ppt/notesSlides/notesSlide16.xml><?xml version="1.0" encoding="utf-8"?>
+<p:notes xmlns:p="http://schemas.openxmlformats.org/presentationml/2006/main">
+  <p:cSld>
+    <p:spTree>
+      <p:nvGrpSpPr>
+        <p:cNvPr id="1" name=""/>
+        <p:cNvGrpSpPr/>
+        <p:nvPr/>
+      </p:nvGrpSpPr>
+      <p:grpSpPr>
+        <a:xfrm xmlns:a="http://schemas.openxmlformats.org/drawingml/2006/main"/>
+      </p:grpSpPr>
+      <p:sp>
+        <p:nvSpPr>
+          <p:cNvPr id="2" name="Slide Image Placeholder 1"/>
+          <p:cNvSpPr>
+            <a:spLocks xmlns:a="http://schemas.openxmlformats.org/drawingml/2006/main" noGrp="1"/>
+          </p:cNvSpPr>
+          <p:nvPr>
+            <p:ph type="sldImg" idx="0"/>
+          </p:nvPr>
+        </p:nvSpPr>
+        <p:spPr/>
+      </p:sp>
+      <p:sp>
+        <p:nvSpPr>
+          <p:cNvPr id="3" name="Notes Placeholder 2"/>
+          <p:cNvSpPr>
+            <a:spLocks xmlns:a="http://schemas.openxmlformats.org/drawingml/2006/main" noGrp="1"/>
+          </p:cNvSpPr>
+          <p:nvPr>
+            <p:ph type="body" idx="1"/>
+          </p:nvPr>
+        </p:nvSpPr>
+        <p:spPr/>
+        <p:txBody>
+          <a:bodyPr xmlns:a="http://schemas.openxmlformats.org/drawingml/2006/main"/>
+          <a:lstStyle xmlns:a="http://schemas.openxmlformats.org/drawingml/2006/main"/>
+          <a:p xmlns:a="http://schemas.openxmlformats.org/drawingml/2006/main">
+            <a:r>
+              <a:t>docs/rflysim/minimal-followup.md estimates. Externalmotionmapping10–15min;correctedA10–15afterstartup;nativecalibration15–25;clock10–20;cleanup5–10onlyifreuse. Original numericalcriteriaunchanged. Humanfilesinstalled_adapter/runtime_core,capture_adapter,canonicalSDKandstocklauncher. No newauthorization/hoststartup. No HITL/training/customrenderer. Source: measured eval-20261010T215531Z, offline handoff-20261011T220420Z. Measurements remain 10 October 2026.</a:t>
             </a:r>
           </a:p>
         </p:txBody>
@@ -733,7 +1017,7 @@
           <a:lstStyle xmlns:a="http://schemas.openxmlformats.org/drawingml/2006/main"/>
           <a:p xmlns:a="http://schemas.openxmlformats.org/drawingml/2006/main">
             <a:r>
-              <a:t>Results eval-20261010T215531Z, 10 October 2026. Installed SDK files and line references in docs/rflysim/installed-execution.md. UDP20100/20101 control, TCP4560 SITL, UDP30101 truth, CameraData20006, RflySim3DImg_0 shared memory.</a:t>
+              <a:t>assets.json. ISO 23,151,480,832 bytes SHA ed5f41add2e97469c900f4ccff87f615eae4e7cfbedcc7d99211afd4d5dc7973. SDK hashes identify installed sources separately from repository HEAD. B1 ULog ver_sw a301969dc209c166b9fbbb524bd51ca1ece76b04. Source: measured eval-20261010T215531Z, offline handoff-20261011T220420Z. Measurements remain 10 October 2026.</a:t>
             </a:r>
           </a:p>
         </p:txBody>
@@ -803,7 +1087,7 @@
           <a:lstStyle xmlns:a="http://schemas.openxmlformats.org/drawingml/2006/main"/>
           <a:p xmlns:a="http://schemas.openxmlformats.org/drawingml/2006/main">
             <a:r>
-              <a:t>Results eval-20261010T215531Z, 10 October 2026. renderer2.log lines153-159,188,661,667,980. UE4PrereqSetup_x64.exe1.0.14.0 signed Epic. ISO23151480832bytes, sha ed5f41add2e97469c900f4ccff87f615eae4e7cfbedcc7d99211afd4d5dc7973. First system32 launch exit3 Array.h703 assertion cause unresolved.</a:t>
+              <a:t>Installed SDK file/line references in docs/rflysim/installed-execution.md. Scripted targets and estimate feedback close the loop. Pixels never enter controller. Source: measured eval-20261010T215531Z, offline handoff-20261011T220420Z. Measurements remain 10 October 2026.</a:t>
             </a:r>
           </a:p>
         </p:txBody>
@@ -873,7 +1157,7 @@
           <a:lstStyle xmlns:a="http://schemas.openxmlformats.org/drawingml/2006/main"/>
           <a:p xmlns:a="http://schemas.openxmlformats.org/drawingml/2006/main">
             <a:r>
-              <a:t>Results eval-20261010T215531Z, 10 October 2026. B1/B2 metrics, raw flight/cleanup JSONL. 75s flight +15s cleanup,12s/leg,0.5s freshness. Offline41samples/2s dwell corroboration each leg, all under0.25m. Same route after owned WSL1 reset.</a:t>
+              <a:t>https://docs.px4.io/v1.12/en/flight_stack/controller_diagrams and tuning_the_ecl_ekf accessed 2026-10-11. B1 ULog SYS_MC_EST_GROUP=2 and estimator topics support EKF2 configuration. Conceptual cascaded P/PID structure is documented, internal loop signals not independently validated. No dynamics calibration. Source: measured eval-20261010T215531Z, offline handoff-20261011T220420Z. Measurements remain 10 October 2026.</a:t>
             </a:r>
           </a:p>
         </p:txBody>
@@ -943,7 +1227,7 @@
           <a:lstStyle xmlns:a="http://schemas.openxmlformats.org/drawingml/2006/main"/>
           <a:p xmlns:a="http://schemas.openxmlformats.org/drawingml/2006/main">
             <a:r>
-              <a:t>Results eval-20261010T215531Z, 10 October 2026. B1/B2 metrics.json. Ticks &gt;10ms56/280 and116/292. PNG writes/GPU sampling were outside control. Receiver clocks and Windows timer quantization affect recorded cadence. Cleanup worker exit−15 with returned evaluation; likely queue reuse/finalizer issue unconfirmed. Authored freshqueue/exitstatus fix local only.</a:t>
+              <a:t>B1/B2 freeze.json, dwell-corroboration.json. 75s flight +15s cleanup,10Hz,12s/leg,0.5s freshness. Takeoff armed&gt;=1m1s; ON_GROUND/speed&lt;=0.2m/s2s plus fresh disarm. Independent truth criterion blocked. Source: measured eval-20261010T215531Z, offline handoff-20261011T220420Z. Measurements remain 10 October 2026.</a:t>
             </a:r>
           </a:p>
         </p:txBody>
@@ -1013,7 +1297,7 @@
           <a:lstStyle xmlns:a="http://schemas.openxmlformats.org/drawingml/2006/main"/>
           <a:p xmlns:a="http://schemas.openxmlformats.org/drawingml/2006/main">
             <a:r>
-              <a:t>Results eval-20261010T215531Z, 10 October 2026. trace-example.json explicitly uses receiver-nearest illustration with null actual_camera_pose_at_acquisition and uncertainty. B2 capture auxiliary exit -15 on control completion, no full75s capture claim. Raw camera1734 packets, bodytruth1850.</a:t>
+              <a:t>Tick lateness&gt;10ms 56/280 vs116/292. Pixel copying, file I/O and resource sampling outside control. Preserve raw clocks. Cleanup limitation separate. Source: measured eval-20261010T215531Z, offline handoff-20261011T220420Z. Measurements remain 10 October 2026.</a:t>
             </a:r>
           </a:p>
         </p:txBody>
@@ -1083,7 +1367,7 @@
           <a:lstStyle xmlns:a="http://schemas.openxmlformats.org/drawingml/2006/main"/>
           <a:p xmlns:a="http://schemas.openxmlformats.org/drawingml/2006/main">
             <a:r>
-              <a:t>Results eval-20261010T215531Z, 10 October 2026. capture-local-correction.patch. Official https://rflysim.com/doc/en/4.DevRef/vis-cfg.html rows420-423 checked2026-10-10. camera-angle-diagnostics.json. A1 strict26s retest observed but raw not exported. FOV axis/extrinsics/known geometry/acquisition clock unverified.</a:t>
+              <a:t>videos.json records source/frame/video hashes, encode/decode commands. Native images640x480; videos640x520 with40px caption, H264, noaudio. Full decode260/261/365. Receipt spans25.766/25.984/36.359s. All Drive videos roundtriphashverified. Source: measured eval-20261010T215531Z, offline handoff-20261011T220420Z. Measurements remain 10 October 2026.</a:t>
             </a:r>
           </a:p>
         </p:txBody>
@@ -1153,7 +1437,7 @@
           <a:lstStyle xmlns:a="http://schemas.openxmlformats.org/drawingml/2006/main"/>
           <a:p xmlns:a="http://schemas.openxmlformats.org/drawingml/2006/main">
             <a:r>
-              <a:t>Results eval-20261010T215531Z, 10 October 2026. rate metrics.json and rawcamera.jsonl. All1237main PNGs passed open checks. Receipt logs follow PNG encoding, not acquisition. Camera-clock-diagnostics.json: firstA2frame257.636,nearbyCameraData425.638,nextimage426.759. Hypothesis old buffer, not confirmed. Provider stream60FPS not sensor rate.</a:t>
+              <a:t>worked-example.json. Latest preceding command UTC1791674187.6818573. Native estimate boot233896ms. Mode176 andarm400 ACKresult0. Position targets have no per-targetCOMMAND_ACK. Original trace512ACK is telemetry request, not waypoint acceptance. FrameSHA be45e6ef227cf1dd4967568796e25c484c920cbcbb1c3536b20e930d79983e5b. Source: measured eval-20261010T215531Z, offline handoff-20261011T220420Z. Measurements remain 10 October 2026.</a:t>
             </a:r>
           </a:p>
         </p:txBody>
@@ -1223,7 +1507,7 @@
           <a:lstStyle xmlns:a="http://schemas.openxmlformats.org/drawingml/2006/main"/>
           <a:p xmlns:a="http://schemas.openxmlformats.org/drawingml/2006/main">
             <a:r>
-              <a:t>Results eval-20261010T215531Z, 10 October 2026. GPU CSV100samples requested1Hz, full100s windows. No warmup/synchronizedGPU benchmark. ISO23.15GB, installed expanded footprint unexported. Compute display$1.95/hour, storage/taxes/fullcharges unresolved. CPU resource samples lack per-sample timestamps. resource-coverage.json:100samples/~104s, average~1.05s. UTC−04 alignment inferred, full timezone export missing. B1wholeflight covered; B2 apparent21.65s overlap of38.60s recorded flight.</a:t>
+              <a:t>camera-angle-diagnostics.json; official vis-cfg.html SensorAngEular degrees. A criteria0.02m/1deg,feature2%dimension.5swarmup/3sperpose/1ssettle/40swatch. Rotation defect belongs to authored helper, not simulator. Source: measured eval-20261010T215531Z, offline handoff-20261011T220420Z. Measurements remain 10 October 2026.</a:t>
             </a:r>
           </a:p>
         </p:txBody>
@@ -1270,7 +1554,7 @@
           <p:cNvPr id="3" name="Title">
             <a:extLst xmlns:a="http://schemas.openxmlformats.org/drawingml/2006/main">
               <a:ext uri="{FF2B5EF4-FFF2-40B4-BE49-F238E27FC236}">
-                <a16:creationId xmlns:a16="http://schemas.microsoft.com/office/drawing/2014/main" id="{0424451E-4CD6-419D-BEB0-06AB82947231}"/>
+                <a16:creationId xmlns:a16="http://schemas.microsoft.com/office/drawing/2014/main" id="{0DAF60FE-CB05-4C8E-BC44-F7D5F2DB7F08}"/>
               </a:ext>
             </a:extLst>
           </p:cNvPr>
@@ -1427,7 +1711,7 @@
           <p:cNvPr id="2" name="Subtitle">
             <a:extLst xmlns:a="http://schemas.openxmlformats.org/drawingml/2006/main">
               <a:ext uri="{FF2B5EF4-FFF2-40B4-BE49-F238E27FC236}">
-                <a16:creationId xmlns:a16="http://schemas.microsoft.com/office/drawing/2014/main" id="{2552D638-514B-4102-9D28-8DBB2E039EAC}"/>
+                <a16:creationId xmlns:a16="http://schemas.microsoft.com/office/drawing/2014/main" id="{86EB3269-7F42-49D8-BAB0-76C42902C099}"/>
               </a:ext>
             </a:extLst>
           </p:cNvPr>
@@ -1601,7 +1885,7 @@
           <p:cNvPr id="2" name="Section title">
             <a:extLst xmlns:a="http://schemas.openxmlformats.org/drawingml/2006/main">
               <a:ext uri="{FF2B5EF4-FFF2-40B4-BE49-F238E27FC236}">
-                <a16:creationId xmlns:a16="http://schemas.microsoft.com/office/drawing/2014/main" id="{D831739F-D5B3-4AC4-B041-01A6C9298D8B}"/>
+                <a16:creationId xmlns:a16="http://schemas.microsoft.com/office/drawing/2014/main" id="{71EFD83A-3F89-434F-8FB0-E4E6883B250F}"/>
               </a:ext>
             </a:extLst>
           </p:cNvPr>
@@ -1775,7 +2059,7 @@
           <p:cNvPr id="3" name="Title">
             <a:extLst xmlns:a="http://schemas.openxmlformats.org/drawingml/2006/main">
               <a:ext uri="{FF2B5EF4-FFF2-40B4-BE49-F238E27FC236}">
-                <a16:creationId xmlns:a16="http://schemas.microsoft.com/office/drawing/2014/main" id="{2B336C34-5DAB-45E1-B1CF-26441BA57FFF}"/>
+                <a16:creationId xmlns:a16="http://schemas.microsoft.com/office/drawing/2014/main" id="{5BC0FDA3-9F69-4586-95A3-35BDF5D666FE}"/>
               </a:ext>
             </a:extLst>
           </p:cNvPr>
@@ -1932,7 +2216,7 @@
           <p:cNvPr id="2" name="Body">
             <a:extLst xmlns:a="http://schemas.openxmlformats.org/drawingml/2006/main">
               <a:ext uri="{FF2B5EF4-FFF2-40B4-BE49-F238E27FC236}">
-                <a16:creationId xmlns:a16="http://schemas.microsoft.com/office/drawing/2014/main" id="{759FFC81-24AD-4959-BA49-372EC66D2323}"/>
+                <a16:creationId xmlns:a16="http://schemas.microsoft.com/office/drawing/2014/main" id="{C47093F0-3047-4987-9BEA-750F574E57AA}"/>
               </a:ext>
             </a:extLst>
           </p:cNvPr>
@@ -2106,7 +2390,7 @@
           <p:cNvPr id="4" name="Title">
             <a:extLst xmlns:a="http://schemas.openxmlformats.org/drawingml/2006/main">
               <a:ext uri="{FF2B5EF4-FFF2-40B4-BE49-F238E27FC236}">
-                <a16:creationId xmlns:a16="http://schemas.microsoft.com/office/drawing/2014/main" id="{0AF57374-69CA-48B2-A75C-F5467FA880D8}"/>
+                <a16:creationId xmlns:a16="http://schemas.microsoft.com/office/drawing/2014/main" id="{12FADC8D-2EAE-436A-A443-38AAABE476FB}"/>
               </a:ext>
             </a:extLst>
           </p:cNvPr>
@@ -2263,7 +2547,7 @@
           <p:cNvPr id="2" name="Left column">
             <a:extLst xmlns:a="http://schemas.openxmlformats.org/drawingml/2006/main">
               <a:ext uri="{FF2B5EF4-FFF2-40B4-BE49-F238E27FC236}">
-                <a16:creationId xmlns:a16="http://schemas.microsoft.com/office/drawing/2014/main" id="{16604B69-F295-4B59-9F09-CD1A77688457}"/>
+                <a16:creationId xmlns:a16="http://schemas.microsoft.com/office/drawing/2014/main" id="{7EF2944F-8E11-4890-B81A-AA205D86BC53}"/>
               </a:ext>
             </a:extLst>
           </p:cNvPr>
@@ -2420,7 +2704,7 @@
           <p:cNvPr id="3" name="Right column">
             <a:extLst xmlns:a="http://schemas.openxmlformats.org/drawingml/2006/main">
               <a:ext uri="{FF2B5EF4-FFF2-40B4-BE49-F238E27FC236}">
-                <a16:creationId xmlns:a16="http://schemas.microsoft.com/office/drawing/2014/main" id="{BF3D950A-99C9-4BF5-B0CE-4765290B1924}"/>
+                <a16:creationId xmlns:a16="http://schemas.microsoft.com/office/drawing/2014/main" id="{1960DB75-9F84-4075-B1A4-C016D8AC47B4}"/>
               </a:ext>
             </a:extLst>
           </p:cNvPr>
@@ -2594,7 +2878,7 @@
           <p:cNvPr id="3" name="Title">
             <a:extLst xmlns:a="http://schemas.openxmlformats.org/drawingml/2006/main">
               <a:ext uri="{FF2B5EF4-FFF2-40B4-BE49-F238E27FC236}">
-                <a16:creationId xmlns:a16="http://schemas.microsoft.com/office/drawing/2014/main" id="{A719B5ED-CC53-469F-93C3-1E4719BE3283}"/>
+                <a16:creationId xmlns:a16="http://schemas.microsoft.com/office/drawing/2014/main" id="{25EC1E20-7345-4F9F-99E3-3203DEC490EA}"/>
               </a:ext>
             </a:extLst>
           </p:cNvPr>
@@ -2751,7 +3035,7 @@
           <p:cNvPr id="2" name="Left column">
             <a:extLst xmlns:a="http://schemas.openxmlformats.org/drawingml/2006/main">
               <a:ext uri="{FF2B5EF4-FFF2-40B4-BE49-F238E27FC236}">
-                <a16:creationId xmlns:a16="http://schemas.microsoft.com/office/drawing/2014/main" id="{FC0F44BD-F4DC-4132-B89E-75F72771F7E0}"/>
+                <a16:creationId xmlns:a16="http://schemas.microsoft.com/office/drawing/2014/main" id="{CCA19228-31C7-4DEC-9CF8-9712766542C0}"/>
               </a:ext>
             </a:extLst>
           </p:cNvPr>
@@ -2946,12 +3230,12 @@
   </p:cSld>
   <p:clrMap bg1="lt1" tx1="dk1" bg2="lt2" tx2="dk2" accent1="accent1" accent2="accent2" accent3="accent3" accent4="accent4" accent5="accent5" accent6="accent6" hlink="hlink" folHlink="folHlink"/>
   <p:sldLayoutIdLst>
-    <p:sldLayoutId xmlns:r="http://schemas.openxmlformats.org/officeDocument/2006/relationships" id="2147483649" r:id="Rd07e4aca955344b0"/>
-    <p:sldLayoutId xmlns:r="http://schemas.openxmlformats.org/officeDocument/2006/relationships" id="2147483650" r:id="R054d8d04868c44ce"/>
-    <p:sldLayoutId xmlns:r="http://schemas.openxmlformats.org/officeDocument/2006/relationships" id="2147483651" r:id="R26f4437552d04098"/>
-    <p:sldLayoutId xmlns:r="http://schemas.openxmlformats.org/officeDocument/2006/relationships" id="2147483652" r:id="Rdde97c87be4848f1"/>
-    <p:sldLayoutId xmlns:r="http://schemas.openxmlformats.org/officeDocument/2006/relationships" id="2147483653" r:id="Rfc620ab69907407b"/>
-    <p:sldLayoutId xmlns:r="http://schemas.openxmlformats.org/officeDocument/2006/relationships" id="2147483654" r:id="Re89abff9ba954588"/>
+    <p:sldLayoutId xmlns:r="http://schemas.openxmlformats.org/officeDocument/2006/relationships" id="2147483649" r:id="Rd3c3a5f3866f4a0c"/>
+    <p:sldLayoutId xmlns:r="http://schemas.openxmlformats.org/officeDocument/2006/relationships" id="2147483650" r:id="R24ef8063e33c4cbf"/>
+    <p:sldLayoutId xmlns:r="http://schemas.openxmlformats.org/officeDocument/2006/relationships" id="2147483651" r:id="R161911ebc71b4017"/>
+    <p:sldLayoutId xmlns:r="http://schemas.openxmlformats.org/officeDocument/2006/relationships" id="2147483652" r:id="R980a558f61914705"/>
+    <p:sldLayoutId xmlns:r="http://schemas.openxmlformats.org/officeDocument/2006/relationships" id="2147483653" r:id="R5ef918223c924671"/>
+    <p:sldLayoutId xmlns:r="http://schemas.openxmlformats.org/officeDocument/2006/relationships" id="2147483654" r:id="R498ece5799874a88"/>
   </p:sldLayoutIdLst>
   <p:txStyles>
     <p:titleStyle>
@@ -3502,7 +3786,7 @@
           <p:cNvPr id="7" name="">
             <a:extLst xmlns:a="http://schemas.openxmlformats.org/drawingml/2006/main">
               <a:ext uri="{FF2B5EF4-FFF2-40B4-BE49-F238E27FC236}">
-                <a16:creationId xmlns:a16="http://schemas.microsoft.com/office/drawing/2014/main" id="{D0CA9B6F-E4BA-463B-92A3-9B9C34D5F5E8}"/>
+                <a16:creationId xmlns:a16="http://schemas.microsoft.com/office/drawing/2014/main" id="{26463A73-057E-40FA-A68C-4889B39E4491}"/>
               </a:ext>
             </a:extLst>
           </p:cNvPr>
@@ -3560,7 +3844,7 @@
                 <a:ea typeface="Arial"/>
                 <a:cs typeface="Arial"/>
               </a:rPr>
-              <a:t>RflySim for Real4Real</a:t>
+              <a:t>RflySim components for R4R</a:t>
             </a:r>
           </a:p>
         </p:txBody>
@@ -3570,7 +3854,7 @@
           <p:cNvPr id="2" name="">
             <a:extLst xmlns:a="http://schemas.openxmlformats.org/drawingml/2006/main">
               <a:ext uri="{FF2B5EF4-FFF2-40B4-BE49-F238E27FC236}">
-                <a16:creationId xmlns:a16="http://schemas.microsoft.com/office/drawing/2014/main" id="{AD15E1A3-3D78-4336-957A-8A3580405810}"/>
+                <a16:creationId xmlns:a16="http://schemas.microsoft.com/office/drawing/2014/main" id="{87DA63E2-52CE-4DD8-BDEC-79926ACF9E5A}"/>
               </a:ext>
             </a:extLst>
           </p:cNvPr>
@@ -3580,7 +3864,7 @@
           <p:nvPr/>
         </p:nvPicPr>
         <p:blipFill>
-          <a:blip xmlns:r="http://schemas.openxmlformats.org/officeDocument/2006/relationships" xmlns:a="http://schemas.openxmlformats.org/drawingml/2006/main" r:embed="Rc3dede5a332f4e81"/>
+          <a:blip xmlns:r="http://schemas.openxmlformats.org/officeDocument/2006/relationships" xmlns:a="http://schemas.openxmlformats.org/drawingml/2006/main" r:embed="Ra4aa9811bc48492c"/>
           <a:stretch xmlns:a="http://schemas.openxmlformats.org/drawingml/2006/main"/>
         </p:blipFill>
         <p:spPr>
@@ -3598,7 +3882,7 @@
           <p:cNvPr id="3" name="">
             <a:extLst xmlns:a="http://schemas.openxmlformats.org/drawingml/2006/main">
               <a:ext uri="{FF2B5EF4-FFF2-40B4-BE49-F238E27FC236}">
-                <a16:creationId xmlns:a16="http://schemas.microsoft.com/office/drawing/2014/main" id="{F4BABFC7-4859-4179-9E64-B80667F50E14}"/>
+                <a16:creationId xmlns:a16="http://schemas.microsoft.com/office/drawing/2014/main" id="{CA42C918-B752-420B-8D19-8959D80FCD5B}"/>
               </a:ext>
             </a:extLst>
           </p:cNvPr>
@@ -3656,7 +3940,7 @@
                 <a:ea typeface="Arial"/>
                 <a:cs typeface="Arial"/>
               </a:rPr>
-              <a:t>Two stock PX4 routes completed with confirmed landing and disarming.</a:t>
+              <a:t>Reuse PX4/CopterSim for stock motion and control integration.</a:t>
             </a:r>
           </a:p>
         </p:txBody>
@@ -3666,7 +3950,7 @@
           <p:cNvPr id="4" name="">
             <a:extLst xmlns:a="http://schemas.openxmlformats.org/drawingml/2006/main">
               <a:ext uri="{FF2B5EF4-FFF2-40B4-BE49-F238E27FC236}">
-                <a16:creationId xmlns:a16="http://schemas.microsoft.com/office/drawing/2014/main" id="{A7F436BD-E221-466B-A101-21B0A854A58B}"/>
+                <a16:creationId xmlns:a16="http://schemas.microsoft.com/office/drawing/2014/main" id="{3034043D-EEDF-4297-A12F-792C9DB11191}"/>
               </a:ext>
             </a:extLst>
           </p:cNvPr>
@@ -3724,7 +4008,7 @@
                 <a:ea typeface="Arial"/>
                 <a:cs typeface="Arial"/>
               </a:rPr>
-              <a:t>Native RGB capture worked at 640 × 480 and about 10 Hz.</a:t>
+              <a:t>Keep native RGB as a visual baseline. Two waypoint flights passed and B2 recorded RGB concurrently.</a:t>
             </a:r>
           </a:p>
         </p:txBody>
@@ -3734,7 +4018,7 @@
           <p:cNvPr id="5" name="">
             <a:extLst xmlns:a="http://schemas.openxmlformats.org/drawingml/2006/main">
               <a:ext uri="{FF2B5EF4-FFF2-40B4-BE49-F238E27FC236}">
-                <a16:creationId xmlns:a16="http://schemas.microsoft.com/office/drawing/2014/main" id="{E47FCB20-7CE7-4E22-9615-5B7CB35C2971}"/>
+                <a16:creationId xmlns:a16="http://schemas.microsoft.com/office/drawing/2014/main" id="{3C69B907-7D80-4D64-A01B-06BE0E2F2142}"/>
               </a:ext>
             </a:extLst>
           </p:cNvPr>
@@ -3792,7 +4076,7 @@
                 <a:ea typeface="Arial"/>
                 <a:cs typeface="Arial"/>
               </a:rPr>
-              <a:t>Reuse control integration and a stock visual baseline. Defer calibrated reconstruction rendering.</a:t>
+              <a:t>External motion replay is proposed. Native calibration and real-scene fidelity remain unverified.</a:t>
             </a:r>
           </a:p>
         </p:txBody>
@@ -3802,7 +4086,7 @@
           <p:cNvPr id="6" name="">
             <a:extLst xmlns:a="http://schemas.openxmlformats.org/drawingml/2006/main">
               <a:ext uri="{FF2B5EF4-FFF2-40B4-BE49-F238E27FC236}">
-                <a16:creationId xmlns:a16="http://schemas.microsoft.com/office/drawing/2014/main" id="{11A12653-F607-416B-9239-23DD7A04F119}"/>
+                <a16:creationId xmlns:a16="http://schemas.microsoft.com/office/drawing/2014/main" id="{64A636D6-160E-44EE-9E68-BD2D38636577}"/>
               </a:ext>
             </a:extLst>
           </p:cNvPr>
@@ -3860,7 +4144,7 @@
                 <a:ea typeface="Arial"/>
                 <a:cs typeface="Arial"/>
               </a:rPr>
-              <a:t>Measured stock integration. Calibration and real-scene fidelity remain incomplete.   1 / 12</a:t>
+              <a:t>Stock integration evidence · offline handoff 11 October 2026   1 / 16</a:t>
             </a:r>
           </a:p>
         </p:txBody>
@@ -3868,7 +4152,7 @@
     </p:spTree>
     <p:extLst>
       <p:ext uri="{BB962C8B-B14F-4D97-AF65-F5344CB8AC3E}">
-        <p14:creationId xmlns:p14="http://schemas.microsoft.com/office/powerpoint/2010/main" val="940606226"/>
+        <p14:creationId xmlns:p14="http://schemas.microsoft.com/office/powerpoint/2010/main" val="123981068"/>
       </p:ext>
     </p:extLst>
   </p:cSld>
@@ -3899,7 +4183,7 @@
           <p:cNvPr id="6" name="">
             <a:extLst xmlns:a="http://schemas.openxmlformats.org/drawingml/2006/main">
               <a:ext uri="{FF2B5EF4-FFF2-40B4-BE49-F238E27FC236}">
-                <a16:creationId xmlns:a16="http://schemas.microsoft.com/office/drawing/2014/main" id="{C4B159E0-937F-40E1-BBBC-41F78047EFA6}"/>
+                <a16:creationId xmlns:a16="http://schemas.microsoft.com/office/drawing/2014/main" id="{85362110-1BE8-48D5-A688-8697923BDD05}"/>
               </a:ext>
             </a:extLst>
           </p:cNvPr>
@@ -3957,7 +4241,7 @@
                 <a:ea typeface="Arial"/>
                 <a:cs typeface="Arial"/>
               </a:rPr>
-              <a:t>Reconstruction and Gaussian boundaries</a:t>
+              <a:t>Native calibration and clock limits</a:t>
             </a:r>
           </a:p>
         </p:txBody>
@@ -3967,7 +4251,7 @@
           <p:cNvPr id="2" name="">
             <a:extLst xmlns:a="http://schemas.openxmlformats.org/drawingml/2006/main">
               <a:ext uri="{FF2B5EF4-FFF2-40B4-BE49-F238E27FC236}">
-                <a16:creationId xmlns:a16="http://schemas.microsoft.com/office/drawing/2014/main" id="{1934956B-858A-4A63-AC96-20F334A82A04}"/>
+                <a16:creationId xmlns:a16="http://schemas.microsoft.com/office/drawing/2014/main" id="{93AB8711-5035-4FA1-9AB9-68350E7BB019}"/>
               </a:ext>
             </a:extLst>
           </p:cNvPr>
@@ -4025,7 +4309,7 @@
                 <a:ea typeface="Arial"/>
                 <a:cs typeface="Arial"/>
               </a:rPr>
-              <a:t>Real photos plus calibrated poses: no verified direct reconstruction loader. Cooked UE mesh/XML import is documented, with Free eligibility unresolved.</a:t>
+              <a:t>Initial camera minus body was (0.3,0,-0.15) m despite the requested (0.3,0,0) mount. Actor-origin explanation is unresolved.</a:t>
             </a:r>
           </a:p>
         </p:txBody>
@@ -4035,7 +4319,7 @@
           <p:cNvPr id="3" name="">
             <a:extLst xmlns:a="http://schemas.openxmlformats.org/drawingml/2006/main">
               <a:ext uri="{FF2B5EF4-FFF2-40B4-BE49-F238E27FC236}">
-                <a16:creationId xmlns:a16="http://schemas.microsoft.com/office/drawing/2014/main" id="{5177812D-90D8-4CD9-ABE5-E5AD7808F40D}"/>
+                <a16:creationId xmlns:a16="http://schemas.microsoft.com/office/drawing/2014/main" id="{EB35698A-652A-4EF6-B8D6-AFFB89692D09}"/>
               </a:ext>
             </a:extLst>
           </p:cNvPr>
@@ -4093,7 +4377,7 @@
                 <a:ea typeface="Arial"/>
                 <a:cs typeface="Arial"/>
               </a:rPr>
-              <a:t>External trajectory replay: a conditional small adapter after camera calibration, with an existing Gaussian scene and renderer.</a:t>
+              <a:t>FOV axis, projection, optical axes, color/orientation and achieved extrinsics need independent checks for native calibrated images.</a:t>
             </a:r>
           </a:p>
         </p:txBody>
@@ -4103,7 +4387,7 @@
           <p:cNvPr id="4" name="">
             <a:extLst xmlns:a="http://schemas.openxmlformats.org/drawingml/2006/main">
               <a:ext uri="{FF2B5EF4-FFF2-40B4-BE49-F238E27FC236}">
-                <a16:creationId xmlns:a16="http://schemas.microsoft.com/office/drawing/2014/main" id="{6F7F11BB-063C-4D46-A99E-22DF2646D142}"/>
+                <a16:creationId xmlns:a16="http://schemas.microsoft.com/office/drawing/2014/main" id="{A17B8F28-0EDF-42C6-B522-0C9BDCDE80A5}"/>
               </a:ext>
             </a:extLst>
           </p:cNvPr>
@@ -4161,7 +4445,7 @@
                 <a:ea typeface="Arial"/>
                 <a:cs typeface="Arial"/>
               </a:rPr>
-              <a:t>Native RGB replacement or a visual closed loop: unresolved supported contract and substantial integration. Collision/depth and clock ownership need separate services.</a:t>
+              <a:t>Acquisition UTC is unknown. A2 began with an old-looking image clock. No latency or geometric pass follows from receiver timestamps.</a:t>
             </a:r>
           </a:p>
         </p:txBody>
@@ -4171,7 +4455,7 @@
           <p:cNvPr id="5" name="">
             <a:extLst xmlns:a="http://schemas.openxmlformats.org/drawingml/2006/main">
               <a:ext uri="{FF2B5EF4-FFF2-40B4-BE49-F238E27FC236}">
-                <a16:creationId xmlns:a16="http://schemas.microsoft.com/office/drawing/2014/main" id="{5969C5E3-BB31-4F38-8F65-A95F4F23221E}"/>
+                <a16:creationId xmlns:a16="http://schemas.microsoft.com/office/drawing/2014/main" id="{1D47BA6B-685A-4541-8E91-F408AF80BC4C}"/>
               </a:ext>
             </a:extLst>
           </p:cNvPr>
@@ -4229,7 +4513,7 @@
                 <a:ea typeface="Arial"/>
                 <a:cs typeface="Arial"/>
               </a:rPr>
-              <a:t>Measured stock integration. Calibration and real-scene fidelity remain incomplete.   10 / 12</a:t>
+              <a:t>Stock integration evidence · offline handoff 11 October 2026   10 / 16</a:t>
             </a:r>
           </a:p>
         </p:txBody>
@@ -4237,7 +4521,7 @@
     </p:spTree>
     <p:extLst>
       <p:ext uri="{BB962C8B-B14F-4D97-AF65-F5344CB8AC3E}">
-        <p14:creationId xmlns:p14="http://schemas.microsoft.com/office/powerpoint/2010/main" val="1489995270"/>
+        <p14:creationId xmlns:p14="http://schemas.microsoft.com/office/powerpoint/2010/main" val="392970788"/>
       </p:ext>
     </p:extLst>
   </p:cSld>
@@ -4265,10 +4549,10 @@
       </p:grpSpPr>
       <p:sp>
         <p:nvSpPr>
-          <p:cNvPr id="6" name="">
-            <a:extLst xmlns:a="http://schemas.openxmlformats.org/drawingml/2006/main">
-              <a:ext uri="{FF2B5EF4-FFF2-40B4-BE49-F238E27FC236}">
-                <a16:creationId xmlns:a16="http://schemas.microsoft.com/office/drawing/2014/main" id="{C76A09F5-3F1E-46CD-A6F5-4C3C4340E983}"/>
+          <p:cNvPr id="7" name="">
+            <a:extLst xmlns:a="http://schemas.openxmlformats.org/drawingml/2006/main">
+              <a:ext uri="{FF2B5EF4-FFF2-40B4-BE49-F238E27FC236}">
+                <a16:creationId xmlns:a16="http://schemas.microsoft.com/office/drawing/2014/main" id="{73C5100E-929B-4B35-B588-3B88BA36C4F4}"/>
               </a:ext>
             </a:extLst>
           </p:cNvPr>
@@ -4326,29 +4610,57 @@
                 <a:ea typeface="Arial"/>
                 <a:cs typeface="Arial"/>
               </a:rPr>
-              <a:t>Scoped R4R decision</a:t>
-            </a:r>
-          </a:p>
-        </p:txBody>
-      </p:sp>
-      <p:sp>
-        <p:nvSpPr>
+              <a:t>Hardware and measurement coverage</a:t>
+            </a:r>
+          </a:p>
+        </p:txBody>
+      </p:sp>
+      <p:pic>
+        <p:nvPicPr>
           <p:cNvPr id="2" name="">
             <a:extLst xmlns:a="http://schemas.openxmlformats.org/drawingml/2006/main">
               <a:ext uri="{FF2B5EF4-FFF2-40B4-BE49-F238E27FC236}">
-                <a16:creationId xmlns:a16="http://schemas.microsoft.com/office/drawing/2014/main" id="{9514F90B-9EC3-4F8F-92FC-54683A35E422}"/>
-              </a:ext>
-            </a:extLst>
-          </p:cNvPr>
-          <p:cNvSpPr>
-            <a:spLocks xmlns:a="http://schemas.openxmlformats.org/drawingml/2006/main" noGrp="1"/>
-          </p:cNvSpPr>
+                <a16:creationId xmlns:a16="http://schemas.microsoft.com/office/drawing/2014/main" id="{1CCD1CE0-2262-4848-87AF-363F78414855}"/>
+              </a:ext>
+            </a:extLst>
+          </p:cNvPr>
+          <p:cNvPicPr>
+            <a:picLocks xmlns:a="http://schemas.openxmlformats.org/drawingml/2006/main" noChangeAspect="1"/>
+          </p:cNvPicPr>
           <p:nvPr/>
-        </p:nvSpPr>
-        <p:spPr>
-          <a:xfrm xmlns:a="http://schemas.openxmlformats.org/drawingml/2006/main">
-            <a:off x="685800" y="1666875"/>
-            <a:ext cx="10820400" cy="1066800"/>
+        </p:nvPicPr>
+        <p:blipFill>
+          <a:blip xmlns:r="http://schemas.openxmlformats.org/officeDocument/2006/relationships" xmlns:a="http://schemas.openxmlformats.org/drawingml/2006/main" r:embed="Rc4b2d9940cb34988"/>
+          <a:stretch xmlns:a="http://schemas.openxmlformats.org/drawingml/2006/main"/>
+        </p:blipFill>
+        <p:spPr>
+          <a:xfrm xmlns:a="http://schemas.openxmlformats.org/drawingml/2006/main">
+            <a:off x="698500" y="1381125"/>
+            <a:ext cx="10795000" cy="3238500"/>
+          </a:xfrm>
+          <a:prstGeom xmlns:a="http://schemas.openxmlformats.org/drawingml/2006/main" prst="rect">
+            <a:avLst/>
+          </a:prstGeom>
+        </p:spPr>
+      </p:pic>
+      <p:sp>
+        <p:nvSpPr>
+          <p:cNvPr id="3" name="">
+            <a:extLst xmlns:a="http://schemas.openxmlformats.org/drawingml/2006/main">
+              <a:ext uri="{FF2B5EF4-FFF2-40B4-BE49-F238E27FC236}">
+                <a16:creationId xmlns:a16="http://schemas.microsoft.com/office/drawing/2014/main" id="{1C5C5A72-65C3-48AB-BEE1-34A8A0EFC65F}"/>
+              </a:ext>
+            </a:extLst>
+          </p:cNvPr>
+          <p:cNvSpPr>
+            <a:spLocks xmlns:a="http://schemas.openxmlformats.org/drawingml/2006/main" noGrp="1"/>
+          </p:cNvSpPr>
+          <p:nvPr/>
+        </p:nvSpPr>
+        <p:spPr>
+          <a:xfrm xmlns:a="http://schemas.openxmlformats.org/drawingml/2006/main">
+            <a:off x="685800" y="4762500"/>
+            <a:ext cx="10820400" cy="457200"/>
           </a:xfrm>
           <a:prstGeom xmlns:a="http://schemas.openxmlformats.org/drawingml/2006/main" prst="rect">
             <a:avLst/>
@@ -4364,7 +4676,7 @@
           </a:bodyPr>
           <a:lstStyle xmlns:a="http://schemas.openxmlformats.org/drawingml/2006/main">
             <a:defPPr>
-              <a:defRPr sz="2100" b="0">
+              <a:defRPr sz="1500" b="0">
                 <a:solidFill>
                   <a:srgbClr val="102D3B"/>
                 </a:solidFill>
@@ -4376,7 +4688,7 @@
           </a:lstStyle>
           <a:p xmlns:a="http://schemas.openxmlformats.org/drawingml/2006/main">
             <a:pPr>
-              <a:defRPr sz="2100" b="0">
+              <a:defRPr sz="1500" b="0">
                 <a:solidFill>
                   <a:srgbClr val="102D3B"/>
                 </a:solidFill>
@@ -4386,7 +4698,7 @@
               </a:defRPr>
             </a:pPr>
             <a:r>
-              <a:rPr sz="2100" b="0">
+              <a:rPr sz="1500" b="0">
                 <a:solidFill>
                   <a:srgbClr val="102D3B"/>
                 </a:solidFill>
@@ -4394,17 +4706,17 @@
                 <a:ea typeface="Arial"/>
                 <a:cs typeface="Arial"/>
               </a:rPr>
-              <a:t>Reuse as a dynamics/control host and keep a native RGB baseline for integration experiments.</a:t>
-            </a:r>
-          </a:p>
-        </p:txBody>
-      </p:sp>
-      <p:sp>
-        <p:nvSpPr>
-          <p:cNvPr id="3" name="">
-            <a:extLst xmlns:a="http://schemas.openxmlformats.org/drawingml/2006/main">
-              <a:ext uri="{FF2B5EF4-FFF2-40B4-BE49-F238E27FC236}">
-                <a16:creationId xmlns:a16="http://schemas.microsoft.com/office/drawing/2014/main" id="{CC4DF56E-E691-4B7F-A21D-8ABC7947E89E}"/>
+              <a:t>L4 / Windows Server 2025 / WSL1 worked on this host. 8 logical CPUs, 32 GB RAM, 400 GB SSD.</a:t>
+            </a:r>
+          </a:p>
+        </p:txBody>
+      </p:sp>
+      <p:sp>
+        <p:nvSpPr>
+          <p:cNvPr id="4" name="">
+            <a:extLst xmlns:a="http://schemas.openxmlformats.org/drawingml/2006/main">
+              <a:ext uri="{FF2B5EF4-FFF2-40B4-BE49-F238E27FC236}">
+                <a16:creationId xmlns:a16="http://schemas.microsoft.com/office/drawing/2014/main" id="{0798D81D-C2AB-4B82-BC1D-3E3CFCD8BE4B}"/>
               </a:ext>
             </a:extLst>
           </p:cNvPr>
@@ -4415,8 +4727,8 @@
         </p:nvSpPr>
         <p:spPr>
           <a:xfrm xmlns:a="http://schemas.openxmlformats.org/drawingml/2006/main">
-            <a:off x="685800" y="2886075"/>
-            <a:ext cx="10820400" cy="1066800"/>
+            <a:off x="685800" y="5238750"/>
+            <a:ext cx="10820400" cy="457200"/>
           </a:xfrm>
           <a:prstGeom xmlns:a="http://schemas.openxmlformats.org/drawingml/2006/main" prst="rect">
             <a:avLst/>
@@ -4432,7 +4744,7 @@
           </a:bodyPr>
           <a:lstStyle xmlns:a="http://schemas.openxmlformats.org/drawingml/2006/main">
             <a:defPPr>
-              <a:defRPr sz="2100" b="0">
+              <a:defRPr sz="1500" b="0">
                 <a:solidFill>
                   <a:srgbClr val="344955"/>
                 </a:solidFill>
@@ -4444,7 +4756,7 @@
           </a:lstStyle>
           <a:p xmlns:a="http://schemas.openxmlformats.org/drawingml/2006/main">
             <a:pPr>
-              <a:defRPr sz="2100" b="0">
+              <a:defRPr sz="1500" b="0">
                 <a:solidFill>
                   <a:srgbClr val="344955"/>
                 </a:solidFill>
@@ -4454,7 +4766,7 @@
               </a:defRPr>
             </a:pPr>
             <a:r>
-              <a:rPr sz="2100" b="0">
+              <a:rPr sz="1500" b="0">
                 <a:solidFill>
                   <a:srgbClr val="344955"/>
                 </a:solidFill>
@@ -4462,17 +4774,17 @@
                 <a:ea typeface="Arial"/>
                 <a:cs typeface="Arial"/>
               </a:rPr>
-              <a:t>Defer calibrated replay and R4R reconstruction rendering until corrected rotations, projection/extrinsics and acquisition timing are verified.</a:t>
-            </a:r>
-          </a:p>
-        </p:txBody>
-      </p:sp>
-      <p:sp>
-        <p:nvSpPr>
-          <p:cNvPr id="4" name="">
-            <a:extLst xmlns:a="http://schemas.openxmlformats.org/drawingml/2006/main">
-              <a:ext uri="{FF2B5EF4-FFF2-40B4-BE49-F238E27FC236}">
-                <a16:creationId xmlns:a16="http://schemas.microsoft.com/office/drawing/2014/main" id="{45D940D2-E85C-4EEE-937D-21170FA95E5F}"/>
+              <a:t>Whole-window GPU peaks: B1 1,761 MiB, B2 1,758 MiB. Mean utilization: 16.93% and 17.47%.</a:t>
+            </a:r>
+          </a:p>
+        </p:txBody>
+      </p:sp>
+      <p:sp>
+        <p:nvSpPr>
+          <p:cNvPr id="5" name="">
+            <a:extLst xmlns:a="http://schemas.openxmlformats.org/drawingml/2006/main">
+              <a:ext uri="{FF2B5EF4-FFF2-40B4-BE49-F238E27FC236}">
+                <a16:creationId xmlns:a16="http://schemas.microsoft.com/office/drawing/2014/main" id="{B91594E4-5178-41AB-B96A-CFA33B965E66}"/>
               </a:ext>
             </a:extLst>
           </p:cNvPr>
@@ -4483,8 +4795,8 @@
         </p:nvSpPr>
         <p:spPr>
           <a:xfrm xmlns:a="http://schemas.openxmlformats.org/drawingml/2006/main">
-            <a:off x="685800" y="4105275"/>
-            <a:ext cx="10820400" cy="1066800"/>
+            <a:off x="685800" y="5715000"/>
+            <a:ext cx="10820400" cy="457200"/>
           </a:xfrm>
           <a:prstGeom xmlns:a="http://schemas.openxmlformats.org/drawingml/2006/main" prst="rect">
             <a:avLst/>
@@ -4500,7 +4812,7 @@
           </a:bodyPr>
           <a:lstStyle xmlns:a="http://schemas.openxmlformats.org/drawingml/2006/main">
             <a:defPPr>
-              <a:defRPr sz="2100" b="0">
+              <a:defRPr sz="1500" b="0">
                 <a:solidFill>
                   <a:srgbClr val="344955"/>
                 </a:solidFill>
@@ -4512,7 +4824,7 @@
           </a:lstStyle>
           <a:p xmlns:a="http://schemas.openxmlformats.org/drawingml/2006/main">
             <a:pPr>
-              <a:defRPr sz="2100" b="0">
+              <a:defRPr sz="1500" b="0">
                 <a:solidFill>
                   <a:srgbClr val="344955"/>
                 </a:solidFill>
@@ -4522,7 +4834,7 @@
               </a:defRPr>
             </a:pPr>
             <a:r>
-              <a:rPr sz="2100" b="0">
+              <a:rPr sz="1500" b="0">
                 <a:solidFill>
                   <a:srgbClr val="344955"/>
                 </a:solidFill>
@@ -4530,17 +4842,17 @@
                 <a:ea typeface="Arial"/>
                 <a:cs typeface="Arial"/>
               </a:rPr>
-              <a:t>Indoor navigation, residential/campus views below 100 m, sparse capture and racing remain research questions. C is blocked by missing compatible released weights and task adapter.</a:t>
-            </a:r>
-          </a:p>
-        </p:txBody>
-      </p:sp>
-      <p:sp>
-        <p:nvSpPr>
-          <p:cNvPr id="5" name="">
-            <a:extLst xmlns:a="http://schemas.openxmlformats.org/drawingml/2006/main">
-              <a:ext uri="{FF2B5EF4-FFF2-40B4-BE49-F238E27FC236}">
-                <a16:creationId xmlns:a16="http://schemas.microsoft.com/office/drawing/2014/main" id="{9774707D-9ACF-49F4-A840-46DA0957F7DC}"/>
+              <a:t>Desktop and Moonlight share the samples. B2 coverage ends mid-flight. Minimum VRAM, total RAM and renderer-only throughput are unknown.</a:t>
+            </a:r>
+          </a:p>
+        </p:txBody>
+      </p:sp>
+      <p:sp>
+        <p:nvSpPr>
+          <p:cNvPr id="6" name="">
+            <a:extLst xmlns:a="http://schemas.openxmlformats.org/drawingml/2006/main">
+              <a:ext uri="{FF2B5EF4-FFF2-40B4-BE49-F238E27FC236}">
+                <a16:creationId xmlns:a16="http://schemas.microsoft.com/office/drawing/2014/main" id="{104776DA-613C-471C-94EE-D998924FA0F7}"/>
               </a:ext>
             </a:extLst>
           </p:cNvPr>
@@ -4598,7 +4910,7 @@
                 <a:ea typeface="Arial"/>
                 <a:cs typeface="Arial"/>
               </a:rPr>
-              <a:t>Measured stock integration. Calibration and real-scene fidelity remain incomplete.   11 / 12</a:t>
+              <a:t>Stock integration evidence · offline handoff 11 October 2026   11 / 16</a:t>
             </a:r>
           </a:p>
         </p:txBody>
@@ -4606,7 +4918,7 @@
     </p:spTree>
     <p:extLst>
       <p:ext uri="{BB962C8B-B14F-4D97-AF65-F5344CB8AC3E}">
-        <p14:creationId xmlns:p14="http://schemas.microsoft.com/office/powerpoint/2010/main" val="815841900"/>
+        <p14:creationId xmlns:p14="http://schemas.microsoft.com/office/powerpoint/2010/main" val="1670832069"/>
       </p:ext>
     </p:extLst>
   </p:cSld>
@@ -4637,7 +4949,7 @@
           <p:cNvPr id="6" name="">
             <a:extLst xmlns:a="http://schemas.openxmlformats.org/drawingml/2006/main">
               <a:ext uri="{FF2B5EF4-FFF2-40B4-BE49-F238E27FC236}">
-                <a16:creationId xmlns:a16="http://schemas.microsoft.com/office/drawing/2014/main" id="{1BEE1949-BD34-4E94-9308-9888385D2687}"/>
+                <a16:creationId xmlns:a16="http://schemas.microsoft.com/office/drawing/2014/main" id="{C18F2CD7-9016-4796-9A04-288CB83C3D69}"/>
               </a:ext>
             </a:extLst>
           </p:cNvPr>
@@ -4695,7 +5007,7 @@
                 <a:ea typeface="Arial"/>
                 <a:cs typeface="Arial"/>
               </a:rPr>
-              <a:t>Preservation and the next review</a:t>
+              <a:t>Cleanup lifecycle and evidence boundaries</a:t>
             </a:r>
           </a:p>
         </p:txBody>
@@ -4705,7 +5017,7 @@
           <p:cNvPr id="2" name="">
             <a:extLst xmlns:a="http://schemas.openxmlformats.org/drawingml/2006/main">
               <a:ext uri="{FF2B5EF4-FFF2-40B4-BE49-F238E27FC236}">
-                <a16:creationId xmlns:a16="http://schemas.microsoft.com/office/drawing/2014/main" id="{57AEF816-3229-43B7-8AB4-72FC4650AF7B}"/>
+                <a16:creationId xmlns:a16="http://schemas.microsoft.com/office/drawing/2014/main" id="{FC8F0F62-D87F-4B4D-B73E-CD2641B52C3F}"/>
               </a:ext>
             </a:extLst>
           </p:cNvPr>
@@ -4763,7 +5075,7 @@
                 <a:ea typeface="Arial"/>
                 <a:cs typeface="Arial"/>
               </a:rPr>
-              <a:t>Three ZIP checkpoints passed hashes and internal manifests on the Mac. Main telemetry, 1,237 frames, configs, executed sources and B1 native flight log are preserved.</a:t>
+              <a:t>Flight records confirm landing and disarming in both B runs. Separate cleanup evaluators also returned confirmation summaries.</a:t>
             </a:r>
           </a:p>
         </p:txBody>
@@ -4773,7 +5085,7 @@
           <p:cNvPr id="3" name="">
             <a:extLst xmlns:a="http://schemas.openxmlformats.org/drawingml/2006/main">
               <a:ext uri="{FF2B5EF4-FFF2-40B4-BE49-F238E27FC236}">
-                <a16:creationId xmlns:a16="http://schemas.microsoft.com/office/drawing/2014/main" id="{A07F1F10-3A51-40BD-A34C-B155EA3B2AF0}"/>
+                <a16:creationId xmlns:a16="http://schemas.microsoft.com/office/drawing/2014/main" id="{A7F43357-D990-4E52-B236-602D1CD3B18D}"/>
               </a:ext>
             </a:extLst>
           </p:cNvPr>
@@ -4831,7 +5143,7 @@
                 <a:ea typeface="Arial"/>
                 <a:cs typeface="Arial"/>
               </a:rPr>
-              <a:t>AirGPU is verified Off. Final transcript, B2 native flight log and the strict A1 retest remain on its stopped disk.</a:t>
+              <a:t>Our cleanup workers stayed alive until the 15 s deadline, exit -15. Raw cleanup logs are empty. The queue/finalizer cause remains unresolved.</a:t>
             </a:r>
           </a:p>
         </p:txBody>
@@ -4841,7 +5153,7 @@
           <p:cNvPr id="4" name="">
             <a:extLst xmlns:a="http://schemas.openxmlformats.org/drawingml/2006/main">
               <a:ext uri="{FF2B5EF4-FFF2-40B4-BE49-F238E27FC236}">
-                <a16:creationId xmlns:a16="http://schemas.microsoft.com/office/drawing/2014/main" id="{35D8A096-DF80-41B3-88CC-5BB133A01737}"/>
+                <a16:creationId xmlns:a16="http://schemas.microsoft.com/office/drawing/2014/main" id="{3FDD22F0-8913-48C8-88CB-8A4064843844}"/>
               </a:ext>
             </a:extLst>
           </p:cNvPr>
@@ -4899,7 +5211,7 @@
                 <a:ea typeface="Arial"/>
                 <a:cs typeface="Arial"/>
               </a:rPr>
-              <a:t>Read Link/FlightEvaluation, camera handshake, SDK degree versus yaw-radian conventions, and the clock diagnostics. Next work is corrected calibrated A and missing-file recovery.</a:t>
+              <a:t>Local lifecycle fixes need a Windows retest only if the unattended helper will be reused. This issue does not invalidate the retained flight passes.</a:t>
             </a:r>
           </a:p>
         </p:txBody>
@@ -4909,7 +5221,7 @@
           <p:cNvPr id="5" name="">
             <a:extLst xmlns:a="http://schemas.openxmlformats.org/drawingml/2006/main">
               <a:ext uri="{FF2B5EF4-FFF2-40B4-BE49-F238E27FC236}">
-                <a16:creationId xmlns:a16="http://schemas.microsoft.com/office/drawing/2014/main" id="{359AD05A-BAAD-476E-8468-363E9D3F61F8}"/>
+                <a16:creationId xmlns:a16="http://schemas.microsoft.com/office/drawing/2014/main" id="{8A60C147-45F7-4670-972A-F7E678B46449}"/>
               </a:ext>
             </a:extLst>
           </p:cNvPr>
@@ -4967,7 +5279,7 @@
                 <a:ea typeface="Arial"/>
                 <a:cs typeface="Arial"/>
               </a:rPr>
-              <a:t>Measured stock integration. Calibration and real-scene fidelity remain incomplete.   12 / 12</a:t>
+              <a:t>Stock integration evidence · offline handoff 11 October 2026   12 / 16</a:t>
             </a:r>
           </a:p>
         </p:txBody>
@@ -4975,7 +5287,2223 @@
     </p:spTree>
     <p:extLst>
       <p:ext uri="{BB962C8B-B14F-4D97-AF65-F5344CB8AC3E}">
-        <p14:creationId xmlns:p14="http://schemas.microsoft.com/office/powerpoint/2010/main" val="546959249"/>
+        <p14:creationId xmlns:p14="http://schemas.microsoft.com/office/powerpoint/2010/main" val="1647109420"/>
+      </p:ext>
+    </p:extLst>
+  </p:cSld>
+</p:sld>
+</file>
+
+<file path=ppt/slides/slide13.xml><?xml version="1.0" encoding="utf-8"?>
+<p:sld xmlns:p="http://schemas.openxmlformats.org/presentationml/2006/main">
+  <p:cSld>
+    <p:bg>
+      <p:bgPr>
+        <a:solidFill xmlns:a="http://schemas.openxmlformats.org/drawingml/2006/main">
+          <a:srgbClr val="FFFFFF"/>
+        </a:solidFill>
+      </p:bgPr>
+    </p:bg>
+    <p:spTree>
+      <p:nvGrpSpPr>
+        <p:cNvPr id="1" name=""/>
+        <p:cNvGrpSpPr/>
+        <p:nvPr/>
+      </p:nvGrpSpPr>
+      <p:grpSpPr>
+        <a:xfrm xmlns:a="http://schemas.openxmlformats.org/drawingml/2006/main"/>
+      </p:grpSpPr>
+      <p:sp>
+        <p:nvSpPr>
+          <p:cNvPr id="19" name="">
+            <a:extLst xmlns:a="http://schemas.openxmlformats.org/drawingml/2006/main">
+              <a:ext uri="{FF2B5EF4-FFF2-40B4-BE49-F238E27FC236}">
+                <a16:creationId xmlns:a16="http://schemas.microsoft.com/office/drawing/2014/main" id="{3E206BA4-1A56-4485-B20E-449FB7F8F168}"/>
+              </a:ext>
+            </a:extLst>
+          </p:cNvPr>
+          <p:cNvSpPr>
+            <a:spLocks xmlns:a="http://schemas.openxmlformats.org/drawingml/2006/main" noGrp="1"/>
+          </p:cNvSpPr>
+          <p:nvPr/>
+        </p:nvSpPr>
+        <p:spPr>
+          <a:xfrm xmlns:a="http://schemas.openxmlformats.org/drawingml/2006/main">
+            <a:off x="685800" y="476250"/>
+            <a:ext cx="10820400" cy="819150"/>
+          </a:xfrm>
+          <a:prstGeom xmlns:a="http://schemas.openxmlformats.org/drawingml/2006/main" prst="rect">
+            <a:avLst/>
+          </a:prstGeom>
+          <a:noFill xmlns:a="http://schemas.openxmlformats.org/drawingml/2006/main"/>
+          <a:ln xmlns:a="http://schemas.openxmlformats.org/drawingml/2006/main" w="0">
+            <a:noFill/>
+          </a:ln>
+        </p:spPr>
+        <p:txBody>
+          <a:bodyPr xmlns:a="http://schemas.openxmlformats.org/drawingml/2006/main">
+            <a:noAutofit/>
+          </a:bodyPr>
+          <a:lstStyle xmlns:a="http://schemas.openxmlformats.org/drawingml/2006/main">
+            <a:defPPr>
+              <a:defRPr sz="3300" b="1">
+                <a:solidFill>
+                  <a:srgbClr val="102D3B"/>
+                </a:solidFill>
+                <a:latin typeface="Arial"/>
+                <a:ea typeface="Arial"/>
+                <a:cs typeface="Arial"/>
+              </a:defRPr>
+            </a:defPPr>
+          </a:lstStyle>
+          <a:p xmlns:a="http://schemas.openxmlformats.org/drawingml/2006/main">
+            <a:pPr>
+              <a:defRPr sz="3300" b="1">
+                <a:solidFill>
+                  <a:srgbClr val="102D3B"/>
+                </a:solidFill>
+                <a:latin typeface="Arial"/>
+                <a:ea typeface="Arial"/>
+                <a:cs typeface="Arial"/>
+              </a:defRPr>
+            </a:pPr>
+            <a:r>
+              <a:rPr sz="3300" b="1">
+                <a:solidFill>
+                  <a:srgbClr val="102D3B"/>
+                </a:solidFill>
+                <a:latin typeface="Arial"/>
+                <a:ea typeface="Arial"/>
+                <a:cs typeface="Arial"/>
+              </a:rPr>
+              <a:t>R4R reuse options</a:t>
+            </a:r>
+          </a:p>
+        </p:txBody>
+      </p:sp>
+      <p:sp>
+        <p:nvSpPr>
+          <p:cNvPr id="2" name="">
+            <a:extLst xmlns:a="http://schemas.openxmlformats.org/drawingml/2006/main">
+              <a:ext uri="{FF2B5EF4-FFF2-40B4-BE49-F238E27FC236}">
+                <a16:creationId xmlns:a16="http://schemas.microsoft.com/office/drawing/2014/main" id="{9BCE4B1C-66AB-4245-8642-4364E6BE04C4}"/>
+              </a:ext>
+            </a:extLst>
+          </p:cNvPr>
+          <p:cNvSpPr>
+            <a:spLocks xmlns:a="http://schemas.openxmlformats.org/drawingml/2006/main" noGrp="1"/>
+          </p:cNvSpPr>
+          <p:nvPr/>
+        </p:nvSpPr>
+        <p:spPr>
+          <a:xfrm xmlns:a="http://schemas.openxmlformats.org/drawingml/2006/main">
+            <a:off x="685800" y="1524000"/>
+            <a:ext cx="10820400" cy="1028700"/>
+          </a:xfrm>
+          <a:prstGeom xmlns:a="http://schemas.openxmlformats.org/drawingml/2006/main" prst="rect">
+            <a:avLst/>
+          </a:prstGeom>
+          <a:solidFill xmlns:a="http://schemas.openxmlformats.org/drawingml/2006/main">
+            <a:srgbClr val="EDF4F6"/>
+          </a:solidFill>
+          <a:ln xmlns:a="http://schemas.openxmlformats.org/drawingml/2006/main" w="9525">
+            <a:solidFill>
+              <a:srgbClr val="CFDDE3"/>
+            </a:solidFill>
+          </a:ln>
+        </p:spPr>
+      </p:sp>
+      <p:sp>
+        <p:nvSpPr>
+          <p:cNvPr id="3" name="">
+            <a:extLst xmlns:a="http://schemas.openxmlformats.org/drawingml/2006/main">
+              <a:ext uri="{FF2B5EF4-FFF2-40B4-BE49-F238E27FC236}">
+                <a16:creationId xmlns:a16="http://schemas.microsoft.com/office/drawing/2014/main" id="{8757DE7F-6340-4399-ABE8-FCBB34C2EE55}"/>
+              </a:ext>
+            </a:extLst>
+          </p:cNvPr>
+          <p:cNvSpPr>
+            <a:spLocks xmlns:a="http://schemas.openxmlformats.org/drawingml/2006/main" noGrp="1"/>
+          </p:cNvSpPr>
+          <p:nvPr/>
+        </p:nvSpPr>
+        <p:spPr>
+          <a:xfrm xmlns:a="http://schemas.openxmlformats.org/drawingml/2006/main">
+            <a:off x="809625" y="1657350"/>
+            <a:ext cx="3000375" cy="857250"/>
+          </a:xfrm>
+          <a:prstGeom xmlns:a="http://schemas.openxmlformats.org/drawingml/2006/main" prst="rect">
+            <a:avLst/>
+          </a:prstGeom>
+          <a:noFill xmlns:a="http://schemas.openxmlformats.org/drawingml/2006/main"/>
+          <a:ln xmlns:a="http://schemas.openxmlformats.org/drawingml/2006/main" w="0">
+            <a:noFill/>
+          </a:ln>
+        </p:spPr>
+        <p:txBody>
+          <a:bodyPr xmlns:a="http://schemas.openxmlformats.org/drawingml/2006/main">
+            <a:noAutofit/>
+          </a:bodyPr>
+          <a:lstStyle xmlns:a="http://schemas.openxmlformats.org/drawingml/2006/main">
+            <a:defPPr>
+              <a:defRPr sz="1800" b="1">
+                <a:solidFill>
+                  <a:srgbClr val="102D3B"/>
+                </a:solidFill>
+                <a:latin typeface="Arial"/>
+                <a:ea typeface="Arial"/>
+                <a:cs typeface="Arial"/>
+              </a:defRPr>
+            </a:defPPr>
+          </a:lstStyle>
+          <a:p xmlns:a="http://schemas.openxmlformats.org/drawingml/2006/main">
+            <a:pPr>
+              <a:defRPr sz="1800" b="1">
+                <a:solidFill>
+                  <a:srgbClr val="102D3B"/>
+                </a:solidFill>
+                <a:latin typeface="Arial"/>
+                <a:ea typeface="Arial"/>
+                <a:cs typeface="Arial"/>
+              </a:defRPr>
+            </a:pPr>
+            <a:r>
+              <a:rPr sz="1800" b="1">
+                <a:solidFill>
+                  <a:srgbClr val="102D3B"/>
+                </a:solidFill>
+                <a:latin typeface="Arial"/>
+                <a:ea typeface="Arial"/>
+                <a:cs typeface="Arial"/>
+              </a:rPr>
+              <a:t>Native visual baseline</a:t>
+            </a:r>
+          </a:p>
+        </p:txBody>
+      </p:sp>
+      <p:sp>
+        <p:nvSpPr>
+          <p:cNvPr id="4" name="">
+            <a:extLst xmlns:a="http://schemas.openxmlformats.org/drawingml/2006/main">
+              <a:ext uri="{FF2B5EF4-FFF2-40B4-BE49-F238E27FC236}">
+                <a16:creationId xmlns:a16="http://schemas.microsoft.com/office/drawing/2014/main" id="{C5760FE5-07BA-4032-B9F1-688EEBA43A90}"/>
+              </a:ext>
+            </a:extLst>
+          </p:cNvPr>
+          <p:cNvSpPr>
+            <a:spLocks xmlns:a="http://schemas.openxmlformats.org/drawingml/2006/main" noGrp="1"/>
+          </p:cNvSpPr>
+          <p:nvPr/>
+        </p:nvSpPr>
+        <p:spPr>
+          <a:xfrm xmlns:a="http://schemas.openxmlformats.org/drawingml/2006/main">
+            <a:off x="3971925" y="1657350"/>
+            <a:ext cx="2000250" cy="857250"/>
+          </a:xfrm>
+          <a:prstGeom xmlns:a="http://schemas.openxmlformats.org/drawingml/2006/main" prst="rect">
+            <a:avLst/>
+          </a:prstGeom>
+          <a:noFill xmlns:a="http://schemas.openxmlformats.org/drawingml/2006/main"/>
+          <a:ln xmlns:a="http://schemas.openxmlformats.org/drawingml/2006/main" w="0">
+            <a:noFill/>
+          </a:ln>
+        </p:spPr>
+        <p:txBody>
+          <a:bodyPr xmlns:a="http://schemas.openxmlformats.org/drawingml/2006/main">
+            <a:noAutofit/>
+          </a:bodyPr>
+          <a:lstStyle xmlns:a="http://schemas.openxmlformats.org/drawingml/2006/main">
+            <a:defPPr>
+              <a:defRPr sz="1725" b="1">
+                <a:solidFill>
+                  <a:srgbClr val="376A7F"/>
+                </a:solidFill>
+                <a:latin typeface="Arial"/>
+                <a:ea typeface="Arial"/>
+                <a:cs typeface="Arial"/>
+              </a:defRPr>
+            </a:defPPr>
+          </a:lstStyle>
+          <a:p xmlns:a="http://schemas.openxmlformats.org/drawingml/2006/main">
+            <a:pPr>
+              <a:defRPr sz="1725" b="1">
+                <a:solidFill>
+                  <a:srgbClr val="376A7F"/>
+                </a:solidFill>
+                <a:latin typeface="Arial"/>
+                <a:ea typeface="Arial"/>
+                <a:cs typeface="Arial"/>
+              </a:defRPr>
+            </a:pPr>
+            <a:r>
+              <a:rPr sz="1725" b="1">
+                <a:solidFill>
+                  <a:srgbClr val="376A7F"/>
+                </a:solidFill>
+                <a:latin typeface="Arial"/>
+                <a:ea typeface="Arial"/>
+                <a:cs typeface="Arial"/>
+              </a:rPr>
+              <a:t>Demonstrated</a:t>
+            </a:r>
+          </a:p>
+        </p:txBody>
+      </p:sp>
+      <p:sp>
+        <p:nvSpPr>
+          <p:cNvPr id="5" name="">
+            <a:extLst xmlns:a="http://schemas.openxmlformats.org/drawingml/2006/main">
+              <a:ext uri="{FF2B5EF4-FFF2-40B4-BE49-F238E27FC236}">
+                <a16:creationId xmlns:a16="http://schemas.microsoft.com/office/drawing/2014/main" id="{22A774C8-EE0A-4CEF-B12F-853110D5C004}"/>
+              </a:ext>
+            </a:extLst>
+          </p:cNvPr>
+          <p:cNvSpPr>
+            <a:spLocks xmlns:a="http://schemas.openxmlformats.org/drawingml/2006/main" noGrp="1"/>
+          </p:cNvSpPr>
+          <p:nvPr/>
+        </p:nvSpPr>
+        <p:spPr>
+          <a:xfrm xmlns:a="http://schemas.openxmlformats.org/drawingml/2006/main">
+            <a:off x="6191250" y="1657350"/>
+            <a:ext cx="5191125" cy="857250"/>
+          </a:xfrm>
+          <a:prstGeom xmlns:a="http://schemas.openxmlformats.org/drawingml/2006/main" prst="rect">
+            <a:avLst/>
+          </a:prstGeom>
+          <a:noFill xmlns:a="http://schemas.openxmlformats.org/drawingml/2006/main"/>
+          <a:ln xmlns:a="http://schemas.openxmlformats.org/drawingml/2006/main" w="0">
+            <a:noFill/>
+          </a:ln>
+        </p:spPr>
+        <p:txBody>
+          <a:bodyPr xmlns:a="http://schemas.openxmlformats.org/drawingml/2006/main">
+            <a:noAutofit/>
+          </a:bodyPr>
+          <a:lstStyle xmlns:a="http://schemas.openxmlformats.org/drawingml/2006/main">
+            <a:defPPr>
+              <a:defRPr sz="1725" b="0">
+                <a:solidFill>
+                  <a:srgbClr val="344955"/>
+                </a:solidFill>
+                <a:latin typeface="Arial"/>
+                <a:ea typeface="Arial"/>
+                <a:cs typeface="Arial"/>
+              </a:defRPr>
+            </a:defPPr>
+          </a:lstStyle>
+          <a:p xmlns:a="http://schemas.openxmlformats.org/drawingml/2006/main">
+            <a:pPr>
+              <a:defRPr sz="1725" b="0">
+                <a:solidFill>
+                  <a:srgbClr val="344955"/>
+                </a:solidFill>
+                <a:latin typeface="Arial"/>
+                <a:ea typeface="Arial"/>
+                <a:cs typeface="Arial"/>
+              </a:defRPr>
+            </a:pPr>
+            <a:r>
+              <a:rPr sz="1725" b="0">
+                <a:solidFill>
+                  <a:srgbClr val="344955"/>
+                </a:solidFill>
+                <a:latin typeface="Arial"/>
+                <a:ea typeface="Arial"/>
+                <a:cs typeface="Arial"/>
+              </a:rPr>
+              <a:t>Stock RGB and control integration. Native calibration needed for geometric comparison.</a:t>
+            </a:r>
+          </a:p>
+        </p:txBody>
+      </p:sp>
+      <p:sp>
+        <p:nvSpPr>
+          <p:cNvPr id="6" name="">
+            <a:extLst xmlns:a="http://schemas.openxmlformats.org/drawingml/2006/main">
+              <a:ext uri="{FF2B5EF4-FFF2-40B4-BE49-F238E27FC236}">
+                <a16:creationId xmlns:a16="http://schemas.microsoft.com/office/drawing/2014/main" id="{BB2EDC91-B8F4-4247-B047-F762E04BB925}"/>
+              </a:ext>
+            </a:extLst>
+          </p:cNvPr>
+          <p:cNvSpPr>
+            <a:spLocks xmlns:a="http://schemas.openxmlformats.org/drawingml/2006/main" noGrp="1"/>
+          </p:cNvSpPr>
+          <p:nvPr/>
+        </p:nvSpPr>
+        <p:spPr>
+          <a:xfrm xmlns:a="http://schemas.openxmlformats.org/drawingml/2006/main">
+            <a:off x="685800" y="2638425"/>
+            <a:ext cx="10820400" cy="1028700"/>
+          </a:xfrm>
+          <a:prstGeom xmlns:a="http://schemas.openxmlformats.org/drawingml/2006/main" prst="rect">
+            <a:avLst/>
+          </a:prstGeom>
+          <a:solidFill xmlns:a="http://schemas.openxmlformats.org/drawingml/2006/main">
+            <a:srgbClr val="FFFFFF"/>
+          </a:solidFill>
+          <a:ln xmlns:a="http://schemas.openxmlformats.org/drawingml/2006/main" w="9525">
+            <a:solidFill>
+              <a:srgbClr val="CFDDE3"/>
+            </a:solidFill>
+          </a:ln>
+        </p:spPr>
+      </p:sp>
+      <p:sp>
+        <p:nvSpPr>
+          <p:cNvPr id="7" name="">
+            <a:extLst xmlns:a="http://schemas.openxmlformats.org/drawingml/2006/main">
+              <a:ext uri="{FF2B5EF4-FFF2-40B4-BE49-F238E27FC236}">
+                <a16:creationId xmlns:a16="http://schemas.microsoft.com/office/drawing/2014/main" id="{68094C62-C943-490B-A635-86BD1213F228}"/>
+              </a:ext>
+            </a:extLst>
+          </p:cNvPr>
+          <p:cNvSpPr>
+            <a:spLocks xmlns:a="http://schemas.openxmlformats.org/drawingml/2006/main" noGrp="1"/>
+          </p:cNvSpPr>
+          <p:nvPr/>
+        </p:nvSpPr>
+        <p:spPr>
+          <a:xfrm xmlns:a="http://schemas.openxmlformats.org/drawingml/2006/main">
+            <a:off x="809625" y="2771775"/>
+            <a:ext cx="3000375" cy="857250"/>
+          </a:xfrm>
+          <a:prstGeom xmlns:a="http://schemas.openxmlformats.org/drawingml/2006/main" prst="rect">
+            <a:avLst/>
+          </a:prstGeom>
+          <a:noFill xmlns:a="http://schemas.openxmlformats.org/drawingml/2006/main"/>
+          <a:ln xmlns:a="http://schemas.openxmlformats.org/drawingml/2006/main" w="0">
+            <a:noFill/>
+          </a:ln>
+        </p:spPr>
+        <p:txBody>
+          <a:bodyPr xmlns:a="http://schemas.openxmlformats.org/drawingml/2006/main">
+            <a:noAutofit/>
+          </a:bodyPr>
+          <a:lstStyle xmlns:a="http://schemas.openxmlformats.org/drawingml/2006/main">
+            <a:defPPr>
+              <a:defRPr sz="1800" b="1">
+                <a:solidFill>
+                  <a:srgbClr val="102D3B"/>
+                </a:solidFill>
+                <a:latin typeface="Arial"/>
+                <a:ea typeface="Arial"/>
+                <a:cs typeface="Arial"/>
+              </a:defRPr>
+            </a:defPPr>
+          </a:lstStyle>
+          <a:p xmlns:a="http://schemas.openxmlformats.org/drawingml/2006/main">
+            <a:pPr>
+              <a:defRPr sz="1800" b="1">
+                <a:solidFill>
+                  <a:srgbClr val="102D3B"/>
+                </a:solidFill>
+                <a:latin typeface="Arial"/>
+                <a:ea typeface="Arial"/>
+                <a:cs typeface="Arial"/>
+              </a:defRPr>
+            </a:pPr>
+            <a:r>
+              <a:rPr sz="1800" b="1">
+                <a:solidFill>
+                  <a:srgbClr val="102D3B"/>
+                </a:solidFill>
+                <a:latin typeface="Arial"/>
+                <a:ea typeface="Arial"/>
+                <a:cs typeface="Arial"/>
+              </a:rPr>
+              <a:t>Motion to external Gaussian renderer</a:t>
+            </a:r>
+          </a:p>
+        </p:txBody>
+      </p:sp>
+      <p:sp>
+        <p:nvSpPr>
+          <p:cNvPr id="8" name="">
+            <a:extLst xmlns:a="http://schemas.openxmlformats.org/drawingml/2006/main">
+              <a:ext uri="{FF2B5EF4-FFF2-40B4-BE49-F238E27FC236}">
+                <a16:creationId xmlns:a16="http://schemas.microsoft.com/office/drawing/2014/main" id="{20776563-79E3-44A0-9C2C-32ADDA438399}"/>
+              </a:ext>
+            </a:extLst>
+          </p:cNvPr>
+          <p:cNvSpPr>
+            <a:spLocks xmlns:a="http://schemas.openxmlformats.org/drawingml/2006/main" noGrp="1"/>
+          </p:cNvSpPr>
+          <p:nvPr/>
+        </p:nvSpPr>
+        <p:spPr>
+          <a:xfrm xmlns:a="http://schemas.openxmlformats.org/drawingml/2006/main">
+            <a:off x="3971925" y="2771775"/>
+            <a:ext cx="2000250" cy="857250"/>
+          </a:xfrm>
+          <a:prstGeom xmlns:a="http://schemas.openxmlformats.org/drawingml/2006/main" prst="rect">
+            <a:avLst/>
+          </a:prstGeom>
+          <a:noFill xmlns:a="http://schemas.openxmlformats.org/drawingml/2006/main"/>
+          <a:ln xmlns:a="http://schemas.openxmlformats.org/drawingml/2006/main" w="0">
+            <a:noFill/>
+          </a:ln>
+        </p:spPr>
+        <p:txBody>
+          <a:bodyPr xmlns:a="http://schemas.openxmlformats.org/drawingml/2006/main">
+            <a:noAutofit/>
+          </a:bodyPr>
+          <a:lstStyle xmlns:a="http://schemas.openxmlformats.org/drawingml/2006/main">
+            <a:defPPr>
+              <a:defRPr sz="1725" b="1">
+                <a:solidFill>
+                  <a:srgbClr val="376A7F"/>
+                </a:solidFill>
+                <a:latin typeface="Arial"/>
+                <a:ea typeface="Arial"/>
+                <a:cs typeface="Arial"/>
+              </a:defRPr>
+            </a:defPPr>
+          </a:lstStyle>
+          <a:p xmlns:a="http://schemas.openxmlformats.org/drawingml/2006/main">
+            <a:pPr>
+              <a:defRPr sz="1725" b="1">
+                <a:solidFill>
+                  <a:srgbClr val="376A7F"/>
+                </a:solidFill>
+                <a:latin typeface="Arial"/>
+                <a:ea typeface="Arial"/>
+                <a:cs typeface="Arial"/>
+              </a:defRPr>
+            </a:pPr>
+            <a:r>
+              <a:rPr sz="1725" b="1">
+                <a:solidFill>
+                  <a:srgbClr val="376A7F"/>
+                </a:solidFill>
+                <a:latin typeface="Arial"/>
+                <a:ea typeface="Arial"/>
+                <a:cs typeface="Arial"/>
+              </a:rPr>
+              <a:t>Proposed small adapter</a:t>
+            </a:r>
+          </a:p>
+        </p:txBody>
+      </p:sp>
+      <p:sp>
+        <p:nvSpPr>
+          <p:cNvPr id="9" name="">
+            <a:extLst xmlns:a="http://schemas.openxmlformats.org/drawingml/2006/main">
+              <a:ext uri="{FF2B5EF4-FFF2-40B4-BE49-F238E27FC236}">
+                <a16:creationId xmlns:a16="http://schemas.microsoft.com/office/drawing/2014/main" id="{72166A42-1185-4A9A-B2CB-C6519A71F865}"/>
+              </a:ext>
+            </a:extLst>
+          </p:cNvPr>
+          <p:cNvSpPr>
+            <a:spLocks xmlns:a="http://schemas.openxmlformats.org/drawingml/2006/main" noGrp="1"/>
+          </p:cNvSpPr>
+          <p:nvPr/>
+        </p:nvSpPr>
+        <p:spPr>
+          <a:xfrm xmlns:a="http://schemas.openxmlformats.org/drawingml/2006/main">
+            <a:off x="6191250" y="2771775"/>
+            <a:ext cx="5191125" cy="857250"/>
+          </a:xfrm>
+          <a:prstGeom xmlns:a="http://schemas.openxmlformats.org/drawingml/2006/main" prst="rect">
+            <a:avLst/>
+          </a:prstGeom>
+          <a:noFill xmlns:a="http://schemas.openxmlformats.org/drawingml/2006/main"/>
+          <a:ln xmlns:a="http://schemas.openxmlformats.org/drawingml/2006/main" w="0">
+            <a:noFill/>
+          </a:ln>
+        </p:spPr>
+        <p:txBody>
+          <a:bodyPr xmlns:a="http://schemas.openxmlformats.org/drawingml/2006/main">
+            <a:noAutofit/>
+          </a:bodyPr>
+          <a:lstStyle xmlns:a="http://schemas.openxmlformats.org/drawingml/2006/main">
+            <a:defPPr>
+              <a:defRPr sz="1725" b="0">
+                <a:solidFill>
+                  <a:srgbClr val="344955"/>
+                </a:solidFill>
+                <a:latin typeface="Arial"/>
+                <a:ea typeface="Arial"/>
+                <a:cs typeface="Arial"/>
+              </a:defRPr>
+            </a:defPPr>
+          </a:lstStyle>
+          <a:p xmlns:a="http://schemas.openxmlformats.org/drawingml/2006/main">
+            <a:pPr>
+              <a:defRPr sz="1725" b="0">
+                <a:solidFill>
+                  <a:srgbClr val="344955"/>
+                </a:solidFill>
+                <a:latin typeface="Arial"/>
+                <a:ea typeface="Arial"/>
+                <a:cs typeface="Arial"/>
+              </a:defRPr>
+            </a:pPr>
+            <a:r>
+              <a:rPr sz="1725" b="0">
+                <a:solidFill>
+                  <a:srgbClr val="344955"/>
+                </a:solidFill>
+                <a:latin typeface="Arial"/>
+                <a:ea typeface="Arial"/>
+                <a:cs typeface="Arial"/>
+              </a:rPr>
+              <a:t>Verify chosen body frame/origin/scale. External renderer can supply its own camera and time.</a:t>
+            </a:r>
+          </a:p>
+        </p:txBody>
+      </p:sp>
+      <p:sp>
+        <p:nvSpPr>
+          <p:cNvPr id="10" name="">
+            <a:extLst xmlns:a="http://schemas.openxmlformats.org/drawingml/2006/main">
+              <a:ext uri="{FF2B5EF4-FFF2-40B4-BE49-F238E27FC236}">
+                <a16:creationId xmlns:a16="http://schemas.microsoft.com/office/drawing/2014/main" id="{8E728398-5B63-4BF6-885B-BD6498D048A6}"/>
+              </a:ext>
+            </a:extLst>
+          </p:cNvPr>
+          <p:cNvSpPr>
+            <a:spLocks xmlns:a="http://schemas.openxmlformats.org/drawingml/2006/main" noGrp="1"/>
+          </p:cNvSpPr>
+          <p:nvPr/>
+        </p:nvSpPr>
+        <p:spPr>
+          <a:xfrm xmlns:a="http://schemas.openxmlformats.org/drawingml/2006/main">
+            <a:off x="685800" y="3752850"/>
+            <a:ext cx="10820400" cy="1028700"/>
+          </a:xfrm>
+          <a:prstGeom xmlns:a="http://schemas.openxmlformats.org/drawingml/2006/main" prst="rect">
+            <a:avLst/>
+          </a:prstGeom>
+          <a:solidFill xmlns:a="http://schemas.openxmlformats.org/drawingml/2006/main">
+            <a:srgbClr val="EDF4F6"/>
+          </a:solidFill>
+          <a:ln xmlns:a="http://schemas.openxmlformats.org/drawingml/2006/main" w="9525">
+            <a:solidFill>
+              <a:srgbClr val="CFDDE3"/>
+            </a:solidFill>
+          </a:ln>
+        </p:spPr>
+      </p:sp>
+      <p:sp>
+        <p:nvSpPr>
+          <p:cNvPr id="11" name="">
+            <a:extLst xmlns:a="http://schemas.openxmlformats.org/drawingml/2006/main">
+              <a:ext uri="{FF2B5EF4-FFF2-40B4-BE49-F238E27FC236}">
+                <a16:creationId xmlns:a16="http://schemas.microsoft.com/office/drawing/2014/main" id="{2F3AA675-6C5F-404C-95CE-22007ED5EF83}"/>
+              </a:ext>
+            </a:extLst>
+          </p:cNvPr>
+          <p:cNvSpPr>
+            <a:spLocks xmlns:a="http://schemas.openxmlformats.org/drawingml/2006/main" noGrp="1"/>
+          </p:cNvSpPr>
+          <p:nvPr/>
+        </p:nvSpPr>
+        <p:spPr>
+          <a:xfrm xmlns:a="http://schemas.openxmlformats.org/drawingml/2006/main">
+            <a:off x="809625" y="3886200"/>
+            <a:ext cx="3000375" cy="857250"/>
+          </a:xfrm>
+          <a:prstGeom xmlns:a="http://schemas.openxmlformats.org/drawingml/2006/main" prst="rect">
+            <a:avLst/>
+          </a:prstGeom>
+          <a:noFill xmlns:a="http://schemas.openxmlformats.org/drawingml/2006/main"/>
+          <a:ln xmlns:a="http://schemas.openxmlformats.org/drawingml/2006/main" w="0">
+            <a:noFill/>
+          </a:ln>
+        </p:spPr>
+        <p:txBody>
+          <a:bodyPr xmlns:a="http://schemas.openxmlformats.org/drawingml/2006/main">
+            <a:noAutofit/>
+          </a:bodyPr>
+          <a:lstStyle xmlns:a="http://schemas.openxmlformats.org/drawingml/2006/main">
+            <a:defPPr>
+              <a:defRPr sz="1800" b="1">
+                <a:solidFill>
+                  <a:srgbClr val="102D3B"/>
+                </a:solidFill>
+                <a:latin typeface="Arial"/>
+                <a:ea typeface="Arial"/>
+                <a:cs typeface="Arial"/>
+              </a:defRPr>
+            </a:defPPr>
+          </a:lstStyle>
+          <a:p xmlns:a="http://schemas.openxmlformats.org/drawingml/2006/main">
+            <a:pPr>
+              <a:defRPr sz="1800" b="1">
+                <a:solidFill>
+                  <a:srgbClr val="102D3B"/>
+                </a:solidFill>
+                <a:latin typeface="Arial"/>
+                <a:ea typeface="Arial"/>
+                <a:cs typeface="Arial"/>
+              </a:defRPr>
+            </a:pPr>
+            <a:r>
+              <a:rPr sz="1800" b="1">
+                <a:solidFill>
+                  <a:srgbClr val="102D3B"/>
+                </a:solidFill>
+                <a:latin typeface="Arial"/>
+                <a:ea typeface="Arial"/>
+                <a:cs typeface="Arial"/>
+              </a:rPr>
+              <a:t>Reconstructed mesh through UE</a:t>
+            </a:r>
+          </a:p>
+        </p:txBody>
+      </p:sp>
+      <p:sp>
+        <p:nvSpPr>
+          <p:cNvPr id="12" name="">
+            <a:extLst xmlns:a="http://schemas.openxmlformats.org/drawingml/2006/main">
+              <a:ext uri="{FF2B5EF4-FFF2-40B4-BE49-F238E27FC236}">
+                <a16:creationId xmlns:a16="http://schemas.microsoft.com/office/drawing/2014/main" id="{B988E0E4-086D-42F4-A702-DBAF45D0B099}"/>
+              </a:ext>
+            </a:extLst>
+          </p:cNvPr>
+          <p:cNvSpPr>
+            <a:spLocks xmlns:a="http://schemas.openxmlformats.org/drawingml/2006/main" noGrp="1"/>
+          </p:cNvSpPr>
+          <p:nvPr/>
+        </p:nvSpPr>
+        <p:spPr>
+          <a:xfrm xmlns:a="http://schemas.openxmlformats.org/drawingml/2006/main">
+            <a:off x="3971925" y="3886200"/>
+            <a:ext cx="2000250" cy="857250"/>
+          </a:xfrm>
+          <a:prstGeom xmlns:a="http://schemas.openxmlformats.org/drawingml/2006/main" prst="rect">
+            <a:avLst/>
+          </a:prstGeom>
+          <a:noFill xmlns:a="http://schemas.openxmlformats.org/drawingml/2006/main"/>
+          <a:ln xmlns:a="http://schemas.openxmlformats.org/drawingml/2006/main" w="0">
+            <a:noFill/>
+          </a:ln>
+        </p:spPr>
+        <p:txBody>
+          <a:bodyPr xmlns:a="http://schemas.openxmlformats.org/drawingml/2006/main">
+            <a:noAutofit/>
+          </a:bodyPr>
+          <a:lstStyle xmlns:a="http://schemas.openxmlformats.org/drawingml/2006/main">
+            <a:defPPr>
+              <a:defRPr sz="1725" b="1">
+                <a:solidFill>
+                  <a:srgbClr val="376A7F"/>
+                </a:solidFill>
+                <a:latin typeface="Arial"/>
+                <a:ea typeface="Arial"/>
+                <a:cs typeface="Arial"/>
+              </a:defRPr>
+            </a:defPPr>
+          </a:lstStyle>
+          <a:p xmlns:a="http://schemas.openxmlformats.org/drawingml/2006/main">
+            <a:pPr>
+              <a:defRPr sz="1725" b="1">
+                <a:solidFill>
+                  <a:srgbClr val="376A7F"/>
+                </a:solidFill>
+                <a:latin typeface="Arial"/>
+                <a:ea typeface="Arial"/>
+                <a:cs typeface="Arial"/>
+              </a:defRPr>
+            </a:pPr>
+            <a:r>
+              <a:rPr sz="1725" b="1">
+                <a:solidFill>
+                  <a:srgbClr val="376A7F"/>
+                </a:solidFill>
+                <a:latin typeface="Arial"/>
+                <a:ea typeface="Arial"/>
+                <a:cs typeface="Arial"/>
+              </a:rPr>
+              <a:t>Documented, eligibility unresolved</a:t>
+            </a:r>
+          </a:p>
+        </p:txBody>
+      </p:sp>
+      <p:sp>
+        <p:nvSpPr>
+          <p:cNvPr id="13" name="">
+            <a:extLst xmlns:a="http://schemas.openxmlformats.org/drawingml/2006/main">
+              <a:ext uri="{FF2B5EF4-FFF2-40B4-BE49-F238E27FC236}">
+                <a16:creationId xmlns:a16="http://schemas.microsoft.com/office/drawing/2014/main" id="{8C6C1162-3DD4-4D92-A596-28826F3F09DF}"/>
+              </a:ext>
+            </a:extLst>
+          </p:cNvPr>
+          <p:cNvSpPr>
+            <a:spLocks xmlns:a="http://schemas.openxmlformats.org/drawingml/2006/main" noGrp="1"/>
+          </p:cNvSpPr>
+          <p:nvPr/>
+        </p:nvSpPr>
+        <p:spPr>
+          <a:xfrm xmlns:a="http://schemas.openxmlformats.org/drawingml/2006/main">
+            <a:off x="6191250" y="3886200"/>
+            <a:ext cx="5191125" cy="857250"/>
+          </a:xfrm>
+          <a:prstGeom xmlns:a="http://schemas.openxmlformats.org/drawingml/2006/main" prst="rect">
+            <a:avLst/>
+          </a:prstGeom>
+          <a:noFill xmlns:a="http://schemas.openxmlformats.org/drawingml/2006/main"/>
+          <a:ln xmlns:a="http://schemas.openxmlformats.org/drawingml/2006/main" w="0">
+            <a:noFill/>
+          </a:ln>
+        </p:spPr>
+        <p:txBody>
+          <a:bodyPr xmlns:a="http://schemas.openxmlformats.org/drawingml/2006/main">
+            <a:noAutofit/>
+          </a:bodyPr>
+          <a:lstStyle xmlns:a="http://schemas.openxmlformats.org/drawingml/2006/main">
+            <a:defPPr>
+              <a:defRPr sz="1725" b="0">
+                <a:solidFill>
+                  <a:srgbClr val="344955"/>
+                </a:solidFill>
+                <a:latin typeface="Arial"/>
+                <a:ea typeface="Arial"/>
+                <a:cs typeface="Arial"/>
+              </a:defRPr>
+            </a:defPPr>
+          </a:lstStyle>
+          <a:p xmlns:a="http://schemas.openxmlformats.org/drawingml/2006/main">
+            <a:pPr>
+              <a:defRPr sz="1725" b="0">
+                <a:solidFill>
+                  <a:srgbClr val="344955"/>
+                </a:solidFill>
+                <a:latin typeface="Arial"/>
+                <a:ea typeface="Arial"/>
+                <a:cs typeface="Arial"/>
+              </a:defRPr>
+            </a:pPr>
+            <a:r>
+              <a:rPr sz="1725" b="0">
+                <a:solidFill>
+                  <a:srgbClr val="344955"/>
+                </a:solidFill>
+                <a:latin typeface="Arial"/>
+                <a:ea typeface="Arial"/>
+                <a:cs typeface="Arial"/>
+              </a:rPr>
+              <a:t>Cooked UE assets plus XML. Verify installed loader and Free custom-scene permission.</a:t>
+            </a:r>
+          </a:p>
+        </p:txBody>
+      </p:sp>
+      <p:sp>
+        <p:nvSpPr>
+          <p:cNvPr id="14" name="">
+            <a:extLst xmlns:a="http://schemas.openxmlformats.org/drawingml/2006/main">
+              <a:ext uri="{FF2B5EF4-FFF2-40B4-BE49-F238E27FC236}">
+                <a16:creationId xmlns:a16="http://schemas.microsoft.com/office/drawing/2014/main" id="{D06612C6-9AD7-40E9-A834-5E5053365673}"/>
+              </a:ext>
+            </a:extLst>
+          </p:cNvPr>
+          <p:cNvSpPr>
+            <a:spLocks xmlns:a="http://schemas.openxmlformats.org/drawingml/2006/main" noGrp="1"/>
+          </p:cNvSpPr>
+          <p:nvPr/>
+        </p:nvSpPr>
+        <p:spPr>
+          <a:xfrm xmlns:a="http://schemas.openxmlformats.org/drawingml/2006/main">
+            <a:off x="685800" y="4867275"/>
+            <a:ext cx="10820400" cy="1028700"/>
+          </a:xfrm>
+          <a:prstGeom xmlns:a="http://schemas.openxmlformats.org/drawingml/2006/main" prst="rect">
+            <a:avLst/>
+          </a:prstGeom>
+          <a:solidFill xmlns:a="http://schemas.openxmlformats.org/drawingml/2006/main">
+            <a:srgbClr val="FFFFFF"/>
+          </a:solidFill>
+          <a:ln xmlns:a="http://schemas.openxmlformats.org/drawingml/2006/main" w="9525">
+            <a:solidFill>
+              <a:srgbClr val="CFDDE3"/>
+            </a:solidFill>
+          </a:ln>
+        </p:spPr>
+      </p:sp>
+      <p:sp>
+        <p:nvSpPr>
+          <p:cNvPr id="15" name="">
+            <a:extLst xmlns:a="http://schemas.openxmlformats.org/drawingml/2006/main">
+              <a:ext uri="{FF2B5EF4-FFF2-40B4-BE49-F238E27FC236}">
+                <a16:creationId xmlns:a16="http://schemas.microsoft.com/office/drawing/2014/main" id="{87DE67D2-32BC-4518-AEF0-0C1848CD406F}"/>
+              </a:ext>
+            </a:extLst>
+          </p:cNvPr>
+          <p:cNvSpPr>
+            <a:spLocks xmlns:a="http://schemas.openxmlformats.org/drawingml/2006/main" noGrp="1"/>
+          </p:cNvSpPr>
+          <p:nvPr/>
+        </p:nvSpPr>
+        <p:spPr>
+          <a:xfrm xmlns:a="http://schemas.openxmlformats.org/drawingml/2006/main">
+            <a:off x="809625" y="5000625"/>
+            <a:ext cx="3000375" cy="857250"/>
+          </a:xfrm>
+          <a:prstGeom xmlns:a="http://schemas.openxmlformats.org/drawingml/2006/main" prst="rect">
+            <a:avLst/>
+          </a:prstGeom>
+          <a:noFill xmlns:a="http://schemas.openxmlformats.org/drawingml/2006/main"/>
+          <a:ln xmlns:a="http://schemas.openxmlformats.org/drawingml/2006/main" w="0">
+            <a:noFill/>
+          </a:ln>
+        </p:spPr>
+        <p:txBody>
+          <a:bodyPr xmlns:a="http://schemas.openxmlformats.org/drawingml/2006/main">
+            <a:noAutofit/>
+          </a:bodyPr>
+          <a:lstStyle xmlns:a="http://schemas.openxmlformats.org/drawingml/2006/main">
+            <a:defPPr>
+              <a:defRPr sz="1800" b="1">
+                <a:solidFill>
+                  <a:srgbClr val="102D3B"/>
+                </a:solidFill>
+                <a:latin typeface="Arial"/>
+                <a:ea typeface="Arial"/>
+                <a:cs typeface="Arial"/>
+              </a:defRPr>
+            </a:defPPr>
+          </a:lstStyle>
+          <a:p xmlns:a="http://schemas.openxmlformats.org/drawingml/2006/main">
+            <a:pPr>
+              <a:defRPr sz="1800" b="1">
+                <a:solidFill>
+                  <a:srgbClr val="102D3B"/>
+                </a:solidFill>
+                <a:latin typeface="Arial"/>
+                <a:ea typeface="Arial"/>
+                <a:cs typeface="Arial"/>
+              </a:defRPr>
+            </a:pPr>
+            <a:r>
+              <a:rPr sz="1800" b="1">
+                <a:solidFill>
+                  <a:srgbClr val="102D3B"/>
+                </a:solidFill>
+                <a:latin typeface="Arial"/>
+                <a:ea typeface="Arial"/>
+                <a:cs typeface="Arial"/>
+              </a:rPr>
+              <a:t>Future visual controller loop</a:t>
+            </a:r>
+          </a:p>
+        </p:txBody>
+      </p:sp>
+      <p:sp>
+        <p:nvSpPr>
+          <p:cNvPr id="16" name="">
+            <a:extLst xmlns:a="http://schemas.openxmlformats.org/drawingml/2006/main">
+              <a:ext uri="{FF2B5EF4-FFF2-40B4-BE49-F238E27FC236}">
+                <a16:creationId xmlns:a16="http://schemas.microsoft.com/office/drawing/2014/main" id="{FF723F33-82EF-40AA-BEAC-6CF9A1760C96}"/>
+              </a:ext>
+            </a:extLst>
+          </p:cNvPr>
+          <p:cNvSpPr>
+            <a:spLocks xmlns:a="http://schemas.openxmlformats.org/drawingml/2006/main" noGrp="1"/>
+          </p:cNvSpPr>
+          <p:nvPr/>
+        </p:nvSpPr>
+        <p:spPr>
+          <a:xfrm xmlns:a="http://schemas.openxmlformats.org/drawingml/2006/main">
+            <a:off x="3971925" y="5000625"/>
+            <a:ext cx="2000250" cy="857250"/>
+          </a:xfrm>
+          <a:prstGeom xmlns:a="http://schemas.openxmlformats.org/drawingml/2006/main" prst="rect">
+            <a:avLst/>
+          </a:prstGeom>
+          <a:noFill xmlns:a="http://schemas.openxmlformats.org/drawingml/2006/main"/>
+          <a:ln xmlns:a="http://schemas.openxmlformats.org/drawingml/2006/main" w="0">
+            <a:noFill/>
+          </a:ln>
+        </p:spPr>
+        <p:txBody>
+          <a:bodyPr xmlns:a="http://schemas.openxmlformats.org/drawingml/2006/main">
+            <a:noAutofit/>
+          </a:bodyPr>
+          <a:lstStyle xmlns:a="http://schemas.openxmlformats.org/drawingml/2006/main">
+            <a:defPPr>
+              <a:defRPr sz="1725" b="1">
+                <a:solidFill>
+                  <a:srgbClr val="376A7F"/>
+                </a:solidFill>
+                <a:latin typeface="Arial"/>
+                <a:ea typeface="Arial"/>
+                <a:cs typeface="Arial"/>
+              </a:defRPr>
+            </a:defPPr>
+          </a:lstStyle>
+          <a:p xmlns:a="http://schemas.openxmlformats.org/drawingml/2006/main">
+            <a:pPr>
+              <a:defRPr sz="1725" b="1">
+                <a:solidFill>
+                  <a:srgbClr val="376A7F"/>
+                </a:solidFill>
+                <a:latin typeface="Arial"/>
+                <a:ea typeface="Arial"/>
+                <a:cs typeface="Arial"/>
+              </a:defRPr>
+            </a:pPr>
+            <a:r>
+              <a:rPr sz="1725" b="1">
+                <a:solidFill>
+                  <a:srgbClr val="376A7F"/>
+                </a:solidFill>
+                <a:latin typeface="Arial"/>
+                <a:ea typeface="Arial"/>
+                <a:cs typeface="Arial"/>
+              </a:rPr>
+              <a:t>Substantial integration</a:t>
+            </a:r>
+          </a:p>
+        </p:txBody>
+      </p:sp>
+      <p:sp>
+        <p:nvSpPr>
+          <p:cNvPr id="17" name="">
+            <a:extLst xmlns:a="http://schemas.openxmlformats.org/drawingml/2006/main">
+              <a:ext uri="{FF2B5EF4-FFF2-40B4-BE49-F238E27FC236}">
+                <a16:creationId xmlns:a16="http://schemas.microsoft.com/office/drawing/2014/main" id="{A79CD016-70DE-48E6-93E3-5093CD235039}"/>
+              </a:ext>
+            </a:extLst>
+          </p:cNvPr>
+          <p:cNvSpPr>
+            <a:spLocks xmlns:a="http://schemas.openxmlformats.org/drawingml/2006/main" noGrp="1"/>
+          </p:cNvSpPr>
+          <p:nvPr/>
+        </p:nvSpPr>
+        <p:spPr>
+          <a:xfrm xmlns:a="http://schemas.openxmlformats.org/drawingml/2006/main">
+            <a:off x="6191250" y="5000625"/>
+            <a:ext cx="5191125" cy="857250"/>
+          </a:xfrm>
+          <a:prstGeom xmlns:a="http://schemas.openxmlformats.org/drawingml/2006/main" prst="rect">
+            <a:avLst/>
+          </a:prstGeom>
+          <a:noFill xmlns:a="http://schemas.openxmlformats.org/drawingml/2006/main"/>
+          <a:ln xmlns:a="http://schemas.openxmlformats.org/drawingml/2006/main" w="0">
+            <a:noFill/>
+          </a:ln>
+        </p:spPr>
+        <p:txBody>
+          <a:bodyPr xmlns:a="http://schemas.openxmlformats.org/drawingml/2006/main">
+            <a:noAutofit/>
+          </a:bodyPr>
+          <a:lstStyle xmlns:a="http://schemas.openxmlformats.org/drawingml/2006/main">
+            <a:defPPr>
+              <a:defRPr sz="1725" b="0">
+                <a:solidFill>
+                  <a:srgbClr val="344955"/>
+                </a:solidFill>
+                <a:latin typeface="Arial"/>
+                <a:ea typeface="Arial"/>
+                <a:cs typeface="Arial"/>
+              </a:defRPr>
+            </a:defPPr>
+          </a:lstStyle>
+          <a:p xmlns:a="http://schemas.openxmlformats.org/drawingml/2006/main">
+            <a:pPr>
+              <a:defRPr sz="1725" b="0">
+                <a:solidFill>
+                  <a:srgbClr val="344955"/>
+                </a:solidFill>
+                <a:latin typeface="Arial"/>
+                <a:ea typeface="Arial"/>
+                <a:cs typeface="Arial"/>
+              </a:defRPr>
+            </a:pPr>
+            <a:r>
+              <a:rPr sz="1725" b="0">
+                <a:solidFill>
+                  <a:srgbClr val="344955"/>
+                </a:solidFill>
+                <a:latin typeface="Arial"/>
+                <a:ea typeface="Arial"/>
+                <a:cs typeface="Arial"/>
+              </a:rPr>
+              <a:t>Deliver external images to a controller, then commands to PX4. Scheduling/reset and task interfaces remain.</a:t>
+            </a:r>
+          </a:p>
+        </p:txBody>
+      </p:sp>
+      <p:sp>
+        <p:nvSpPr>
+          <p:cNvPr id="18" name="">
+            <a:extLst xmlns:a="http://schemas.openxmlformats.org/drawingml/2006/main">
+              <a:ext uri="{FF2B5EF4-FFF2-40B4-BE49-F238E27FC236}">
+                <a16:creationId xmlns:a16="http://schemas.microsoft.com/office/drawing/2014/main" id="{826068A2-1FF6-44CE-AEA4-5F3EA5DFFA7E}"/>
+              </a:ext>
+            </a:extLst>
+          </p:cNvPr>
+          <p:cNvSpPr>
+            <a:spLocks xmlns:a="http://schemas.openxmlformats.org/drawingml/2006/main" noGrp="1"/>
+          </p:cNvSpPr>
+          <p:nvPr/>
+        </p:nvSpPr>
+        <p:spPr>
+          <a:xfrm xmlns:a="http://schemas.openxmlformats.org/drawingml/2006/main">
+            <a:off x="685800" y="6353175"/>
+            <a:ext cx="10820400" cy="266700"/>
+          </a:xfrm>
+          <a:prstGeom xmlns:a="http://schemas.openxmlformats.org/drawingml/2006/main" prst="rect">
+            <a:avLst/>
+          </a:prstGeom>
+          <a:noFill xmlns:a="http://schemas.openxmlformats.org/drawingml/2006/main"/>
+          <a:ln xmlns:a="http://schemas.openxmlformats.org/drawingml/2006/main" w="0">
+            <a:noFill/>
+          </a:ln>
+        </p:spPr>
+        <p:txBody>
+          <a:bodyPr xmlns:a="http://schemas.openxmlformats.org/drawingml/2006/main">
+            <a:noAutofit/>
+          </a:bodyPr>
+          <a:lstStyle xmlns:a="http://schemas.openxmlformats.org/drawingml/2006/main">
+            <a:defPPr>
+              <a:defRPr sz="1275" b="0">
+                <a:solidFill>
+                  <a:srgbClr val="606C75"/>
+                </a:solidFill>
+                <a:latin typeface="Arial"/>
+                <a:ea typeface="Arial"/>
+                <a:cs typeface="Arial"/>
+              </a:defRPr>
+            </a:defPPr>
+          </a:lstStyle>
+          <a:p xmlns:a="http://schemas.openxmlformats.org/drawingml/2006/main">
+            <a:pPr>
+              <a:defRPr sz="1275" b="0">
+                <a:solidFill>
+                  <a:srgbClr val="606C75"/>
+                </a:solidFill>
+                <a:latin typeface="Arial"/>
+                <a:ea typeface="Arial"/>
+                <a:cs typeface="Arial"/>
+              </a:defRPr>
+            </a:pPr>
+            <a:r>
+              <a:rPr sz="1275" b="0">
+                <a:solidFill>
+                  <a:srgbClr val="606C75"/>
+                </a:solidFill>
+                <a:latin typeface="Arial"/>
+                <a:ea typeface="Arial"/>
+                <a:cs typeface="Arial"/>
+              </a:rPr>
+              <a:t>Native calibration is architecture-specific · depth/contact only when the task needs them   13 / 16</a:t>
+            </a:r>
+          </a:p>
+        </p:txBody>
+      </p:sp>
+    </p:spTree>
+    <p:extLst>
+      <p:ext uri="{BB962C8B-B14F-4D97-AF65-F5344CB8AC3E}">
+        <p14:creationId xmlns:p14="http://schemas.microsoft.com/office/powerpoint/2010/main" val="1046442111"/>
+      </p:ext>
+    </p:extLst>
+  </p:cSld>
+</p:sld>
+</file>
+
+<file path=ppt/slides/slide14.xml><?xml version="1.0" encoding="utf-8"?>
+<p:sld xmlns:p="http://schemas.openxmlformats.org/presentationml/2006/main">
+  <p:cSld>
+    <p:bg>
+      <p:bgPr>
+        <a:solidFill xmlns:a="http://schemas.openxmlformats.org/drawingml/2006/main">
+          <a:srgbClr val="FFFFFF"/>
+        </a:solidFill>
+      </p:bgPr>
+    </p:bg>
+    <p:spTree>
+      <p:nvGrpSpPr>
+        <p:cNvPr id="1" name=""/>
+        <p:cNvGrpSpPr/>
+        <p:nvPr/>
+      </p:nvGrpSpPr>
+      <p:grpSpPr>
+        <a:xfrm xmlns:a="http://schemas.openxmlformats.org/drawingml/2006/main"/>
+      </p:grpSpPr>
+      <p:sp>
+        <p:nvSpPr>
+          <p:cNvPr id="6" name="">
+            <a:extLst xmlns:a="http://schemas.openxmlformats.org/drawingml/2006/main">
+              <a:ext uri="{FF2B5EF4-FFF2-40B4-BE49-F238E27FC236}">
+                <a16:creationId xmlns:a16="http://schemas.microsoft.com/office/drawing/2014/main" id="{92720874-3E44-4FEB-87E2-CBE6C05F1182}"/>
+              </a:ext>
+            </a:extLst>
+          </p:cNvPr>
+          <p:cNvSpPr>
+            <a:spLocks xmlns:a="http://schemas.openxmlformats.org/drawingml/2006/main" noGrp="1"/>
+          </p:cNvSpPr>
+          <p:nvPr/>
+        </p:nvSpPr>
+        <p:spPr>
+          <a:xfrm xmlns:a="http://schemas.openxmlformats.org/drawingml/2006/main">
+            <a:off x="685800" y="476250"/>
+            <a:ext cx="10820400" cy="819150"/>
+          </a:xfrm>
+          <a:prstGeom xmlns:a="http://schemas.openxmlformats.org/drawingml/2006/main" prst="rect">
+            <a:avLst/>
+          </a:prstGeom>
+          <a:noFill xmlns:a="http://schemas.openxmlformats.org/drawingml/2006/main"/>
+          <a:ln xmlns:a="http://schemas.openxmlformats.org/drawingml/2006/main" w="0">
+            <a:noFill/>
+          </a:ln>
+        </p:spPr>
+        <p:txBody>
+          <a:bodyPr xmlns:a="http://schemas.openxmlformats.org/drawingml/2006/main">
+            <a:noAutofit/>
+          </a:bodyPr>
+          <a:lstStyle xmlns:a="http://schemas.openxmlformats.org/drawingml/2006/main">
+            <a:defPPr>
+              <a:defRPr sz="3300" b="1">
+                <a:solidFill>
+                  <a:srgbClr val="102D3B"/>
+                </a:solidFill>
+                <a:latin typeface="Arial"/>
+                <a:ea typeface="Arial"/>
+                <a:cs typeface="Arial"/>
+              </a:defRPr>
+            </a:defPPr>
+          </a:lstStyle>
+          <a:p xmlns:a="http://schemas.openxmlformats.org/drawingml/2006/main">
+            <a:pPr>
+              <a:defRPr sz="3300" b="1">
+                <a:solidFill>
+                  <a:srgbClr val="102D3B"/>
+                </a:solidFill>
+                <a:latin typeface="Arial"/>
+                <a:ea typeface="Arial"/>
+                <a:cs typeface="Arial"/>
+              </a:defRPr>
+            </a:pPr>
+            <a:r>
+              <a:rPr sz="3300" b="1">
+                <a:solidFill>
+                  <a:srgbClr val="102D3B"/>
+                </a:solidFill>
+                <a:latin typeface="Arial"/>
+                <a:ea typeface="Arial"/>
+                <a:cs typeface="Arial"/>
+              </a:rPr>
+              <a:t>Applicability and research inputs</a:t>
+            </a:r>
+          </a:p>
+        </p:txBody>
+      </p:sp>
+      <p:sp>
+        <p:nvSpPr>
+          <p:cNvPr id="2" name="">
+            <a:extLst xmlns:a="http://schemas.openxmlformats.org/drawingml/2006/main">
+              <a:ext uri="{FF2B5EF4-FFF2-40B4-BE49-F238E27FC236}">
+                <a16:creationId xmlns:a16="http://schemas.microsoft.com/office/drawing/2014/main" id="{F1E34452-E466-42DF-90A5-4C904A6324BE}"/>
+              </a:ext>
+            </a:extLst>
+          </p:cNvPr>
+          <p:cNvSpPr>
+            <a:spLocks xmlns:a="http://schemas.openxmlformats.org/drawingml/2006/main" noGrp="1"/>
+          </p:cNvSpPr>
+          <p:nvPr/>
+        </p:nvSpPr>
+        <p:spPr>
+          <a:xfrm xmlns:a="http://schemas.openxmlformats.org/drawingml/2006/main">
+            <a:off x="685800" y="1666875"/>
+            <a:ext cx="10820400" cy="1066800"/>
+          </a:xfrm>
+          <a:prstGeom xmlns:a="http://schemas.openxmlformats.org/drawingml/2006/main" prst="rect">
+            <a:avLst/>
+          </a:prstGeom>
+          <a:noFill xmlns:a="http://schemas.openxmlformats.org/drawingml/2006/main"/>
+          <a:ln xmlns:a="http://schemas.openxmlformats.org/drawingml/2006/main" w="0">
+            <a:noFill/>
+          </a:ln>
+        </p:spPr>
+        <p:txBody>
+          <a:bodyPr xmlns:a="http://schemas.openxmlformats.org/drawingml/2006/main">
+            <a:noAutofit/>
+          </a:bodyPr>
+          <a:lstStyle xmlns:a="http://schemas.openxmlformats.org/drawingml/2006/main">
+            <a:defPPr>
+              <a:defRPr sz="2100" b="0">
+                <a:solidFill>
+                  <a:srgbClr val="102D3B"/>
+                </a:solidFill>
+                <a:latin typeface="Arial"/>
+                <a:ea typeface="Arial"/>
+                <a:cs typeface="Arial"/>
+              </a:defRPr>
+            </a:defPPr>
+          </a:lstStyle>
+          <a:p xmlns:a="http://schemas.openxmlformats.org/drawingml/2006/main">
+            <a:pPr>
+              <a:defRPr sz="2100" b="0">
+                <a:solidFill>
+                  <a:srgbClr val="102D3B"/>
+                </a:solidFill>
+                <a:latin typeface="Arial"/>
+                <a:ea typeface="Arial"/>
+                <a:cs typeface="Arial"/>
+              </a:defRPr>
+            </a:pPr>
+            <a:r>
+              <a:rPr sz="2100" b="0">
+                <a:solidFill>
+                  <a:srgbClr val="102D3B"/>
+                </a:solidFill>
+                <a:latin typeface="Arial"/>
+                <a:ea typeface="Arial"/>
+                <a:cs typeface="Arial"/>
+              </a:rPr>
+              <a:t>Residential, suburban and campus views below 100 m remain fidelity research questions. No real reconstruction entered this audit.</a:t>
+            </a:r>
+          </a:p>
+        </p:txBody>
+      </p:sp>
+      <p:sp>
+        <p:nvSpPr>
+          <p:cNvPr id="3" name="">
+            <a:extLst xmlns:a="http://schemas.openxmlformats.org/drawingml/2006/main">
+              <a:ext uri="{FF2B5EF4-FFF2-40B4-BE49-F238E27FC236}">
+                <a16:creationId xmlns:a16="http://schemas.microsoft.com/office/drawing/2014/main" id="{5E731128-3F39-4E17-BA3F-517456C38658}"/>
+              </a:ext>
+            </a:extLst>
+          </p:cNvPr>
+          <p:cNvSpPr>
+            <a:spLocks xmlns:a="http://schemas.openxmlformats.org/drawingml/2006/main" noGrp="1"/>
+          </p:cNvSpPr>
+          <p:nvPr/>
+        </p:nvSpPr>
+        <p:spPr>
+          <a:xfrm xmlns:a="http://schemas.openxmlformats.org/drawingml/2006/main">
+            <a:off x="685800" y="2886075"/>
+            <a:ext cx="10820400" cy="1066800"/>
+          </a:xfrm>
+          <a:prstGeom xmlns:a="http://schemas.openxmlformats.org/drawingml/2006/main" prst="rect">
+            <a:avLst/>
+          </a:prstGeom>
+          <a:noFill xmlns:a="http://schemas.openxmlformats.org/drawingml/2006/main"/>
+          <a:ln xmlns:a="http://schemas.openxmlformats.org/drawingml/2006/main" w="0">
+            <a:noFill/>
+          </a:ln>
+        </p:spPr>
+        <p:txBody>
+          <a:bodyPr xmlns:a="http://schemas.openxmlformats.org/drawingml/2006/main">
+            <a:noAutofit/>
+          </a:bodyPr>
+          <a:lstStyle xmlns:a="http://schemas.openxmlformats.org/drawingml/2006/main">
+            <a:defPPr>
+              <a:defRPr sz="2100" b="0">
+                <a:solidFill>
+                  <a:srgbClr val="344955"/>
+                </a:solidFill>
+                <a:latin typeface="Arial"/>
+                <a:ea typeface="Arial"/>
+                <a:cs typeface="Arial"/>
+              </a:defRPr>
+            </a:defPPr>
+          </a:lstStyle>
+          <a:p xmlns:a="http://schemas.openxmlformats.org/drawingml/2006/main">
+            <a:pPr>
+              <a:defRPr sz="2100" b="0">
+                <a:solidFill>
+                  <a:srgbClr val="344955"/>
+                </a:solidFill>
+                <a:latin typeface="Arial"/>
+                <a:ea typeface="Arial"/>
+                <a:cs typeface="Arial"/>
+              </a:defRPr>
+            </a:pPr>
+            <a:r>
+              <a:rPr sz="2100" b="0">
+                <a:solidFill>
+                  <a:srgbClr val="344955"/>
+                </a:solidFill>
+                <a:latin typeface="Arial"/>
+                <a:ea typeface="Arial"/>
+                <a:cs typeface="Arial"/>
+              </a:rPr>
+              <a:t>Sparse capture means missing view coverage. Sparse scene content means limited physical/perceptual structure. They need different evaluations.</a:t>
+            </a:r>
+          </a:p>
+        </p:txBody>
+      </p:sp>
+      <p:sp>
+        <p:nvSpPr>
+          <p:cNvPr id="4" name="">
+            <a:extLst xmlns:a="http://schemas.openxmlformats.org/drawingml/2006/main">
+              <a:ext uri="{FF2B5EF4-FFF2-40B4-BE49-F238E27FC236}">
+                <a16:creationId xmlns:a16="http://schemas.microsoft.com/office/drawing/2014/main" id="{7F64B5A3-16F8-4E31-9E87-D7F197C312AD}"/>
+              </a:ext>
+            </a:extLst>
+          </p:cNvPr>
+          <p:cNvSpPr>
+            <a:spLocks xmlns:a="http://schemas.openxmlformats.org/drawingml/2006/main" noGrp="1"/>
+          </p:cNvSpPr>
+          <p:nvPr/>
+        </p:nvSpPr>
+        <p:spPr>
+          <a:xfrm xmlns:a="http://schemas.openxmlformats.org/drawingml/2006/main">
+            <a:off x="685800" y="4105275"/>
+            <a:ext cx="10820400" cy="1066800"/>
+          </a:xfrm>
+          <a:prstGeom xmlns:a="http://schemas.openxmlformats.org/drawingml/2006/main" prst="rect">
+            <a:avLst/>
+          </a:prstGeom>
+          <a:noFill xmlns:a="http://schemas.openxmlformats.org/drawingml/2006/main"/>
+          <a:ln xmlns:a="http://schemas.openxmlformats.org/drawingml/2006/main" w="0">
+            <a:noFill/>
+          </a:ln>
+        </p:spPr>
+        <p:txBody>
+          <a:bodyPr xmlns:a="http://schemas.openxmlformats.org/drawingml/2006/main">
+            <a:noAutofit/>
+          </a:bodyPr>
+          <a:lstStyle xmlns:a="http://schemas.openxmlformats.org/drawingml/2006/main">
+            <a:defPPr>
+              <a:defRPr sz="2100" b="0">
+                <a:solidFill>
+                  <a:srgbClr val="344955"/>
+                </a:solidFill>
+                <a:latin typeface="Arial"/>
+                <a:ea typeface="Arial"/>
+                <a:cs typeface="Arial"/>
+              </a:defRPr>
+            </a:defPPr>
+          </a:lstStyle>
+          <a:p xmlns:a="http://schemas.openxmlformats.org/drawingml/2006/main">
+            <a:pPr>
+              <a:defRPr sz="2100" b="0">
+                <a:solidFill>
+                  <a:srgbClr val="344955"/>
+                </a:solidFill>
+                <a:latin typeface="Arial"/>
+                <a:ea typeface="Arial"/>
+                <a:cs typeface="Arial"/>
+              </a:defRPr>
+            </a:pPr>
+            <a:r>
+              <a:rPr sz="2100" b="0">
+                <a:solidFill>
+                  <a:srgbClr val="344955"/>
+                </a:solidFill>
+                <a:latin typeface="Arial"/>
+                <a:ea typeface="Arial"/>
+                <a:cs typeface="Arial"/>
+              </a:rPr>
+              <a:t>Indoor navigation and racing are untested tasks. C lacks a compatible released policy path. That does not erase component usefulness.</a:t>
+            </a:r>
+          </a:p>
+        </p:txBody>
+      </p:sp>
+      <p:sp>
+        <p:nvSpPr>
+          <p:cNvPr id="5" name="">
+            <a:extLst xmlns:a="http://schemas.openxmlformats.org/drawingml/2006/main">
+              <a:ext uri="{FF2B5EF4-FFF2-40B4-BE49-F238E27FC236}">
+                <a16:creationId xmlns:a16="http://schemas.microsoft.com/office/drawing/2014/main" id="{566A8008-5A99-46DE-BE5E-A92D8E84AE89}"/>
+              </a:ext>
+            </a:extLst>
+          </p:cNvPr>
+          <p:cNvSpPr>
+            <a:spLocks xmlns:a="http://schemas.openxmlformats.org/drawingml/2006/main" noGrp="1"/>
+          </p:cNvSpPr>
+          <p:nvPr/>
+        </p:nvSpPr>
+        <p:spPr>
+          <a:xfrm xmlns:a="http://schemas.openxmlformats.org/drawingml/2006/main">
+            <a:off x="685800" y="6353175"/>
+            <a:ext cx="10820400" cy="266700"/>
+          </a:xfrm>
+          <a:prstGeom xmlns:a="http://schemas.openxmlformats.org/drawingml/2006/main" prst="rect">
+            <a:avLst/>
+          </a:prstGeom>
+          <a:noFill xmlns:a="http://schemas.openxmlformats.org/drawingml/2006/main"/>
+          <a:ln xmlns:a="http://schemas.openxmlformats.org/drawingml/2006/main" w="0">
+            <a:noFill/>
+          </a:ln>
+        </p:spPr>
+        <p:txBody>
+          <a:bodyPr xmlns:a="http://schemas.openxmlformats.org/drawingml/2006/main">
+            <a:noAutofit/>
+          </a:bodyPr>
+          <a:lstStyle xmlns:a="http://schemas.openxmlformats.org/drawingml/2006/main">
+            <a:defPPr>
+              <a:defRPr sz="1275" b="0">
+                <a:solidFill>
+                  <a:srgbClr val="606C75"/>
+                </a:solidFill>
+                <a:latin typeface="Arial"/>
+                <a:ea typeface="Arial"/>
+                <a:cs typeface="Arial"/>
+              </a:defRPr>
+            </a:defPPr>
+          </a:lstStyle>
+          <a:p xmlns:a="http://schemas.openxmlformats.org/drawingml/2006/main">
+            <a:pPr>
+              <a:defRPr sz="1275" b="0">
+                <a:solidFill>
+                  <a:srgbClr val="606C75"/>
+                </a:solidFill>
+                <a:latin typeface="Arial"/>
+                <a:ea typeface="Arial"/>
+                <a:cs typeface="Arial"/>
+              </a:defRPr>
+            </a:pPr>
+            <a:r>
+              <a:rPr sz="1275" b="0">
+                <a:solidFill>
+                  <a:srgbClr val="606C75"/>
+                </a:solidFill>
+                <a:latin typeface="Arial"/>
+                <a:ea typeface="Arial"/>
+                <a:cs typeface="Arial"/>
+              </a:rPr>
+              <a:t>Stock integration evidence · offline handoff 11 October 2026   14 / 16</a:t>
+            </a:r>
+          </a:p>
+        </p:txBody>
+      </p:sp>
+    </p:spTree>
+    <p:extLst>
+      <p:ext uri="{BB962C8B-B14F-4D97-AF65-F5344CB8AC3E}">
+        <p14:creationId xmlns:p14="http://schemas.microsoft.com/office/powerpoint/2010/main" val="292480154"/>
+      </p:ext>
+    </p:extLst>
+  </p:cSld>
+</p:sld>
+</file>
+
+<file path=ppt/slides/slide15.xml><?xml version="1.0" encoding="utf-8"?>
+<p:sld xmlns:p="http://schemas.openxmlformats.org/presentationml/2006/main">
+  <p:cSld>
+    <p:bg>
+      <p:bgPr>
+        <a:solidFill xmlns:a="http://schemas.openxmlformats.org/drawingml/2006/main">
+          <a:srgbClr val="FFFFFF"/>
+        </a:solidFill>
+      </p:bgPr>
+    </p:bg>
+    <p:spTree>
+      <p:nvGrpSpPr>
+        <p:cNvPr id="1" name=""/>
+        <p:cNvGrpSpPr/>
+        <p:nvPr/>
+      </p:nvGrpSpPr>
+      <p:grpSpPr>
+        <a:xfrm xmlns:a="http://schemas.openxmlformats.org/drawingml/2006/main"/>
+      </p:grpSpPr>
+      <p:sp>
+        <p:nvSpPr>
+          <p:cNvPr id="6" name="">
+            <a:extLst xmlns:a="http://schemas.openxmlformats.org/drawingml/2006/main">
+              <a:ext uri="{FF2B5EF4-FFF2-40B4-BE49-F238E27FC236}">
+                <a16:creationId xmlns:a16="http://schemas.microsoft.com/office/drawing/2014/main" id="{432C345A-5557-46C0-967C-FA96AB7B089D}"/>
+              </a:ext>
+            </a:extLst>
+          </p:cNvPr>
+          <p:cNvSpPr>
+            <a:spLocks xmlns:a="http://schemas.openxmlformats.org/drawingml/2006/main" noGrp="1"/>
+          </p:cNvSpPr>
+          <p:nvPr/>
+        </p:nvSpPr>
+        <p:spPr>
+          <a:xfrm xmlns:a="http://schemas.openxmlformats.org/drawingml/2006/main">
+            <a:off x="685800" y="476250"/>
+            <a:ext cx="10820400" cy="819150"/>
+          </a:xfrm>
+          <a:prstGeom xmlns:a="http://schemas.openxmlformats.org/drawingml/2006/main" prst="rect">
+            <a:avLst/>
+          </a:prstGeom>
+          <a:noFill xmlns:a="http://schemas.openxmlformats.org/drawingml/2006/main"/>
+          <a:ln xmlns:a="http://schemas.openxmlformats.org/drawingml/2006/main" w="0">
+            <a:noFill/>
+          </a:ln>
+        </p:spPr>
+        <p:txBody>
+          <a:bodyPr xmlns:a="http://schemas.openxmlformats.org/drawingml/2006/main">
+            <a:noAutofit/>
+          </a:bodyPr>
+          <a:lstStyle xmlns:a="http://schemas.openxmlformats.org/drawingml/2006/main">
+            <a:defPPr>
+              <a:defRPr sz="3300" b="1">
+                <a:solidFill>
+                  <a:srgbClr val="102D3B"/>
+                </a:solidFill>
+                <a:latin typeface="Arial"/>
+                <a:ea typeface="Arial"/>
+                <a:cs typeface="Arial"/>
+              </a:defRPr>
+            </a:defPPr>
+          </a:lstStyle>
+          <a:p xmlns:a="http://schemas.openxmlformats.org/drawingml/2006/main">
+            <a:pPr>
+              <a:defRPr sz="3300" b="1">
+                <a:solidFill>
+                  <a:srgbClr val="102D3B"/>
+                </a:solidFill>
+                <a:latin typeface="Arial"/>
+                <a:ea typeface="Arial"/>
+                <a:cs typeface="Arial"/>
+              </a:defRPr>
+            </a:pPr>
+            <a:r>
+              <a:rPr sz="3300" b="1">
+                <a:solidFill>
+                  <a:srgbClr val="102D3B"/>
+                </a:solidFill>
+                <a:latin typeface="Arial"/>
+                <a:ea typeface="Arial"/>
+                <a:cs typeface="Arial"/>
+              </a:rPr>
+              <a:t>Preservation and reviewer navigation</a:t>
+            </a:r>
+          </a:p>
+        </p:txBody>
+      </p:sp>
+      <p:sp>
+        <p:nvSpPr>
+          <p:cNvPr id="2" name="">
+            <a:extLst xmlns:a="http://schemas.openxmlformats.org/drawingml/2006/main">
+              <a:ext uri="{FF2B5EF4-FFF2-40B4-BE49-F238E27FC236}">
+                <a16:creationId xmlns:a16="http://schemas.microsoft.com/office/drawing/2014/main" id="{5FBA7911-71A9-4807-A494-2E8108B28258}"/>
+              </a:ext>
+            </a:extLst>
+          </p:cNvPr>
+          <p:cNvSpPr>
+            <a:spLocks xmlns:a="http://schemas.openxmlformats.org/drawingml/2006/main" noGrp="1"/>
+          </p:cNvSpPr>
+          <p:nvPr/>
+        </p:nvSpPr>
+        <p:spPr>
+          <a:xfrm xmlns:a="http://schemas.openxmlformats.org/drawingml/2006/main">
+            <a:off x="685800" y="1666875"/>
+            <a:ext cx="10820400" cy="1066800"/>
+          </a:xfrm>
+          <a:prstGeom xmlns:a="http://schemas.openxmlformats.org/drawingml/2006/main" prst="rect">
+            <a:avLst/>
+          </a:prstGeom>
+          <a:noFill xmlns:a="http://schemas.openxmlformats.org/drawingml/2006/main"/>
+          <a:ln xmlns:a="http://schemas.openxmlformats.org/drawingml/2006/main" w="0">
+            <a:noFill/>
+          </a:ln>
+        </p:spPr>
+        <p:txBody>
+          <a:bodyPr xmlns:a="http://schemas.openxmlformats.org/drawingml/2006/main">
+            <a:noAutofit/>
+          </a:bodyPr>
+          <a:lstStyle xmlns:a="http://schemas.openxmlformats.org/drawingml/2006/main">
+            <a:defPPr>
+              <a:defRPr sz="2100" b="0">
+                <a:solidFill>
+                  <a:srgbClr val="102D3B"/>
+                </a:solidFill>
+                <a:latin typeface="Arial"/>
+                <a:ea typeface="Arial"/>
+                <a:cs typeface="Arial"/>
+              </a:defRPr>
+            </a:defPPr>
+          </a:lstStyle>
+          <a:p xmlns:a="http://schemas.openxmlformats.org/drawingml/2006/main">
+            <a:pPr>
+              <a:defRPr sz="2100" b="0">
+                <a:solidFill>
+                  <a:srgbClr val="102D3B"/>
+                </a:solidFill>
+                <a:latin typeface="Arial"/>
+                <a:ea typeface="Arial"/>
+                <a:cs typeface="Arial"/>
+              </a:defRPr>
+            </a:pPr>
+            <a:r>
+              <a:rPr sz="2100" b="0">
+                <a:solidFill>
+                  <a:srgbClr val="102D3B"/>
+                </a:solidFill>
+                <a:latin typeface="Arial"/>
+                <a:ea typeface="Arial"/>
+                <a:cs typeface="Arial"/>
+              </a:rPr>
+              <a:t>Mac copies verify all three evidence ZIPs and their internal manifests. Main records include 1,237 native PNGs and B1 ULog.</a:t>
+            </a:r>
+          </a:p>
+        </p:txBody>
+      </p:sp>
+      <p:sp>
+        <p:nvSpPr>
+          <p:cNvPr id="3" name="">
+            <a:extLst xmlns:a="http://schemas.openxmlformats.org/drawingml/2006/main">
+              <a:ext uri="{FF2B5EF4-FFF2-40B4-BE49-F238E27FC236}">
+                <a16:creationId xmlns:a16="http://schemas.microsoft.com/office/drawing/2014/main" id="{239A4C20-BFCF-491A-BEA3-6C7C1DC71AB6}"/>
+              </a:ext>
+            </a:extLst>
+          </p:cNvPr>
+          <p:cNvSpPr>
+            <a:spLocks xmlns:a="http://schemas.openxmlformats.org/drawingml/2006/main" noGrp="1"/>
+          </p:cNvSpPr>
+          <p:nvPr/>
+        </p:nvSpPr>
+        <p:spPr>
+          <a:xfrm xmlns:a="http://schemas.openxmlformats.org/drawingml/2006/main">
+            <a:off x="685800" y="2886075"/>
+            <a:ext cx="10820400" cy="1066800"/>
+          </a:xfrm>
+          <a:prstGeom xmlns:a="http://schemas.openxmlformats.org/drawingml/2006/main" prst="rect">
+            <a:avLst/>
+          </a:prstGeom>
+          <a:noFill xmlns:a="http://schemas.openxmlformats.org/drawingml/2006/main"/>
+          <a:ln xmlns:a="http://schemas.openxmlformats.org/drawingml/2006/main" w="0">
+            <a:noFill/>
+          </a:ln>
+        </p:spPr>
+        <p:txBody>
+          <a:bodyPr xmlns:a="http://schemas.openxmlformats.org/drawingml/2006/main">
+            <a:noAutofit/>
+          </a:bodyPr>
+          <a:lstStyle xmlns:a="http://schemas.openxmlformats.org/drawingml/2006/main">
+            <a:defPPr>
+              <a:defRPr sz="2100" b="0">
+                <a:solidFill>
+                  <a:srgbClr val="344955"/>
+                </a:solidFill>
+                <a:latin typeface="Arial"/>
+                <a:ea typeface="Arial"/>
+                <a:cs typeface="Arial"/>
+              </a:defRPr>
+            </a:defPPr>
+          </a:lstStyle>
+          <a:p xmlns:a="http://schemas.openxmlformats.org/drawingml/2006/main">
+            <a:pPr>
+              <a:defRPr sz="2100" b="0">
+                <a:solidFill>
+                  <a:srgbClr val="344955"/>
+                </a:solidFill>
+                <a:latin typeface="Arial"/>
+                <a:ea typeface="Arial"/>
+                <a:cs typeface="Arial"/>
+              </a:defRPr>
+            </a:pPr>
+            <a:r>
+              <a:rPr sz="2100" b="0">
+                <a:solidFill>
+                  <a:srgbClr val="344955"/>
+                </a:solidFill>
+                <a:latin typeface="Arial"/>
+                <a:ea typeface="Arial"/>
+                <a:cs typeface="Arial"/>
+              </a:rPr>
+              <a:t>Standalone videos, the revised deck/PDF and an explanatory index publish to the existing private Drive folder. Sharing stays unchanged.</a:t>
+            </a:r>
+          </a:p>
+        </p:txBody>
+      </p:sp>
+      <p:sp>
+        <p:nvSpPr>
+          <p:cNvPr id="4" name="">
+            <a:extLst xmlns:a="http://schemas.openxmlformats.org/drawingml/2006/main">
+              <a:ext uri="{FF2B5EF4-FFF2-40B4-BE49-F238E27FC236}">
+                <a16:creationId xmlns:a16="http://schemas.microsoft.com/office/drawing/2014/main" id="{FEC3D81C-E704-47DE-97BE-28DF97F2EEFB}"/>
+              </a:ext>
+            </a:extLst>
+          </p:cNvPr>
+          <p:cNvSpPr>
+            <a:spLocks xmlns:a="http://schemas.openxmlformats.org/drawingml/2006/main" noGrp="1"/>
+          </p:cNvSpPr>
+          <p:nvPr/>
+        </p:nvSpPr>
+        <p:spPr>
+          <a:xfrm xmlns:a="http://schemas.openxmlformats.org/drawingml/2006/main">
+            <a:off x="685800" y="4105275"/>
+            <a:ext cx="10820400" cy="1066800"/>
+          </a:xfrm>
+          <a:prstGeom xmlns:a="http://schemas.openxmlformats.org/drawingml/2006/main" prst="rect">
+            <a:avLst/>
+          </a:prstGeom>
+          <a:noFill xmlns:a="http://schemas.openxmlformats.org/drawingml/2006/main"/>
+          <a:ln xmlns:a="http://schemas.openxmlformats.org/drawingml/2006/main" w="0">
+            <a:noFill/>
+          </a:ln>
+        </p:spPr>
+        <p:txBody>
+          <a:bodyPr xmlns:a="http://schemas.openxmlformats.org/drawingml/2006/main">
+            <a:noAutofit/>
+          </a:bodyPr>
+          <a:lstStyle xmlns:a="http://schemas.openxmlformats.org/drawingml/2006/main">
+            <a:defPPr>
+              <a:defRPr sz="2100" b="0">
+                <a:solidFill>
+                  <a:srgbClr val="344955"/>
+                </a:solidFill>
+                <a:latin typeface="Arial"/>
+                <a:ea typeface="Arial"/>
+                <a:cs typeface="Arial"/>
+              </a:defRPr>
+            </a:defPPr>
+          </a:lstStyle>
+          <a:p xmlns:a="http://schemas.openxmlformats.org/drawingml/2006/main">
+            <a:pPr>
+              <a:defRPr sz="2100" b="0">
+                <a:solidFill>
+                  <a:srgbClr val="344955"/>
+                </a:solidFill>
+                <a:latin typeface="Arial"/>
+                <a:ea typeface="Arial"/>
+                <a:cs typeface="Arial"/>
+              </a:defRPr>
+            </a:pPr>
+            <a:r>
+              <a:rPr sz="2100" b="0">
+                <a:solidFill>
+                  <a:srgbClr val="344955"/>
+                </a:solidFill>
+                <a:latin typeface="Arial"/>
+                <a:ea typeface="Arial"/>
+                <a:cs typeface="Arial"/>
+              </a:rPr>
+              <a:t>Final transcript, B2 ULog, strict-duration A1 retest and final scene/model/launcher inventory remain missing from durable delivery.</a:t>
+            </a:r>
+          </a:p>
+        </p:txBody>
+      </p:sp>
+      <p:sp>
+        <p:nvSpPr>
+          <p:cNvPr id="5" name="">
+            <a:extLst xmlns:a="http://schemas.openxmlformats.org/drawingml/2006/main">
+              <a:ext uri="{FF2B5EF4-FFF2-40B4-BE49-F238E27FC236}">
+                <a16:creationId xmlns:a16="http://schemas.microsoft.com/office/drawing/2014/main" id="{9334301A-3160-4ACF-B9F4-921C1655173C}"/>
+              </a:ext>
+            </a:extLst>
+          </p:cNvPr>
+          <p:cNvSpPr>
+            <a:spLocks xmlns:a="http://schemas.openxmlformats.org/drawingml/2006/main" noGrp="1"/>
+          </p:cNvSpPr>
+          <p:nvPr/>
+        </p:nvSpPr>
+        <p:spPr>
+          <a:xfrm xmlns:a="http://schemas.openxmlformats.org/drawingml/2006/main">
+            <a:off x="685800" y="6353175"/>
+            <a:ext cx="10820400" cy="266700"/>
+          </a:xfrm>
+          <a:prstGeom xmlns:a="http://schemas.openxmlformats.org/drawingml/2006/main" prst="rect">
+            <a:avLst/>
+          </a:prstGeom>
+          <a:noFill xmlns:a="http://schemas.openxmlformats.org/drawingml/2006/main"/>
+          <a:ln xmlns:a="http://schemas.openxmlformats.org/drawingml/2006/main" w="0">
+            <a:noFill/>
+          </a:ln>
+        </p:spPr>
+        <p:txBody>
+          <a:bodyPr xmlns:a="http://schemas.openxmlformats.org/drawingml/2006/main">
+            <a:noAutofit/>
+          </a:bodyPr>
+          <a:lstStyle xmlns:a="http://schemas.openxmlformats.org/drawingml/2006/main">
+            <a:defPPr>
+              <a:defRPr sz="1275" b="0">
+                <a:solidFill>
+                  <a:srgbClr val="606C75"/>
+                </a:solidFill>
+                <a:latin typeface="Arial"/>
+                <a:ea typeface="Arial"/>
+                <a:cs typeface="Arial"/>
+              </a:defRPr>
+            </a:defPPr>
+          </a:lstStyle>
+          <a:p xmlns:a="http://schemas.openxmlformats.org/drawingml/2006/main">
+            <a:pPr>
+              <a:defRPr sz="1275" b="0">
+                <a:solidFill>
+                  <a:srgbClr val="606C75"/>
+                </a:solidFill>
+                <a:latin typeface="Arial"/>
+                <a:ea typeface="Arial"/>
+                <a:cs typeface="Arial"/>
+              </a:defRPr>
+            </a:pPr>
+            <a:r>
+              <a:rPr sz="1275" b="0">
+                <a:solidFill>
+                  <a:srgbClr val="606C75"/>
+                </a:solidFill>
+                <a:latin typeface="Arial"/>
+                <a:ea typeface="Arial"/>
+                <a:cs typeface="Arial"/>
+              </a:rPr>
+              <a:t>Stock integration evidence · offline handoff 11 October 2026   15 / 16</a:t>
+            </a:r>
+          </a:p>
+        </p:txBody>
+      </p:sp>
+    </p:spTree>
+    <p:extLst>
+      <p:ext uri="{BB962C8B-B14F-4D97-AF65-F5344CB8AC3E}">
+        <p14:creationId xmlns:p14="http://schemas.microsoft.com/office/powerpoint/2010/main" val="561894428"/>
+      </p:ext>
+    </p:extLst>
+  </p:cSld>
+</p:sld>
+</file>
+
+<file path=ppt/slides/slide16.xml><?xml version="1.0" encoding="utf-8"?>
+<p:sld xmlns:p="http://schemas.openxmlformats.org/presentationml/2006/main">
+  <p:cSld>
+    <p:bg>
+      <p:bgPr>
+        <a:solidFill xmlns:a="http://schemas.openxmlformats.org/drawingml/2006/main">
+          <a:srgbClr val="FFFFFF"/>
+        </a:solidFill>
+      </p:bgPr>
+    </p:bg>
+    <p:spTree>
+      <p:nvGrpSpPr>
+        <p:cNvPr id="1" name=""/>
+        <p:cNvGrpSpPr/>
+        <p:nvPr/>
+      </p:nvGrpSpPr>
+      <p:grpSpPr>
+        <a:xfrm xmlns:a="http://schemas.openxmlformats.org/drawingml/2006/main"/>
+      </p:grpSpPr>
+      <p:sp>
+        <p:nvSpPr>
+          <p:cNvPr id="6" name="">
+            <a:extLst xmlns:a="http://schemas.openxmlformats.org/drawingml/2006/main">
+              <a:ext uri="{FF2B5EF4-FFF2-40B4-BE49-F238E27FC236}">
+                <a16:creationId xmlns:a16="http://schemas.microsoft.com/office/drawing/2014/main" id="{B74FAF32-F43A-43F4-9CF5-94FC69F24B37}"/>
+              </a:ext>
+            </a:extLst>
+          </p:cNvPr>
+          <p:cNvSpPr>
+            <a:spLocks xmlns:a="http://schemas.openxmlformats.org/drawingml/2006/main" noGrp="1"/>
+          </p:cNvSpPr>
+          <p:nvPr/>
+        </p:nvSpPr>
+        <p:spPr>
+          <a:xfrm xmlns:a="http://schemas.openxmlformats.org/drawingml/2006/main">
+            <a:off x="685800" y="476250"/>
+            <a:ext cx="10820400" cy="819150"/>
+          </a:xfrm>
+          <a:prstGeom xmlns:a="http://schemas.openxmlformats.org/drawingml/2006/main" prst="rect">
+            <a:avLst/>
+          </a:prstGeom>
+          <a:noFill xmlns:a="http://schemas.openxmlformats.org/drawingml/2006/main"/>
+          <a:ln xmlns:a="http://schemas.openxmlformats.org/drawingml/2006/main" w="0">
+            <a:noFill/>
+          </a:ln>
+        </p:spPr>
+        <p:txBody>
+          <a:bodyPr xmlns:a="http://schemas.openxmlformats.org/drawingml/2006/main">
+            <a:noAutofit/>
+          </a:bodyPr>
+          <a:lstStyle xmlns:a="http://schemas.openxmlformats.org/drawingml/2006/main">
+            <a:defPPr>
+              <a:defRPr sz="3300" b="1">
+                <a:solidFill>
+                  <a:srgbClr val="102D3B"/>
+                </a:solidFill>
+                <a:latin typeface="Arial"/>
+                <a:ea typeface="Arial"/>
+                <a:cs typeface="Arial"/>
+              </a:defRPr>
+            </a:defPPr>
+          </a:lstStyle>
+          <a:p xmlns:a="http://schemas.openxmlformats.org/drawingml/2006/main">
+            <a:pPr>
+              <a:defRPr sz="3300" b="1">
+                <a:solidFill>
+                  <a:srgbClr val="102D3B"/>
+                </a:solidFill>
+                <a:latin typeface="Arial"/>
+                <a:ea typeface="Arial"/>
+                <a:cs typeface="Arial"/>
+              </a:defRPr>
+            </a:pPr>
+            <a:r>
+              <a:rPr sz="3300" b="1">
+                <a:solidFill>
+                  <a:srgbClr val="102D3B"/>
+                </a:solidFill>
+                <a:latin typeface="Arial"/>
+                <a:ea typeface="Arial"/>
+                <a:cs typeface="Arial"/>
+              </a:rPr>
+              <a:t>Minimal follow-up and interface learning</a:t>
+            </a:r>
+          </a:p>
+        </p:txBody>
+      </p:sp>
+      <p:sp>
+        <p:nvSpPr>
+          <p:cNvPr id="2" name="">
+            <a:extLst xmlns:a="http://schemas.openxmlformats.org/drawingml/2006/main">
+              <a:ext uri="{FF2B5EF4-FFF2-40B4-BE49-F238E27FC236}">
+                <a16:creationId xmlns:a16="http://schemas.microsoft.com/office/drawing/2014/main" id="{03F6DEE6-B764-486D-AD59-1854B744A5A6}"/>
+              </a:ext>
+            </a:extLst>
+          </p:cNvPr>
+          <p:cNvSpPr>
+            <a:spLocks xmlns:a="http://schemas.openxmlformats.org/drawingml/2006/main" noGrp="1"/>
+          </p:cNvSpPr>
+          <p:nvPr/>
+        </p:nvSpPr>
+        <p:spPr>
+          <a:xfrm xmlns:a="http://schemas.openxmlformats.org/drawingml/2006/main">
+            <a:off x="685800" y="1666875"/>
+            <a:ext cx="10820400" cy="1066800"/>
+          </a:xfrm>
+          <a:prstGeom xmlns:a="http://schemas.openxmlformats.org/drawingml/2006/main" prst="rect">
+            <a:avLst/>
+          </a:prstGeom>
+          <a:noFill xmlns:a="http://schemas.openxmlformats.org/drawingml/2006/main"/>
+          <a:ln xmlns:a="http://schemas.openxmlformats.org/drawingml/2006/main" w="0">
+            <a:noFill/>
+          </a:ln>
+        </p:spPr>
+        <p:txBody>
+          <a:bodyPr xmlns:a="http://schemas.openxmlformats.org/drawingml/2006/main">
+            <a:noAutofit/>
+          </a:bodyPr>
+          <a:lstStyle xmlns:a="http://schemas.openxmlformats.org/drawingml/2006/main">
+            <a:defPPr>
+              <a:defRPr sz="2100" b="0">
+                <a:solidFill>
+                  <a:srgbClr val="102D3B"/>
+                </a:solidFill>
+                <a:latin typeface="Arial"/>
+                <a:ea typeface="Arial"/>
+                <a:cs typeface="Arial"/>
+              </a:defRPr>
+            </a:defPPr>
+          </a:lstStyle>
+          <a:p xmlns:a="http://schemas.openxmlformats.org/drawingml/2006/main">
+            <a:pPr>
+              <a:defRPr sz="2100" b="0">
+                <a:solidFill>
+                  <a:srgbClr val="102D3B"/>
+                </a:solidFill>
+                <a:latin typeface="Arial"/>
+                <a:ea typeface="Arial"/>
+                <a:cs typeface="Arial"/>
+              </a:defRPr>
+            </a:pPr>
+            <a:r>
+              <a:rPr sz="2100" b="0">
+                <a:solidFill>
+                  <a:srgbClr val="102D3B"/>
+                </a:solidFill>
+                <a:latin typeface="Arial"/>
+                <a:ea typeface="Arial"/>
+                <a:cs typeface="Arial"/>
+              </a:rPr>
+              <a:t>No restart is needed for the control/native-baseline decision. Optional recovery of missing files would take about 15–20 minutes.</a:t>
+            </a:r>
+          </a:p>
+        </p:txBody>
+      </p:sp>
+      <p:sp>
+        <p:nvSpPr>
+          <p:cNvPr id="3" name="">
+            <a:extLst xmlns:a="http://schemas.openxmlformats.org/drawingml/2006/main">
+              <a:ext uri="{FF2B5EF4-FFF2-40B4-BE49-F238E27FC236}">
+                <a16:creationId xmlns:a16="http://schemas.microsoft.com/office/drawing/2014/main" id="{1C88E21A-62BD-4FC0-83F7-447BE6C56DE8}"/>
+              </a:ext>
+            </a:extLst>
+          </p:cNvPr>
+          <p:cNvSpPr>
+            <a:spLocks xmlns:a="http://schemas.openxmlformats.org/drawingml/2006/main" noGrp="1"/>
+          </p:cNvSpPr>
+          <p:nvPr/>
+        </p:nvSpPr>
+        <p:spPr>
+          <a:xfrm xmlns:a="http://schemas.openxmlformats.org/drawingml/2006/main">
+            <a:off x="685800" y="2886075"/>
+            <a:ext cx="10820400" cy="1066800"/>
+          </a:xfrm>
+          <a:prstGeom xmlns:a="http://schemas.openxmlformats.org/drawingml/2006/main" prst="rect">
+            <a:avLst/>
+          </a:prstGeom>
+          <a:noFill xmlns:a="http://schemas.openxmlformats.org/drawingml/2006/main"/>
+          <a:ln xmlns:a="http://schemas.openxmlformats.org/drawingml/2006/main" w="0">
+            <a:noFill/>
+          </a:ln>
+        </p:spPr>
+        <p:txBody>
+          <a:bodyPr xmlns:a="http://schemas.openxmlformats.org/drawingml/2006/main">
+            <a:noAutofit/>
+          </a:bodyPr>
+          <a:lstStyle xmlns:a="http://schemas.openxmlformats.org/drawingml/2006/main">
+            <a:defPPr>
+              <a:defRPr sz="2100" b="0">
+                <a:solidFill>
+                  <a:srgbClr val="344955"/>
+                </a:solidFill>
+                <a:latin typeface="Arial"/>
+                <a:ea typeface="Arial"/>
+                <a:cs typeface="Arial"/>
+              </a:defRPr>
+            </a:defPPr>
+          </a:lstStyle>
+          <a:p xmlns:a="http://schemas.openxmlformats.org/drawingml/2006/main">
+            <a:pPr>
+              <a:defRPr sz="2100" b="0">
+                <a:solidFill>
+                  <a:srgbClr val="344955"/>
+                </a:solidFill>
+                <a:latin typeface="Arial"/>
+                <a:ea typeface="Arial"/>
+                <a:cs typeface="Arial"/>
+              </a:defRPr>
+            </a:pPr>
+            <a:r>
+              <a:rPr sz="2100" b="0">
+                <a:solidFill>
+                  <a:srgbClr val="344955"/>
+                </a:solidFill>
+                <a:latin typeface="Arial"/>
+                <a:ea typeface="Arial"/>
+                <a:cs typeface="Arial"/>
+              </a:rPr>
+              <a:t>Only measure the selected role next: external motion mapping, native calibrated replay, or our cleanup helper. Do not repeat every passed flight.</a:t>
+            </a:r>
+          </a:p>
+        </p:txBody>
+      </p:sp>
+      <p:sp>
+        <p:nvSpPr>
+          <p:cNvPr id="4" name="">
+            <a:extLst xmlns:a="http://schemas.openxmlformats.org/drawingml/2006/main">
+              <a:ext uri="{FF2B5EF4-FFF2-40B4-BE49-F238E27FC236}">
+                <a16:creationId xmlns:a16="http://schemas.microsoft.com/office/drawing/2014/main" id="{08CA7E9F-D19A-4E02-8ABB-54E46731C12C}"/>
+              </a:ext>
+            </a:extLst>
+          </p:cNvPr>
+          <p:cNvSpPr>
+            <a:spLocks xmlns:a="http://schemas.openxmlformats.org/drawingml/2006/main" noGrp="1"/>
+          </p:cNvSpPr>
+          <p:nvPr/>
+        </p:nvSpPr>
+        <p:spPr>
+          <a:xfrm xmlns:a="http://schemas.openxmlformats.org/drawingml/2006/main">
+            <a:off x="685800" y="4105275"/>
+            <a:ext cx="10820400" cy="1066800"/>
+          </a:xfrm>
+          <a:prstGeom xmlns:a="http://schemas.openxmlformats.org/drawingml/2006/main" prst="rect">
+            <a:avLst/>
+          </a:prstGeom>
+          <a:noFill xmlns:a="http://schemas.openxmlformats.org/drawingml/2006/main"/>
+          <a:ln xmlns:a="http://schemas.openxmlformats.org/drawingml/2006/main" w="0">
+            <a:noFill/>
+          </a:ln>
+        </p:spPr>
+        <p:txBody>
+          <a:bodyPr xmlns:a="http://schemas.openxmlformats.org/drawingml/2006/main">
+            <a:noAutofit/>
+          </a:bodyPr>
+          <a:lstStyle xmlns:a="http://schemas.openxmlformats.org/drawingml/2006/main">
+            <a:defPPr>
+              <a:defRPr sz="2100" b="0">
+                <a:solidFill>
+                  <a:srgbClr val="344955"/>
+                </a:solidFill>
+                <a:latin typeface="Arial"/>
+                <a:ea typeface="Arial"/>
+                <a:cs typeface="Arial"/>
+              </a:defRPr>
+            </a:defPPr>
+          </a:lstStyle>
+          <a:p xmlns:a="http://schemas.openxmlformats.org/drawingml/2006/main">
+            <a:pPr>
+              <a:defRPr sz="2100" b="0">
+                <a:solidFill>
+                  <a:srgbClr val="344955"/>
+                </a:solidFill>
+                <a:latin typeface="Arial"/>
+                <a:ea typeface="Arial"/>
+                <a:cs typeface="Arial"/>
+              </a:defRPr>
+            </a:pPr>
+            <a:r>
+              <a:rPr sz="2100" b="0">
+                <a:solidFill>
+                  <a:srgbClr val="344955"/>
+                </a:solidFill>
+                <a:latin typeface="Arial"/>
+                <a:ea typeface="Arial"/>
+                <a:cs typeface="Arial"/>
+              </a:rPr>
+              <a:t>Understand NED/FRD versus camera axes, estimate versus truth, ACK versus achieved state, distinct clocks, and SITL versus physical HITL.</a:t>
+            </a:r>
+          </a:p>
+        </p:txBody>
+      </p:sp>
+      <p:sp>
+        <p:nvSpPr>
+          <p:cNvPr id="5" name="">
+            <a:extLst xmlns:a="http://schemas.openxmlformats.org/drawingml/2006/main">
+              <a:ext uri="{FF2B5EF4-FFF2-40B4-BE49-F238E27FC236}">
+                <a16:creationId xmlns:a16="http://schemas.microsoft.com/office/drawing/2014/main" id="{7ACB45E0-ED32-4D77-A5BE-C70A33747077}"/>
+              </a:ext>
+            </a:extLst>
+          </p:cNvPr>
+          <p:cNvSpPr>
+            <a:spLocks xmlns:a="http://schemas.openxmlformats.org/drawingml/2006/main" noGrp="1"/>
+          </p:cNvSpPr>
+          <p:nvPr/>
+        </p:nvSpPr>
+        <p:spPr>
+          <a:xfrm xmlns:a="http://schemas.openxmlformats.org/drawingml/2006/main">
+            <a:off x="685800" y="6353175"/>
+            <a:ext cx="10820400" cy="266700"/>
+          </a:xfrm>
+          <a:prstGeom xmlns:a="http://schemas.openxmlformats.org/drawingml/2006/main" prst="rect">
+            <a:avLst/>
+          </a:prstGeom>
+          <a:noFill xmlns:a="http://schemas.openxmlformats.org/drawingml/2006/main"/>
+          <a:ln xmlns:a="http://schemas.openxmlformats.org/drawingml/2006/main" w="0">
+            <a:noFill/>
+          </a:ln>
+        </p:spPr>
+        <p:txBody>
+          <a:bodyPr xmlns:a="http://schemas.openxmlformats.org/drawingml/2006/main">
+            <a:noAutofit/>
+          </a:bodyPr>
+          <a:lstStyle xmlns:a="http://schemas.openxmlformats.org/drawingml/2006/main">
+            <a:defPPr>
+              <a:defRPr sz="1275" b="0">
+                <a:solidFill>
+                  <a:srgbClr val="606C75"/>
+                </a:solidFill>
+                <a:latin typeface="Arial"/>
+                <a:ea typeface="Arial"/>
+                <a:cs typeface="Arial"/>
+              </a:defRPr>
+            </a:defPPr>
+          </a:lstStyle>
+          <a:p xmlns:a="http://schemas.openxmlformats.org/drawingml/2006/main">
+            <a:pPr>
+              <a:defRPr sz="1275" b="0">
+                <a:solidFill>
+                  <a:srgbClr val="606C75"/>
+                </a:solidFill>
+                <a:latin typeface="Arial"/>
+                <a:ea typeface="Arial"/>
+                <a:cs typeface="Arial"/>
+              </a:defRPr>
+            </a:pPr>
+            <a:r>
+              <a:rPr sz="1275" b="0">
+                <a:solidFill>
+                  <a:srgbClr val="606C75"/>
+                </a:solidFill>
+                <a:latin typeface="Arial"/>
+                <a:ea typeface="Arial"/>
+                <a:cs typeface="Arial"/>
+              </a:rPr>
+              <a:t>Offline handoff complete · AirGPU stays Off · no new simulator measurements   16 / 16</a:t>
+            </a:r>
+          </a:p>
+        </p:txBody>
+      </p:sp>
+    </p:spTree>
+    <p:extLst>
+      <p:ext uri="{BB962C8B-B14F-4D97-AF65-F5344CB8AC3E}">
+        <p14:creationId xmlns:p14="http://schemas.microsoft.com/office/powerpoint/2010/main" val="1598412436"/>
       </p:ext>
     </p:extLst>
   </p:cSld>
@@ -5006,7 +7534,7 @@
           <p:cNvPr id="6" name="">
             <a:extLst xmlns:a="http://schemas.openxmlformats.org/drawingml/2006/main">
               <a:ext uri="{FF2B5EF4-FFF2-40B4-BE49-F238E27FC236}">
-                <a16:creationId xmlns:a16="http://schemas.microsoft.com/office/drawing/2014/main" id="{FD5CC023-A97D-4008-84DB-BA66BEE800E9}"/>
+                <a16:creationId xmlns:a16="http://schemas.microsoft.com/office/drawing/2014/main" id="{2DCD5F40-C432-4F7B-A4CE-24FA35D0776A}"/>
               </a:ext>
             </a:extLst>
           </p:cNvPr>
@@ -5064,7 +7592,7 @@
                 <a:ea typeface="Arial"/>
                 <a:cs typeface="Arial"/>
               </a:rPr>
-              <a:t>Inputs and component boundaries</a:t>
+              <a:t>Actual assets and versions</a:t>
             </a:r>
           </a:p>
         </p:txBody>
@@ -5074,7 +7602,7 @@
           <p:cNvPr id="2" name="">
             <a:extLst xmlns:a="http://schemas.openxmlformats.org/drawingml/2006/main">
               <a:ext uri="{FF2B5EF4-FFF2-40B4-BE49-F238E27FC236}">
-                <a16:creationId xmlns:a16="http://schemas.microsoft.com/office/drawing/2014/main" id="{C2217BE7-E786-48E3-B7EE-251E14B04DCC}"/>
+                <a16:creationId xmlns:a16="http://schemas.microsoft.com/office/drawing/2014/main" id="{13C3D38B-20E1-44D9-A79B-3E34D1F65E77}"/>
               </a:ext>
             </a:extLst>
           </p:cNvPr>
@@ -5132,7 +7660,7 @@
                 <a:ea typeface="Arial"/>
                 <a:cs typeface="Arial"/>
               </a:rPr>
-              <a:t>Input: Free v5.01 ISO, stock Grasslands, Iris model 0, frozen NED route. No policy weights or real reconstruction.</a:t>
+              <a:t>Software: Free v5.01-20260831. CopterSim 5.0.1, RflySim3D 5.01 / UE4.27.2, PX4 1.12.3dev.</a:t>
             </a:r>
           </a:p>
         </p:txBody>
@@ -5142,7 +7670,7 @@
           <p:cNvPr id="3" name="">
             <a:extLst xmlns:a="http://schemas.openxmlformats.org/drawingml/2006/main">
               <a:ext uri="{FF2B5EF4-FFF2-40B4-BE49-F238E27FC236}">
-                <a16:creationId xmlns:a16="http://schemas.microsoft.com/office/drawing/2014/main" id="{902AEB12-AF79-41BC-BC9D-987023304942}"/>
+                <a16:creationId xmlns:a16="http://schemas.microsoft.com/office/drawing/2014/main" id="{588E767F-7374-4FD4-A77B-60BA2930FA5D}"/>
               </a:ext>
             </a:extLst>
           </p:cNvPr>
@@ -5200,7 +7728,7 @@
                 <a:ea typeface="Arial"/>
                 <a:cs typeface="Arial"/>
               </a:rPr>
-              <a:t>Python sends setpoints to PX4. CopterSim advances dynamics. PX4 returns estimates and mode/arm ACKs.</a:t>
+              <a:t>Scene and vehicle: stock Grasslands, CopterSim model 0, Iris airframe 10016. Full physical model inventory is missing.</a:t>
             </a:r>
           </a:p>
         </p:txBody>
@@ -5210,7 +7738,7 @@
           <p:cNvPr id="4" name="">
             <a:extLst xmlns:a="http://schemas.openxmlformats.org/drawingml/2006/main">
               <a:ext uri="{FF2B5EF4-FFF2-40B4-BE49-F238E27FC236}">
-                <a16:creationId xmlns:a16="http://schemas.microsoft.com/office/drawing/2014/main" id="{2D1AD2CC-1799-4BF0-99BE-0486845FEAD4}"/>
+                <a16:creationId xmlns:a16="http://schemas.microsoft.com/office/drawing/2014/main" id="{9178A4A1-07A1-4B4B-919A-C49B84F7E83B}"/>
               </a:ext>
             </a:extLst>
           </p:cNvPr>
@@ -5268,7 +7796,7 @@
                 <a:ea typeface="Arial"/>
                 <a:cs typeface="Arial"/>
               </a:rPr>
-              <a:t>UE4 renders the camera. A separate receiver saves images and raw camera/body metadata. Calibrated association is still missing.</a:t>
+              <a:t>No real reconstruction, dataset or learned weights. “Checkpoint” ZIPs back up evidence. They are not learned models.</a:t>
             </a:r>
           </a:p>
         </p:txBody>
@@ -5278,7 +7806,7 @@
           <p:cNvPr id="5" name="">
             <a:extLst xmlns:a="http://schemas.openxmlformats.org/drawingml/2006/main">
               <a:ext uri="{FF2B5EF4-FFF2-40B4-BE49-F238E27FC236}">
-                <a16:creationId xmlns:a16="http://schemas.microsoft.com/office/drawing/2014/main" id="{F3865318-7880-469D-88E6-579DF0C6C19A}"/>
+                <a16:creationId xmlns:a16="http://schemas.microsoft.com/office/drawing/2014/main" id="{A876C397-2DFF-4FA4-B889-6AF06F6FC709}"/>
               </a:ext>
             </a:extLst>
           </p:cNvPr>
@@ -5336,7 +7864,7 @@
                 <a:ea typeface="Arial"/>
                 <a:cs typeface="Arial"/>
               </a:rPr>
-              <a:t>Measured stock integration. Calibration and real-scene fidelity remain incomplete.   2 / 12</a:t>
+              <a:t>Stock integration evidence · offline handoff 11 October 2026   2 / 16</a:t>
             </a:r>
           </a:p>
         </p:txBody>
@@ -5344,7 +7872,7 @@
     </p:spTree>
     <p:extLst>
       <p:ext uri="{BB962C8B-B14F-4D97-AF65-F5344CB8AC3E}">
-        <p14:creationId xmlns:p14="http://schemas.microsoft.com/office/powerpoint/2010/main" val="1710492847"/>
+        <p14:creationId xmlns:p14="http://schemas.microsoft.com/office/powerpoint/2010/main" val="1034127980"/>
       </p:ext>
     </p:extLst>
   </p:cSld>
@@ -5372,10 +7900,10 @@
       </p:grpSpPr>
       <p:sp>
         <p:nvSpPr>
-          <p:cNvPr id="6" name="">
-            <a:extLst xmlns:a="http://schemas.openxmlformats.org/drawingml/2006/main">
-              <a:ext uri="{FF2B5EF4-FFF2-40B4-BE49-F238E27FC236}">
-                <a16:creationId xmlns:a16="http://schemas.microsoft.com/office/drawing/2014/main" id="{4882A3B2-8094-495A-8FB1-B58CD5907AFD}"/>
+          <p:cNvPr id="25" name="">
+            <a:extLst xmlns:a="http://schemas.openxmlformats.org/drawingml/2006/main">
+              <a:ext uri="{FF2B5EF4-FFF2-40B4-BE49-F238E27FC236}">
+                <a16:creationId xmlns:a16="http://schemas.microsoft.com/office/drawing/2014/main" id="{58F6110B-60EE-4D2E-BC4F-E86AE678326E}"/>
               </a:ext>
             </a:extLst>
           </p:cNvPr>
@@ -5433,7 +7961,7 @@
                 <a:ea typeface="Arial"/>
                 <a:cs typeface="Arial"/>
               </a:rPr>
-              <a:t>Installation and graphics now work</a:t>
+              <a:t>Native control and observation path</a:t>
             </a:r>
           </a:p>
         </p:txBody>
@@ -5443,7 +7971,7 @@
           <p:cNvPr id="2" name="">
             <a:extLst xmlns:a="http://schemas.openxmlformats.org/drawingml/2006/main">
               <a:ext uri="{FF2B5EF4-FFF2-40B4-BE49-F238E27FC236}">
-                <a16:creationId xmlns:a16="http://schemas.microsoft.com/office/drawing/2014/main" id="{00DC04FB-68F1-4B53-BCBE-E182D850A65F}"/>
+                <a16:creationId xmlns:a16="http://schemas.microsoft.com/office/drawing/2014/main" id="{466A7939-C5C3-4F13-9C71-DBA7078A3003}"/>
               </a:ext>
             </a:extLst>
           </p:cNvPr>
@@ -5454,8 +7982,40 @@
         </p:nvSpPr>
         <p:spPr>
           <a:xfrm xmlns:a="http://schemas.openxmlformats.org/drawingml/2006/main">
-            <a:off x="685800" y="1666875"/>
-            <a:ext cx="10820400" cy="1066800"/>
+            <a:off x="685800" y="1809750"/>
+            <a:ext cx="1962150" cy="1619250"/>
+          </a:xfrm>
+          <a:prstGeom xmlns:a="http://schemas.openxmlformats.org/drawingml/2006/main" prst="rect">
+            <a:avLst/>
+          </a:prstGeom>
+          <a:solidFill xmlns:a="http://schemas.openxmlformats.org/drawingml/2006/main">
+            <a:srgbClr val="EDF4F6"/>
+          </a:solidFill>
+          <a:ln xmlns:a="http://schemas.openxmlformats.org/drawingml/2006/main" w="9525">
+            <a:solidFill>
+              <a:srgbClr val="8AACB9"/>
+            </a:solidFill>
+          </a:ln>
+        </p:spPr>
+      </p:sp>
+      <p:sp>
+        <p:nvSpPr>
+          <p:cNvPr id="3" name="">
+            <a:extLst xmlns:a="http://schemas.openxmlformats.org/drawingml/2006/main">
+              <a:ext uri="{FF2B5EF4-FFF2-40B4-BE49-F238E27FC236}">
+                <a16:creationId xmlns:a16="http://schemas.microsoft.com/office/drawing/2014/main" id="{72E60C01-71B0-495B-BE2C-1751D075C4C7}"/>
+              </a:ext>
+            </a:extLst>
+          </p:cNvPr>
+          <p:cNvSpPr>
+            <a:spLocks xmlns:a="http://schemas.openxmlformats.org/drawingml/2006/main" noGrp="1"/>
+          </p:cNvSpPr>
+          <p:nvPr/>
+        </p:nvSpPr>
+        <p:spPr>
+          <a:xfrm xmlns:a="http://schemas.openxmlformats.org/drawingml/2006/main">
+            <a:off x="800100" y="1933575"/>
+            <a:ext cx="1752600" cy="428625"/>
           </a:xfrm>
           <a:prstGeom xmlns:a="http://schemas.openxmlformats.org/drawingml/2006/main" prst="rect">
             <a:avLst/>
@@ -5471,7 +8031,7 @@
           </a:bodyPr>
           <a:lstStyle xmlns:a="http://schemas.openxmlformats.org/drawingml/2006/main">
             <a:defPPr>
-              <a:defRPr sz="2100" b="0">
+              <a:defRPr sz="1875" b="1">
                 <a:solidFill>
                   <a:srgbClr val="102D3B"/>
                 </a:solidFill>
@@ -5483,7 +8043,7 @@
           </a:lstStyle>
           <a:p xmlns:a="http://schemas.openxmlformats.org/drawingml/2006/main">
             <a:pPr>
-              <a:defRPr sz="2100" b="0">
+              <a:defRPr sz="1875" b="1">
                 <a:solidFill>
                   <a:srgbClr val="102D3B"/>
                 </a:solidFill>
@@ -5493,7 +8053,7 @@
               </a:defRPr>
             </a:pPr>
             <a:r>
-              <a:rPr sz="2100" b="0">
+              <a:rPr sz="1875" b="1">
                 <a:solidFill>
                   <a:srgbClr val="102D3B"/>
                 </a:solidFill>
@@ -5501,17 +8061,17 @@
                 <a:ea typeface="Arial"/>
                 <a:cs typeface="Arial"/>
               </a:rPr>
-              <a:t>The bundled Epic prerequisite installer completed with exit 0. Correct renderer working directory resolved startup in the retest.</a:t>
-            </a:r>
-          </a:p>
-        </p:txBody>
-      </p:sp>
-      <p:sp>
-        <p:nvSpPr>
-          <p:cNvPr id="3" name="">
-            <a:extLst xmlns:a="http://schemas.openxmlformats.org/drawingml/2006/main">
-              <a:ext uri="{FF2B5EF4-FFF2-40B4-BE49-F238E27FC236}">
-                <a16:creationId xmlns:a16="http://schemas.microsoft.com/office/drawing/2014/main" id="{471F9FDF-0A0F-4CF2-A00D-4FAC924A9044}"/>
+              <a:t>Supervisor</a:t>
+            </a:r>
+          </a:p>
+        </p:txBody>
+      </p:sp>
+      <p:sp>
+        <p:nvSpPr>
+          <p:cNvPr id="4" name="">
+            <a:extLst xmlns:a="http://schemas.openxmlformats.org/drawingml/2006/main">
+              <a:ext uri="{FF2B5EF4-FFF2-40B4-BE49-F238E27FC236}">
+                <a16:creationId xmlns:a16="http://schemas.microsoft.com/office/drawing/2014/main" id="{4E985F1C-F5EA-44CD-9697-2FF4C9638F49}"/>
               </a:ext>
             </a:extLst>
           </p:cNvPr>
@@ -5522,8 +8082,8 @@
         </p:nvSpPr>
         <p:spPr>
           <a:xfrm xmlns:a="http://schemas.openxmlformats.org/drawingml/2006/main">
-            <a:off x="685800" y="2886075"/>
-            <a:ext cx="10820400" cy="1066800"/>
+            <a:off x="800100" y="2495550"/>
+            <a:ext cx="1752600" cy="790575"/>
           </a:xfrm>
           <a:prstGeom xmlns:a="http://schemas.openxmlformats.org/drawingml/2006/main" prst="rect">
             <a:avLst/>
@@ -5539,7 +8099,7 @@
           </a:bodyPr>
           <a:lstStyle xmlns:a="http://schemas.openxmlformats.org/drawingml/2006/main">
             <a:defPPr>
-              <a:defRPr sz="2100" b="0">
+              <a:defRPr sz="1800" b="0">
                 <a:solidFill>
                   <a:srgbClr val="344955"/>
                 </a:solidFill>
@@ -5551,7 +8111,7 @@
           </a:lstStyle>
           <a:p xmlns:a="http://schemas.openxmlformats.org/drawingml/2006/main">
             <a:pPr>
-              <a:defRPr sz="2100" b="0">
+              <a:defRPr sz="1800" b="0">
                 <a:solidFill>
                   <a:srgbClr val="344955"/>
                 </a:solidFill>
@@ -5561,7 +8121,7 @@
               </a:defRPr>
             </a:pPr>
             <a:r>
-              <a:rPr sz="2100" b="0">
+              <a:rPr sz="1800" b="0">
                 <a:solidFill>
                   <a:srgbClr val="344955"/>
                 </a:solidFill>
@@ -5569,17 +8129,40 @@
                 <a:ea typeface="Arial"/>
                 <a:cs typeface="Arial"/>
               </a:rPr>
-              <a:t>RflySim3D selected NVIDIA L4 through D3D11. UE4 4.27.2 loaded Grasslands.</a:t>
-            </a:r>
-          </a:p>
-        </p:txBody>
-      </p:sp>
-      <p:sp>
-        <p:nvSpPr>
-          <p:cNvPr id="4" name="">
-            <a:extLst xmlns:a="http://schemas.openxmlformats.org/drawingml/2006/main">
-              <a:ext uri="{FF2B5EF4-FFF2-40B4-BE49-F238E27FC236}">
-                <a16:creationId xmlns:a16="http://schemas.microsoft.com/office/drawing/2014/main" id="{03DD63BC-5837-425E-B7DA-56274FECC846}"/>
+              <a:t>NED targets</a:t>
+            </a:r>
+          </a:p>
+          <a:p xmlns:a="http://schemas.openxmlformats.org/drawingml/2006/main">
+            <a:pPr>
+              <a:defRPr sz="1800" b="0">
+                <a:solidFill>
+                  <a:srgbClr val="344955"/>
+                </a:solidFill>
+                <a:latin typeface="Arial"/>
+                <a:ea typeface="Arial"/>
+                <a:cs typeface="Arial"/>
+              </a:defRPr>
+            </a:pPr>
+            <a:r>
+              <a:rPr sz="1800" b="0">
+                <a:solidFill>
+                  <a:srgbClr val="344955"/>
+                </a:solidFill>
+                <a:latin typeface="Arial"/>
+                <a:ea typeface="Arial"/>
+                <a:cs typeface="Arial"/>
+              </a:rPr>
+              <a:t>10 Hz</a:t>
+            </a:r>
+          </a:p>
+        </p:txBody>
+      </p:sp>
+      <p:sp>
+        <p:nvSpPr>
+          <p:cNvPr id="5" name="">
+            <a:extLst xmlns:a="http://schemas.openxmlformats.org/drawingml/2006/main">
+              <a:ext uri="{FF2B5EF4-FFF2-40B4-BE49-F238E27FC236}">
+                <a16:creationId xmlns:a16="http://schemas.microsoft.com/office/drawing/2014/main" id="{1B922CA6-DFF2-4200-B0DE-414A410CE480}"/>
               </a:ext>
             </a:extLst>
           </p:cNvPr>
@@ -5590,8 +8173,70 @@
         </p:nvSpPr>
         <p:spPr>
           <a:xfrm xmlns:a="http://schemas.openxmlformats.org/drawingml/2006/main">
-            <a:off x="685800" y="4105275"/>
-            <a:ext cx="10820400" cy="1066800"/>
+            <a:off x="2676525" y="2466975"/>
+            <a:ext cx="190500" cy="238125"/>
+          </a:xfrm>
+          <a:prstGeom xmlns:a="http://schemas.openxmlformats.org/drawingml/2006/main" prst="rightArrow">
+            <a:avLst/>
+          </a:prstGeom>
+          <a:solidFill xmlns:a="http://schemas.openxmlformats.org/drawingml/2006/main">
+            <a:srgbClr val="376A7F"/>
+          </a:solidFill>
+          <a:ln xmlns:a="http://schemas.openxmlformats.org/drawingml/2006/main" w="0">
+            <a:noFill/>
+          </a:ln>
+        </p:spPr>
+      </p:sp>
+      <p:sp>
+        <p:nvSpPr>
+          <p:cNvPr id="6" name="">
+            <a:extLst xmlns:a="http://schemas.openxmlformats.org/drawingml/2006/main">
+              <a:ext uri="{FF2B5EF4-FFF2-40B4-BE49-F238E27FC236}">
+                <a16:creationId xmlns:a16="http://schemas.microsoft.com/office/drawing/2014/main" id="{FE800C07-2451-4F57-AE45-8D47DDD934C4}"/>
+              </a:ext>
+            </a:extLst>
+          </p:cNvPr>
+          <p:cNvSpPr>
+            <a:spLocks xmlns:a="http://schemas.openxmlformats.org/drawingml/2006/main" noGrp="1"/>
+          </p:cNvSpPr>
+          <p:nvPr/>
+        </p:nvSpPr>
+        <p:spPr>
+          <a:xfrm xmlns:a="http://schemas.openxmlformats.org/drawingml/2006/main">
+            <a:off x="2895600" y="1809750"/>
+            <a:ext cx="1962150" cy="1619250"/>
+          </a:xfrm>
+          <a:prstGeom xmlns:a="http://schemas.openxmlformats.org/drawingml/2006/main" prst="rect">
+            <a:avLst/>
+          </a:prstGeom>
+          <a:solidFill xmlns:a="http://schemas.openxmlformats.org/drawingml/2006/main">
+            <a:srgbClr val="EDF4F6"/>
+          </a:solidFill>
+          <a:ln xmlns:a="http://schemas.openxmlformats.org/drawingml/2006/main" w="9525">
+            <a:solidFill>
+              <a:srgbClr val="8AACB9"/>
+            </a:solidFill>
+          </a:ln>
+        </p:spPr>
+      </p:sp>
+      <p:sp>
+        <p:nvSpPr>
+          <p:cNvPr id="7" name="">
+            <a:extLst xmlns:a="http://schemas.openxmlformats.org/drawingml/2006/main">
+              <a:ext uri="{FF2B5EF4-FFF2-40B4-BE49-F238E27FC236}">
+                <a16:creationId xmlns:a16="http://schemas.microsoft.com/office/drawing/2014/main" id="{1CB438F2-0A3E-42C3-A5BE-18E9F943FBA2}"/>
+              </a:ext>
+            </a:extLst>
+          </p:cNvPr>
+          <p:cNvSpPr>
+            <a:spLocks xmlns:a="http://schemas.openxmlformats.org/drawingml/2006/main" noGrp="1"/>
+          </p:cNvSpPr>
+          <p:nvPr/>
+        </p:nvSpPr>
+        <p:spPr>
+          <a:xfrm xmlns:a="http://schemas.openxmlformats.org/drawingml/2006/main">
+            <a:off x="3009900" y="1933575"/>
+            <a:ext cx="1752600" cy="428625"/>
           </a:xfrm>
           <a:prstGeom xmlns:a="http://schemas.openxmlformats.org/drawingml/2006/main" prst="rect">
             <a:avLst/>
@@ -5607,9 +8252,9 @@
           </a:bodyPr>
           <a:lstStyle xmlns:a="http://schemas.openxmlformats.org/drawingml/2006/main">
             <a:defPPr>
-              <a:defRPr sz="2100" b="0">
-                <a:solidFill>
-                  <a:srgbClr val="344955"/>
+              <a:defRPr sz="1875" b="1">
+                <a:solidFill>
+                  <a:srgbClr val="102D3B"/>
                 </a:solidFill>
                 <a:latin typeface="Arial"/>
                 <a:ea typeface="Arial"/>
@@ -5619,9 +8264,9 @@
           </a:lstStyle>
           <a:p xmlns:a="http://schemas.openxmlformats.org/drawingml/2006/main">
             <a:pPr>
-              <a:defRPr sz="2100" b="0">
-                <a:solidFill>
-                  <a:srgbClr val="344955"/>
+              <a:defRPr sz="1875" b="1">
+                <a:solidFill>
+                  <a:srgbClr val="102D3B"/>
                 </a:solidFill>
                 <a:latin typeface="Arial"/>
                 <a:ea typeface="Arial"/>
@@ -5629,25 +8274,983 @@
               </a:defRPr>
             </a:pPr>
             <a:r>
-              <a:rPr sz="2100" b="0">
-                <a:solidFill>
-                  <a:srgbClr val="344955"/>
+              <a:rPr sz="1875" b="1">
+                <a:solidFill>
+                  <a:srgbClr val="102D3B"/>
                 </a:solidFill>
                 <a:latin typeface="Arial"/>
                 <a:ea typeface="Arial"/>
                 <a:cs typeface="Arial"/>
               </a:rPr>
-              <a:t>Server 2025 and WSL1 worked on this host. Vendor documentation names Windows 10/11. Stock execution needed no licensed MATLAB.</a:t>
-            </a:r>
-          </a:p>
-        </p:txBody>
-      </p:sp>
-      <p:sp>
-        <p:nvSpPr>
-          <p:cNvPr id="5" name="">
-            <a:extLst xmlns:a="http://schemas.openxmlformats.org/drawingml/2006/main">
-              <a:ext uri="{FF2B5EF4-FFF2-40B4-BE49-F238E27FC236}">
-                <a16:creationId xmlns:a16="http://schemas.microsoft.com/office/drawing/2014/main" id="{B9873AD2-3EB3-4576-B1CB-277C1A37BFAF}"/>
+              <a:t>PX4</a:t>
+            </a:r>
+          </a:p>
+        </p:txBody>
+      </p:sp>
+      <p:sp>
+        <p:nvSpPr>
+          <p:cNvPr id="8" name="">
+            <a:extLst xmlns:a="http://schemas.openxmlformats.org/drawingml/2006/main">
+              <a:ext uri="{FF2B5EF4-FFF2-40B4-BE49-F238E27FC236}">
+                <a16:creationId xmlns:a16="http://schemas.microsoft.com/office/drawing/2014/main" id="{923B4EC9-4736-4046-A90C-340F7ACDD1E0}"/>
+              </a:ext>
+            </a:extLst>
+          </p:cNvPr>
+          <p:cNvSpPr>
+            <a:spLocks xmlns:a="http://schemas.openxmlformats.org/drawingml/2006/main" noGrp="1"/>
+          </p:cNvSpPr>
+          <p:nvPr/>
+        </p:nvSpPr>
+        <p:spPr>
+          <a:xfrm xmlns:a="http://schemas.openxmlformats.org/drawingml/2006/main">
+            <a:off x="3009900" y="2495550"/>
+            <a:ext cx="1752600" cy="790575"/>
+          </a:xfrm>
+          <a:prstGeom xmlns:a="http://schemas.openxmlformats.org/drawingml/2006/main" prst="rect">
+            <a:avLst/>
+          </a:prstGeom>
+          <a:noFill xmlns:a="http://schemas.openxmlformats.org/drawingml/2006/main"/>
+          <a:ln xmlns:a="http://schemas.openxmlformats.org/drawingml/2006/main" w="0">
+            <a:noFill/>
+          </a:ln>
+        </p:spPr>
+        <p:txBody>
+          <a:bodyPr xmlns:a="http://schemas.openxmlformats.org/drawingml/2006/main">
+            <a:noAutofit/>
+          </a:bodyPr>
+          <a:lstStyle xmlns:a="http://schemas.openxmlformats.org/drawingml/2006/main">
+            <a:defPPr>
+              <a:defRPr sz="1800" b="0">
+                <a:solidFill>
+                  <a:srgbClr val="344955"/>
+                </a:solidFill>
+                <a:latin typeface="Arial"/>
+                <a:ea typeface="Arial"/>
+                <a:cs typeface="Arial"/>
+              </a:defRPr>
+            </a:defPPr>
+          </a:lstStyle>
+          <a:p xmlns:a="http://schemas.openxmlformats.org/drawingml/2006/main">
+            <a:pPr>
+              <a:defRPr sz="1800" b="0">
+                <a:solidFill>
+                  <a:srgbClr val="344955"/>
+                </a:solidFill>
+                <a:latin typeface="Arial"/>
+                <a:ea typeface="Arial"/>
+                <a:cs typeface="Arial"/>
+              </a:defRPr>
+            </a:pPr>
+            <a:r>
+              <a:rPr sz="1800" b="0">
+                <a:solidFill>
+                  <a:srgbClr val="344955"/>
+                </a:solidFill>
+                <a:latin typeface="Arial"/>
+                <a:ea typeface="Arial"/>
+                <a:cs typeface="Arial"/>
+              </a:rPr>
+              <a:t>Estimation</a:t>
+            </a:r>
+          </a:p>
+          <a:p xmlns:a="http://schemas.openxmlformats.org/drawingml/2006/main">
+            <a:pPr>
+              <a:defRPr sz="1800" b="0">
+                <a:solidFill>
+                  <a:srgbClr val="344955"/>
+                </a:solidFill>
+                <a:latin typeface="Arial"/>
+                <a:ea typeface="Arial"/>
+                <a:cs typeface="Arial"/>
+              </a:defRPr>
+            </a:pPr>
+            <a:r>
+              <a:rPr sz="1800" b="0">
+                <a:solidFill>
+                  <a:srgbClr val="344955"/>
+                </a:solidFill>
+                <a:latin typeface="Arial"/>
+                <a:ea typeface="Arial"/>
+                <a:cs typeface="Arial"/>
+              </a:rPr>
+              <a:t>and control</a:t>
+            </a:r>
+          </a:p>
+        </p:txBody>
+      </p:sp>
+      <p:sp>
+        <p:nvSpPr>
+          <p:cNvPr id="9" name="">
+            <a:extLst xmlns:a="http://schemas.openxmlformats.org/drawingml/2006/main">
+              <a:ext uri="{FF2B5EF4-FFF2-40B4-BE49-F238E27FC236}">
+                <a16:creationId xmlns:a16="http://schemas.microsoft.com/office/drawing/2014/main" id="{F972C209-2D7B-49C5-8FF9-BD270E13D826}"/>
+              </a:ext>
+            </a:extLst>
+          </p:cNvPr>
+          <p:cNvSpPr>
+            <a:spLocks xmlns:a="http://schemas.openxmlformats.org/drawingml/2006/main" noGrp="1"/>
+          </p:cNvSpPr>
+          <p:nvPr/>
+        </p:nvSpPr>
+        <p:spPr>
+          <a:xfrm xmlns:a="http://schemas.openxmlformats.org/drawingml/2006/main">
+            <a:off x="4886325" y="2466975"/>
+            <a:ext cx="190500" cy="238125"/>
+          </a:xfrm>
+          <a:prstGeom xmlns:a="http://schemas.openxmlformats.org/drawingml/2006/main" prst="rightArrow">
+            <a:avLst/>
+          </a:prstGeom>
+          <a:solidFill xmlns:a="http://schemas.openxmlformats.org/drawingml/2006/main">
+            <a:srgbClr val="376A7F"/>
+          </a:solidFill>
+          <a:ln xmlns:a="http://schemas.openxmlformats.org/drawingml/2006/main" w="0">
+            <a:noFill/>
+          </a:ln>
+        </p:spPr>
+      </p:sp>
+      <p:sp>
+        <p:nvSpPr>
+          <p:cNvPr id="10" name="">
+            <a:extLst xmlns:a="http://schemas.openxmlformats.org/drawingml/2006/main">
+              <a:ext uri="{FF2B5EF4-FFF2-40B4-BE49-F238E27FC236}">
+                <a16:creationId xmlns:a16="http://schemas.microsoft.com/office/drawing/2014/main" id="{F4B1A84C-3464-4407-B4ED-EDC5F7CB7EC1}"/>
+              </a:ext>
+            </a:extLst>
+          </p:cNvPr>
+          <p:cNvSpPr>
+            <a:spLocks xmlns:a="http://schemas.openxmlformats.org/drawingml/2006/main" noGrp="1"/>
+          </p:cNvSpPr>
+          <p:nvPr/>
+        </p:nvSpPr>
+        <p:spPr>
+          <a:xfrm xmlns:a="http://schemas.openxmlformats.org/drawingml/2006/main">
+            <a:off x="5105400" y="1809750"/>
+            <a:ext cx="1962150" cy="1619250"/>
+          </a:xfrm>
+          <a:prstGeom xmlns:a="http://schemas.openxmlformats.org/drawingml/2006/main" prst="rect">
+            <a:avLst/>
+          </a:prstGeom>
+          <a:solidFill xmlns:a="http://schemas.openxmlformats.org/drawingml/2006/main">
+            <a:srgbClr val="EDF4F6"/>
+          </a:solidFill>
+          <a:ln xmlns:a="http://schemas.openxmlformats.org/drawingml/2006/main" w="9525">
+            <a:solidFill>
+              <a:srgbClr val="8AACB9"/>
+            </a:solidFill>
+          </a:ln>
+        </p:spPr>
+      </p:sp>
+      <p:sp>
+        <p:nvSpPr>
+          <p:cNvPr id="11" name="">
+            <a:extLst xmlns:a="http://schemas.openxmlformats.org/drawingml/2006/main">
+              <a:ext uri="{FF2B5EF4-FFF2-40B4-BE49-F238E27FC236}">
+                <a16:creationId xmlns:a16="http://schemas.microsoft.com/office/drawing/2014/main" id="{92886C40-FEC8-4126-A044-164A2D973D3C}"/>
+              </a:ext>
+            </a:extLst>
+          </p:cNvPr>
+          <p:cNvSpPr>
+            <a:spLocks xmlns:a="http://schemas.openxmlformats.org/drawingml/2006/main" noGrp="1"/>
+          </p:cNvSpPr>
+          <p:nvPr/>
+        </p:nvSpPr>
+        <p:spPr>
+          <a:xfrm xmlns:a="http://schemas.openxmlformats.org/drawingml/2006/main">
+            <a:off x="5219700" y="1933575"/>
+            <a:ext cx="1752600" cy="428625"/>
+          </a:xfrm>
+          <a:prstGeom xmlns:a="http://schemas.openxmlformats.org/drawingml/2006/main" prst="rect">
+            <a:avLst/>
+          </a:prstGeom>
+          <a:noFill xmlns:a="http://schemas.openxmlformats.org/drawingml/2006/main"/>
+          <a:ln xmlns:a="http://schemas.openxmlformats.org/drawingml/2006/main" w="0">
+            <a:noFill/>
+          </a:ln>
+        </p:spPr>
+        <p:txBody>
+          <a:bodyPr xmlns:a="http://schemas.openxmlformats.org/drawingml/2006/main">
+            <a:noAutofit/>
+          </a:bodyPr>
+          <a:lstStyle xmlns:a="http://schemas.openxmlformats.org/drawingml/2006/main">
+            <a:defPPr>
+              <a:defRPr sz="1875" b="1">
+                <a:solidFill>
+                  <a:srgbClr val="102D3B"/>
+                </a:solidFill>
+                <a:latin typeface="Arial"/>
+                <a:ea typeface="Arial"/>
+                <a:cs typeface="Arial"/>
+              </a:defRPr>
+            </a:defPPr>
+          </a:lstStyle>
+          <a:p xmlns:a="http://schemas.openxmlformats.org/drawingml/2006/main">
+            <a:pPr>
+              <a:defRPr sz="1875" b="1">
+                <a:solidFill>
+                  <a:srgbClr val="102D3B"/>
+                </a:solidFill>
+                <a:latin typeface="Arial"/>
+                <a:ea typeface="Arial"/>
+                <a:cs typeface="Arial"/>
+              </a:defRPr>
+            </a:pPr>
+            <a:r>
+              <a:rPr sz="1875" b="1">
+                <a:solidFill>
+                  <a:srgbClr val="102D3B"/>
+                </a:solidFill>
+                <a:latin typeface="Arial"/>
+                <a:ea typeface="Arial"/>
+                <a:cs typeface="Arial"/>
+              </a:rPr>
+              <a:t>CopterSim</a:t>
+            </a:r>
+          </a:p>
+        </p:txBody>
+      </p:sp>
+      <p:sp>
+        <p:nvSpPr>
+          <p:cNvPr id="12" name="">
+            <a:extLst xmlns:a="http://schemas.openxmlformats.org/drawingml/2006/main">
+              <a:ext uri="{FF2B5EF4-FFF2-40B4-BE49-F238E27FC236}">
+                <a16:creationId xmlns:a16="http://schemas.microsoft.com/office/drawing/2014/main" id="{CD738B89-996B-4B1C-A790-73A39EE8B78C}"/>
+              </a:ext>
+            </a:extLst>
+          </p:cNvPr>
+          <p:cNvSpPr>
+            <a:spLocks xmlns:a="http://schemas.openxmlformats.org/drawingml/2006/main" noGrp="1"/>
+          </p:cNvSpPr>
+          <p:nvPr/>
+        </p:nvSpPr>
+        <p:spPr>
+          <a:xfrm xmlns:a="http://schemas.openxmlformats.org/drawingml/2006/main">
+            <a:off x="5219700" y="2495550"/>
+            <a:ext cx="1752600" cy="790575"/>
+          </a:xfrm>
+          <a:prstGeom xmlns:a="http://schemas.openxmlformats.org/drawingml/2006/main" prst="rect">
+            <a:avLst/>
+          </a:prstGeom>
+          <a:noFill xmlns:a="http://schemas.openxmlformats.org/drawingml/2006/main"/>
+          <a:ln xmlns:a="http://schemas.openxmlformats.org/drawingml/2006/main" w="0">
+            <a:noFill/>
+          </a:ln>
+        </p:spPr>
+        <p:txBody>
+          <a:bodyPr xmlns:a="http://schemas.openxmlformats.org/drawingml/2006/main">
+            <a:noAutofit/>
+          </a:bodyPr>
+          <a:lstStyle xmlns:a="http://schemas.openxmlformats.org/drawingml/2006/main">
+            <a:defPPr>
+              <a:defRPr sz="1800" b="0">
+                <a:solidFill>
+                  <a:srgbClr val="344955"/>
+                </a:solidFill>
+                <a:latin typeface="Arial"/>
+                <a:ea typeface="Arial"/>
+                <a:cs typeface="Arial"/>
+              </a:defRPr>
+            </a:defPPr>
+          </a:lstStyle>
+          <a:p xmlns:a="http://schemas.openxmlformats.org/drawingml/2006/main">
+            <a:pPr>
+              <a:defRPr sz="1800" b="0">
+                <a:solidFill>
+                  <a:srgbClr val="344955"/>
+                </a:solidFill>
+                <a:latin typeface="Arial"/>
+                <a:ea typeface="Arial"/>
+                <a:cs typeface="Arial"/>
+              </a:defRPr>
+            </a:pPr>
+            <a:r>
+              <a:rPr sz="1800" b="0">
+                <a:solidFill>
+                  <a:srgbClr val="344955"/>
+                </a:solidFill>
+                <a:latin typeface="Arial"/>
+                <a:ea typeface="Arial"/>
+                <a:cs typeface="Arial"/>
+              </a:rPr>
+              <a:t>Actuators</a:t>
+            </a:r>
+          </a:p>
+          <a:p xmlns:a="http://schemas.openxmlformats.org/drawingml/2006/main">
+            <a:pPr>
+              <a:defRPr sz="1800" b="0">
+                <a:solidFill>
+                  <a:srgbClr val="344955"/>
+                </a:solidFill>
+                <a:latin typeface="Arial"/>
+                <a:ea typeface="Arial"/>
+                <a:cs typeface="Arial"/>
+              </a:defRPr>
+            </a:pPr>
+            <a:r>
+              <a:rPr sz="1800" b="0">
+                <a:solidFill>
+                  <a:srgbClr val="344955"/>
+                </a:solidFill>
+                <a:latin typeface="Arial"/>
+                <a:ea typeface="Arial"/>
+                <a:cs typeface="Arial"/>
+              </a:rPr>
+              <a:t>to motion</a:t>
+            </a:r>
+          </a:p>
+        </p:txBody>
+      </p:sp>
+      <p:sp>
+        <p:nvSpPr>
+          <p:cNvPr id="13" name="">
+            <a:extLst xmlns:a="http://schemas.openxmlformats.org/drawingml/2006/main">
+              <a:ext uri="{FF2B5EF4-FFF2-40B4-BE49-F238E27FC236}">
+                <a16:creationId xmlns:a16="http://schemas.microsoft.com/office/drawing/2014/main" id="{7BB092DF-59BD-4551-ADC4-08372C57F572}"/>
+              </a:ext>
+            </a:extLst>
+          </p:cNvPr>
+          <p:cNvSpPr>
+            <a:spLocks xmlns:a="http://schemas.openxmlformats.org/drawingml/2006/main" noGrp="1"/>
+          </p:cNvSpPr>
+          <p:nvPr/>
+        </p:nvSpPr>
+        <p:spPr>
+          <a:xfrm xmlns:a="http://schemas.openxmlformats.org/drawingml/2006/main">
+            <a:off x="7096125" y="2466975"/>
+            <a:ext cx="190500" cy="238125"/>
+          </a:xfrm>
+          <a:prstGeom xmlns:a="http://schemas.openxmlformats.org/drawingml/2006/main" prst="rightArrow">
+            <a:avLst/>
+          </a:prstGeom>
+          <a:solidFill xmlns:a="http://schemas.openxmlformats.org/drawingml/2006/main">
+            <a:srgbClr val="376A7F"/>
+          </a:solidFill>
+          <a:ln xmlns:a="http://schemas.openxmlformats.org/drawingml/2006/main" w="0">
+            <a:noFill/>
+          </a:ln>
+        </p:spPr>
+      </p:sp>
+      <p:sp>
+        <p:nvSpPr>
+          <p:cNvPr id="14" name="">
+            <a:extLst xmlns:a="http://schemas.openxmlformats.org/drawingml/2006/main">
+              <a:ext uri="{FF2B5EF4-FFF2-40B4-BE49-F238E27FC236}">
+                <a16:creationId xmlns:a16="http://schemas.microsoft.com/office/drawing/2014/main" id="{3153126D-8017-4664-8936-EA5B3FF92849}"/>
+              </a:ext>
+            </a:extLst>
+          </p:cNvPr>
+          <p:cNvSpPr>
+            <a:spLocks xmlns:a="http://schemas.openxmlformats.org/drawingml/2006/main" noGrp="1"/>
+          </p:cNvSpPr>
+          <p:nvPr/>
+        </p:nvSpPr>
+        <p:spPr>
+          <a:xfrm xmlns:a="http://schemas.openxmlformats.org/drawingml/2006/main">
+            <a:off x="7315200" y="1809750"/>
+            <a:ext cx="1962150" cy="1619250"/>
+          </a:xfrm>
+          <a:prstGeom xmlns:a="http://schemas.openxmlformats.org/drawingml/2006/main" prst="rect">
+            <a:avLst/>
+          </a:prstGeom>
+          <a:solidFill xmlns:a="http://schemas.openxmlformats.org/drawingml/2006/main">
+            <a:srgbClr val="EDF4F6"/>
+          </a:solidFill>
+          <a:ln xmlns:a="http://schemas.openxmlformats.org/drawingml/2006/main" w="9525">
+            <a:solidFill>
+              <a:srgbClr val="8AACB9"/>
+            </a:solidFill>
+          </a:ln>
+        </p:spPr>
+      </p:sp>
+      <p:sp>
+        <p:nvSpPr>
+          <p:cNvPr id="15" name="">
+            <a:extLst xmlns:a="http://schemas.openxmlformats.org/drawingml/2006/main">
+              <a:ext uri="{FF2B5EF4-FFF2-40B4-BE49-F238E27FC236}">
+                <a16:creationId xmlns:a16="http://schemas.microsoft.com/office/drawing/2014/main" id="{4C0C1E32-8C36-444E-A506-49F3441579EF}"/>
+              </a:ext>
+            </a:extLst>
+          </p:cNvPr>
+          <p:cNvSpPr>
+            <a:spLocks xmlns:a="http://schemas.openxmlformats.org/drawingml/2006/main" noGrp="1"/>
+          </p:cNvSpPr>
+          <p:nvPr/>
+        </p:nvSpPr>
+        <p:spPr>
+          <a:xfrm xmlns:a="http://schemas.openxmlformats.org/drawingml/2006/main">
+            <a:off x="7429500" y="1933575"/>
+            <a:ext cx="1752600" cy="428625"/>
+          </a:xfrm>
+          <a:prstGeom xmlns:a="http://schemas.openxmlformats.org/drawingml/2006/main" prst="rect">
+            <a:avLst/>
+          </a:prstGeom>
+          <a:noFill xmlns:a="http://schemas.openxmlformats.org/drawingml/2006/main"/>
+          <a:ln xmlns:a="http://schemas.openxmlformats.org/drawingml/2006/main" w="0">
+            <a:noFill/>
+          </a:ln>
+        </p:spPr>
+        <p:txBody>
+          <a:bodyPr xmlns:a="http://schemas.openxmlformats.org/drawingml/2006/main">
+            <a:noAutofit/>
+          </a:bodyPr>
+          <a:lstStyle xmlns:a="http://schemas.openxmlformats.org/drawingml/2006/main">
+            <a:defPPr>
+              <a:defRPr sz="1875" b="1">
+                <a:solidFill>
+                  <a:srgbClr val="102D3B"/>
+                </a:solidFill>
+                <a:latin typeface="Arial"/>
+                <a:ea typeface="Arial"/>
+                <a:cs typeface="Arial"/>
+              </a:defRPr>
+            </a:defPPr>
+          </a:lstStyle>
+          <a:p xmlns:a="http://schemas.openxmlformats.org/drawingml/2006/main">
+            <a:pPr>
+              <a:defRPr sz="1875" b="1">
+                <a:solidFill>
+                  <a:srgbClr val="102D3B"/>
+                </a:solidFill>
+                <a:latin typeface="Arial"/>
+                <a:ea typeface="Arial"/>
+                <a:cs typeface="Arial"/>
+              </a:defRPr>
+            </a:pPr>
+            <a:r>
+              <a:rPr sz="1875" b="1">
+                <a:solidFill>
+                  <a:srgbClr val="102D3B"/>
+                </a:solidFill>
+                <a:latin typeface="Arial"/>
+                <a:ea typeface="Arial"/>
+                <a:cs typeface="Arial"/>
+              </a:rPr>
+              <a:t>RflySim3D</a:t>
+            </a:r>
+          </a:p>
+        </p:txBody>
+      </p:sp>
+      <p:sp>
+        <p:nvSpPr>
+          <p:cNvPr id="16" name="">
+            <a:extLst xmlns:a="http://schemas.openxmlformats.org/drawingml/2006/main">
+              <a:ext uri="{FF2B5EF4-FFF2-40B4-BE49-F238E27FC236}">
+                <a16:creationId xmlns:a16="http://schemas.microsoft.com/office/drawing/2014/main" id="{81049D9A-CC58-4930-935A-BC6C2130DB0F}"/>
+              </a:ext>
+            </a:extLst>
+          </p:cNvPr>
+          <p:cNvSpPr>
+            <a:spLocks xmlns:a="http://schemas.openxmlformats.org/drawingml/2006/main" noGrp="1"/>
+          </p:cNvSpPr>
+          <p:nvPr/>
+        </p:nvSpPr>
+        <p:spPr>
+          <a:xfrm xmlns:a="http://schemas.openxmlformats.org/drawingml/2006/main">
+            <a:off x="7429500" y="2495550"/>
+            <a:ext cx="1752600" cy="790575"/>
+          </a:xfrm>
+          <a:prstGeom xmlns:a="http://schemas.openxmlformats.org/drawingml/2006/main" prst="rect">
+            <a:avLst/>
+          </a:prstGeom>
+          <a:noFill xmlns:a="http://schemas.openxmlformats.org/drawingml/2006/main"/>
+          <a:ln xmlns:a="http://schemas.openxmlformats.org/drawingml/2006/main" w="0">
+            <a:noFill/>
+          </a:ln>
+        </p:spPr>
+        <p:txBody>
+          <a:bodyPr xmlns:a="http://schemas.openxmlformats.org/drawingml/2006/main">
+            <a:noAutofit/>
+          </a:bodyPr>
+          <a:lstStyle xmlns:a="http://schemas.openxmlformats.org/drawingml/2006/main">
+            <a:defPPr>
+              <a:defRPr sz="1800" b="0">
+                <a:solidFill>
+                  <a:srgbClr val="344955"/>
+                </a:solidFill>
+                <a:latin typeface="Arial"/>
+                <a:ea typeface="Arial"/>
+                <a:cs typeface="Arial"/>
+              </a:defRPr>
+            </a:defPPr>
+          </a:lstStyle>
+          <a:p xmlns:a="http://schemas.openxmlformats.org/drawingml/2006/main">
+            <a:pPr>
+              <a:defRPr sz="1800" b="0">
+                <a:solidFill>
+                  <a:srgbClr val="344955"/>
+                </a:solidFill>
+                <a:latin typeface="Arial"/>
+                <a:ea typeface="Arial"/>
+                <a:cs typeface="Arial"/>
+              </a:defRPr>
+            </a:pPr>
+            <a:r>
+              <a:rPr sz="1800" b="0">
+                <a:solidFill>
+                  <a:srgbClr val="344955"/>
+                </a:solidFill>
+                <a:latin typeface="Arial"/>
+                <a:ea typeface="Arial"/>
+                <a:cs typeface="Arial"/>
+              </a:rPr>
+              <a:t>Body motion</a:t>
+            </a:r>
+          </a:p>
+          <a:p xmlns:a="http://schemas.openxmlformats.org/drawingml/2006/main">
+            <a:pPr>
+              <a:defRPr sz="1800" b="0">
+                <a:solidFill>
+                  <a:srgbClr val="344955"/>
+                </a:solidFill>
+                <a:latin typeface="Arial"/>
+                <a:ea typeface="Arial"/>
+                <a:cs typeface="Arial"/>
+              </a:defRPr>
+            </a:pPr>
+            <a:r>
+              <a:rPr sz="1800" b="0">
+                <a:solidFill>
+                  <a:srgbClr val="344955"/>
+                </a:solidFill>
+                <a:latin typeface="Arial"/>
+                <a:ea typeface="Arial"/>
+                <a:cs typeface="Arial"/>
+              </a:rPr>
+              <a:t>to RGB</a:t>
+            </a:r>
+          </a:p>
+        </p:txBody>
+      </p:sp>
+      <p:sp>
+        <p:nvSpPr>
+          <p:cNvPr id="17" name="">
+            <a:extLst xmlns:a="http://schemas.openxmlformats.org/drawingml/2006/main">
+              <a:ext uri="{FF2B5EF4-FFF2-40B4-BE49-F238E27FC236}">
+                <a16:creationId xmlns:a16="http://schemas.microsoft.com/office/drawing/2014/main" id="{EADFDEF2-D4AB-4CA9-B02D-D0FC3A00AA51}"/>
+              </a:ext>
+            </a:extLst>
+          </p:cNvPr>
+          <p:cNvSpPr>
+            <a:spLocks xmlns:a="http://schemas.openxmlformats.org/drawingml/2006/main" noGrp="1"/>
+          </p:cNvSpPr>
+          <p:nvPr/>
+        </p:nvSpPr>
+        <p:spPr>
+          <a:xfrm xmlns:a="http://schemas.openxmlformats.org/drawingml/2006/main">
+            <a:off x="9305925" y="2466975"/>
+            <a:ext cx="190500" cy="238125"/>
+          </a:xfrm>
+          <a:prstGeom xmlns:a="http://schemas.openxmlformats.org/drawingml/2006/main" prst="rightArrow">
+            <a:avLst/>
+          </a:prstGeom>
+          <a:solidFill xmlns:a="http://schemas.openxmlformats.org/drawingml/2006/main">
+            <a:srgbClr val="376A7F"/>
+          </a:solidFill>
+          <a:ln xmlns:a="http://schemas.openxmlformats.org/drawingml/2006/main" w="0">
+            <a:noFill/>
+          </a:ln>
+        </p:spPr>
+      </p:sp>
+      <p:sp>
+        <p:nvSpPr>
+          <p:cNvPr id="18" name="">
+            <a:extLst xmlns:a="http://schemas.openxmlformats.org/drawingml/2006/main">
+              <a:ext uri="{FF2B5EF4-FFF2-40B4-BE49-F238E27FC236}">
+                <a16:creationId xmlns:a16="http://schemas.microsoft.com/office/drawing/2014/main" id="{82BBEDEB-2241-481F-8CA3-82B5E181C3EC}"/>
+              </a:ext>
+            </a:extLst>
+          </p:cNvPr>
+          <p:cNvSpPr>
+            <a:spLocks xmlns:a="http://schemas.openxmlformats.org/drawingml/2006/main" noGrp="1"/>
+          </p:cNvSpPr>
+          <p:nvPr/>
+        </p:nvSpPr>
+        <p:spPr>
+          <a:xfrm xmlns:a="http://schemas.openxmlformats.org/drawingml/2006/main">
+            <a:off x="9525000" y="1809750"/>
+            <a:ext cx="1962150" cy="1619250"/>
+          </a:xfrm>
+          <a:prstGeom xmlns:a="http://schemas.openxmlformats.org/drawingml/2006/main" prst="rect">
+            <a:avLst/>
+          </a:prstGeom>
+          <a:solidFill xmlns:a="http://schemas.openxmlformats.org/drawingml/2006/main">
+            <a:srgbClr val="EDF4F6"/>
+          </a:solidFill>
+          <a:ln xmlns:a="http://schemas.openxmlformats.org/drawingml/2006/main" w="9525">
+            <a:solidFill>
+              <a:srgbClr val="8AACB9"/>
+            </a:solidFill>
+          </a:ln>
+        </p:spPr>
+      </p:sp>
+      <p:sp>
+        <p:nvSpPr>
+          <p:cNvPr id="19" name="">
+            <a:extLst xmlns:a="http://schemas.openxmlformats.org/drawingml/2006/main">
+              <a:ext uri="{FF2B5EF4-FFF2-40B4-BE49-F238E27FC236}">
+                <a16:creationId xmlns:a16="http://schemas.microsoft.com/office/drawing/2014/main" id="{C587378E-9CF6-4B66-A1D1-A6A5B380DCFA}"/>
+              </a:ext>
+            </a:extLst>
+          </p:cNvPr>
+          <p:cNvSpPr>
+            <a:spLocks xmlns:a="http://schemas.openxmlformats.org/drawingml/2006/main" noGrp="1"/>
+          </p:cNvSpPr>
+          <p:nvPr/>
+        </p:nvSpPr>
+        <p:spPr>
+          <a:xfrm xmlns:a="http://schemas.openxmlformats.org/drawingml/2006/main">
+            <a:off x="9639300" y="1933575"/>
+            <a:ext cx="1752600" cy="428625"/>
+          </a:xfrm>
+          <a:prstGeom xmlns:a="http://schemas.openxmlformats.org/drawingml/2006/main" prst="rect">
+            <a:avLst/>
+          </a:prstGeom>
+          <a:noFill xmlns:a="http://schemas.openxmlformats.org/drawingml/2006/main"/>
+          <a:ln xmlns:a="http://schemas.openxmlformats.org/drawingml/2006/main" w="0">
+            <a:noFill/>
+          </a:ln>
+        </p:spPr>
+        <p:txBody>
+          <a:bodyPr xmlns:a="http://schemas.openxmlformats.org/drawingml/2006/main">
+            <a:noAutofit/>
+          </a:bodyPr>
+          <a:lstStyle xmlns:a="http://schemas.openxmlformats.org/drawingml/2006/main">
+            <a:defPPr>
+              <a:defRPr sz="1875" b="1">
+                <a:solidFill>
+                  <a:srgbClr val="102D3B"/>
+                </a:solidFill>
+                <a:latin typeface="Arial"/>
+                <a:ea typeface="Arial"/>
+                <a:cs typeface="Arial"/>
+              </a:defRPr>
+            </a:defPPr>
+          </a:lstStyle>
+          <a:p xmlns:a="http://schemas.openxmlformats.org/drawingml/2006/main">
+            <a:pPr>
+              <a:defRPr sz="1875" b="1">
+                <a:solidFill>
+                  <a:srgbClr val="102D3B"/>
+                </a:solidFill>
+                <a:latin typeface="Arial"/>
+                <a:ea typeface="Arial"/>
+                <a:cs typeface="Arial"/>
+              </a:defRPr>
+            </a:pPr>
+            <a:r>
+              <a:rPr sz="1875" b="1">
+                <a:solidFill>
+                  <a:srgbClr val="102D3B"/>
+                </a:solidFill>
+                <a:latin typeface="Arial"/>
+                <a:ea typeface="Arial"/>
+                <a:cs typeface="Arial"/>
+              </a:rPr>
+              <a:t>Recorder</a:t>
+            </a:r>
+          </a:p>
+        </p:txBody>
+      </p:sp>
+      <p:sp>
+        <p:nvSpPr>
+          <p:cNvPr id="20" name="">
+            <a:extLst xmlns:a="http://schemas.openxmlformats.org/drawingml/2006/main">
+              <a:ext uri="{FF2B5EF4-FFF2-40B4-BE49-F238E27FC236}">
+                <a16:creationId xmlns:a16="http://schemas.microsoft.com/office/drawing/2014/main" id="{CCA4559A-9690-422E-9370-1DB28EF51066}"/>
+              </a:ext>
+            </a:extLst>
+          </p:cNvPr>
+          <p:cNvSpPr>
+            <a:spLocks xmlns:a="http://schemas.openxmlformats.org/drawingml/2006/main" noGrp="1"/>
+          </p:cNvSpPr>
+          <p:nvPr/>
+        </p:nvSpPr>
+        <p:spPr>
+          <a:xfrm xmlns:a="http://schemas.openxmlformats.org/drawingml/2006/main">
+            <a:off x="9639300" y="2495550"/>
+            <a:ext cx="1752600" cy="790575"/>
+          </a:xfrm>
+          <a:prstGeom xmlns:a="http://schemas.openxmlformats.org/drawingml/2006/main" prst="rect">
+            <a:avLst/>
+          </a:prstGeom>
+          <a:noFill xmlns:a="http://schemas.openxmlformats.org/drawingml/2006/main"/>
+          <a:ln xmlns:a="http://schemas.openxmlformats.org/drawingml/2006/main" w="0">
+            <a:noFill/>
+          </a:ln>
+        </p:spPr>
+        <p:txBody>
+          <a:bodyPr xmlns:a="http://schemas.openxmlformats.org/drawingml/2006/main">
+            <a:noAutofit/>
+          </a:bodyPr>
+          <a:lstStyle xmlns:a="http://schemas.openxmlformats.org/drawingml/2006/main">
+            <a:defPPr>
+              <a:defRPr sz="1800" b="0">
+                <a:solidFill>
+                  <a:srgbClr val="344955"/>
+                </a:solidFill>
+                <a:latin typeface="Arial"/>
+                <a:ea typeface="Arial"/>
+                <a:cs typeface="Arial"/>
+              </a:defRPr>
+            </a:defPPr>
+          </a:lstStyle>
+          <a:p xmlns:a="http://schemas.openxmlformats.org/drawingml/2006/main">
+            <a:pPr>
+              <a:defRPr sz="1800" b="0">
+                <a:solidFill>
+                  <a:srgbClr val="344955"/>
+                </a:solidFill>
+                <a:latin typeface="Arial"/>
+                <a:ea typeface="Arial"/>
+                <a:cs typeface="Arial"/>
+              </a:defRPr>
+            </a:pPr>
+            <a:r>
+              <a:rPr sz="1800" b="0">
+                <a:solidFill>
+                  <a:srgbClr val="344955"/>
+                </a:solidFill>
+                <a:latin typeface="Arial"/>
+                <a:ea typeface="Arial"/>
+                <a:cs typeface="Arial"/>
+              </a:rPr>
+              <a:t>PNG frames</a:t>
+            </a:r>
+          </a:p>
+          <a:p xmlns:a="http://schemas.openxmlformats.org/drawingml/2006/main">
+            <a:pPr>
+              <a:defRPr sz="1800" b="0">
+                <a:solidFill>
+                  <a:srgbClr val="344955"/>
+                </a:solidFill>
+                <a:latin typeface="Arial"/>
+                <a:ea typeface="Arial"/>
+                <a:cs typeface="Arial"/>
+              </a:defRPr>
+            </a:pPr>
+            <a:r>
+              <a:rPr sz="1800" b="0">
+                <a:solidFill>
+                  <a:srgbClr val="344955"/>
+                </a:solidFill>
+                <a:latin typeface="Arial"/>
+                <a:ea typeface="Arial"/>
+                <a:cs typeface="Arial"/>
+              </a:rPr>
+              <a:t>and metadata</a:t>
+            </a:r>
+          </a:p>
+        </p:txBody>
+      </p:sp>
+      <p:sp>
+        <p:nvSpPr>
+          <p:cNvPr id="21" name="">
+            <a:extLst xmlns:a="http://schemas.openxmlformats.org/drawingml/2006/main">
+              <a:ext uri="{FF2B5EF4-FFF2-40B4-BE49-F238E27FC236}">
+                <a16:creationId xmlns:a16="http://schemas.microsoft.com/office/drawing/2014/main" id="{47429CB4-7216-4041-896E-B448B86B29E3}"/>
+              </a:ext>
+            </a:extLst>
+          </p:cNvPr>
+          <p:cNvSpPr>
+            <a:spLocks xmlns:a="http://schemas.openxmlformats.org/drawingml/2006/main" noGrp="1"/>
+          </p:cNvSpPr>
+          <p:nvPr/>
+        </p:nvSpPr>
+        <p:spPr>
+          <a:xfrm xmlns:a="http://schemas.openxmlformats.org/drawingml/2006/main">
+            <a:off x="685800" y="3829050"/>
+            <a:ext cx="10820400" cy="609600"/>
+          </a:xfrm>
+          <a:prstGeom xmlns:a="http://schemas.openxmlformats.org/drawingml/2006/main" prst="rect">
+            <a:avLst/>
+          </a:prstGeom>
+          <a:noFill xmlns:a="http://schemas.openxmlformats.org/drawingml/2006/main"/>
+          <a:ln xmlns:a="http://schemas.openxmlformats.org/drawingml/2006/main" w="0">
+            <a:noFill/>
+          </a:ln>
+        </p:spPr>
+        <p:txBody>
+          <a:bodyPr xmlns:a="http://schemas.openxmlformats.org/drawingml/2006/main">
+            <a:noAutofit/>
+          </a:bodyPr>
+          <a:lstStyle xmlns:a="http://schemas.openxmlformats.org/drawingml/2006/main">
+            <a:defPPr>
+              <a:defRPr sz="1875" b="0">
+                <a:solidFill>
+                  <a:srgbClr val="344955"/>
+                </a:solidFill>
+                <a:latin typeface="Arial"/>
+                <a:ea typeface="Arial"/>
+                <a:cs typeface="Arial"/>
+              </a:defRPr>
+            </a:defPPr>
+          </a:lstStyle>
+          <a:p xmlns:a="http://schemas.openxmlformats.org/drawingml/2006/main">
+            <a:pPr>
+              <a:defRPr sz="1875" b="0">
+                <a:solidFill>
+                  <a:srgbClr val="344955"/>
+                </a:solidFill>
+                <a:latin typeface="Arial"/>
+                <a:ea typeface="Arial"/>
+                <a:cs typeface="Arial"/>
+              </a:defRPr>
+            </a:pPr>
+            <a:r>
+              <a:rPr sz="1875" b="0">
+                <a:solidFill>
+                  <a:srgbClr val="344955"/>
+                </a:solidFill>
+                <a:latin typeface="Arial"/>
+                <a:ea typeface="Arial"/>
+                <a:cs typeface="Arial"/>
+              </a:rPr>
+              <a:t>PX4 estimates, ACKs, modes and arming return to the supervisor.</a:t>
+            </a:r>
+          </a:p>
+        </p:txBody>
+      </p:sp>
+      <p:sp>
+        <p:nvSpPr>
+          <p:cNvPr id="22" name="">
+            <a:extLst xmlns:a="http://schemas.openxmlformats.org/drawingml/2006/main">
+              <a:ext uri="{FF2B5EF4-FFF2-40B4-BE49-F238E27FC236}">
+                <a16:creationId xmlns:a16="http://schemas.microsoft.com/office/drawing/2014/main" id="{E5155472-3D09-4026-BF5C-7DEB1F18569F}"/>
+              </a:ext>
+            </a:extLst>
+          </p:cNvPr>
+          <p:cNvSpPr>
+            <a:spLocks xmlns:a="http://schemas.openxmlformats.org/drawingml/2006/main" noGrp="1"/>
+          </p:cNvSpPr>
+          <p:nvPr/>
+        </p:nvSpPr>
+        <p:spPr>
+          <a:xfrm xmlns:a="http://schemas.openxmlformats.org/drawingml/2006/main">
+            <a:off x="685800" y="4533900"/>
+            <a:ext cx="10820400" cy="609600"/>
+          </a:xfrm>
+          <a:prstGeom xmlns:a="http://schemas.openxmlformats.org/drawingml/2006/main" prst="rect">
+            <a:avLst/>
+          </a:prstGeom>
+          <a:noFill xmlns:a="http://schemas.openxmlformats.org/drawingml/2006/main"/>
+          <a:ln xmlns:a="http://schemas.openxmlformats.org/drawingml/2006/main" w="0">
+            <a:noFill/>
+          </a:ln>
+        </p:spPr>
+        <p:txBody>
+          <a:bodyPr xmlns:a="http://schemas.openxmlformats.org/drawingml/2006/main">
+            <a:noAutofit/>
+          </a:bodyPr>
+          <a:lstStyle xmlns:a="http://schemas.openxmlformats.org/drawingml/2006/main">
+            <a:defPPr>
+              <a:defRPr sz="1875" b="0">
+                <a:solidFill>
+                  <a:srgbClr val="344955"/>
+                </a:solidFill>
+                <a:latin typeface="Arial"/>
+                <a:ea typeface="Arial"/>
+                <a:cs typeface="Arial"/>
+              </a:defRPr>
+            </a:defPPr>
+          </a:lstStyle>
+          <a:p xmlns:a="http://schemas.openxmlformats.org/drawingml/2006/main">
+            <a:pPr>
+              <a:defRPr sz="1875" b="0">
+                <a:solidFill>
+                  <a:srgbClr val="344955"/>
+                </a:solidFill>
+                <a:latin typeface="Arial"/>
+                <a:ea typeface="Arial"/>
+                <a:cs typeface="Arial"/>
+              </a:defRPr>
+            </a:pPr>
+            <a:r>
+              <a:rPr sz="1875" b="0">
+                <a:solidFill>
+                  <a:srgbClr val="344955"/>
+                </a:solidFill>
+                <a:latin typeface="Arial"/>
+                <a:ea typeface="Arial"/>
+                <a:cs typeface="Arial"/>
+              </a:rPr>
+              <a:t>Body truth, native camera metadata and image timestamps export separately.</a:t>
+            </a:r>
+          </a:p>
+        </p:txBody>
+      </p:sp>
+      <p:sp>
+        <p:nvSpPr>
+          <p:cNvPr id="23" name="">
+            <a:extLst xmlns:a="http://schemas.openxmlformats.org/drawingml/2006/main">
+              <a:ext uri="{FF2B5EF4-FFF2-40B4-BE49-F238E27FC236}">
+                <a16:creationId xmlns:a16="http://schemas.microsoft.com/office/drawing/2014/main" id="{8624A858-9440-475F-9D96-0218685733EF}"/>
+              </a:ext>
+            </a:extLst>
+          </p:cNvPr>
+          <p:cNvSpPr>
+            <a:spLocks xmlns:a="http://schemas.openxmlformats.org/drawingml/2006/main" noGrp="1"/>
+          </p:cNvSpPr>
+          <p:nvPr/>
+        </p:nvSpPr>
+        <p:spPr>
+          <a:xfrm xmlns:a="http://schemas.openxmlformats.org/drawingml/2006/main">
+            <a:off x="685800" y="5238750"/>
+            <a:ext cx="10820400" cy="609600"/>
+          </a:xfrm>
+          <a:prstGeom xmlns:a="http://schemas.openxmlformats.org/drawingml/2006/main" prst="rect">
+            <a:avLst/>
+          </a:prstGeom>
+          <a:noFill xmlns:a="http://schemas.openxmlformats.org/drawingml/2006/main"/>
+          <a:ln xmlns:a="http://schemas.openxmlformats.org/drawingml/2006/main" w="0">
+            <a:noFill/>
+          </a:ln>
+        </p:spPr>
+        <p:txBody>
+          <a:bodyPr xmlns:a="http://schemas.openxmlformats.org/drawingml/2006/main">
+            <a:noAutofit/>
+          </a:bodyPr>
+          <a:lstStyle xmlns:a="http://schemas.openxmlformats.org/drawingml/2006/main">
+            <a:defPPr>
+              <a:defRPr sz="1875" b="0">
+                <a:solidFill>
+                  <a:srgbClr val="344955"/>
+                </a:solidFill>
+                <a:latin typeface="Arial"/>
+                <a:ea typeface="Arial"/>
+                <a:cs typeface="Arial"/>
+              </a:defRPr>
+            </a:defPPr>
+          </a:lstStyle>
+          <a:p xmlns:a="http://schemas.openxmlformats.org/drawingml/2006/main">
+            <a:pPr>
+              <a:defRPr sz="1875" b="0">
+                <a:solidFill>
+                  <a:srgbClr val="344955"/>
+                </a:solidFill>
+                <a:latin typeface="Arial"/>
+                <a:ea typeface="Arial"/>
+                <a:cs typeface="Arial"/>
+              </a:defRPr>
+            </a:pPr>
+            <a:r>
+              <a:rPr sz="1875" b="0">
+                <a:solidFill>
+                  <a:srgbClr val="344955"/>
+                </a:solidFill>
+                <a:latin typeface="Arial"/>
+                <a:ea typeface="Arial"/>
+                <a:cs typeface="Arial"/>
+              </a:rPr>
+              <a:t>Control UDP 20100/20101, SITL TCP 4560, truth UDP 30101, camera UDP 20006, RGB shared memory.</a:t>
+            </a:r>
+          </a:p>
+        </p:txBody>
+      </p:sp>
+      <p:sp>
+        <p:nvSpPr>
+          <p:cNvPr id="24" name="">
+            <a:extLst xmlns:a="http://schemas.openxmlformats.org/drawingml/2006/main">
+              <a:ext uri="{FF2B5EF4-FFF2-40B4-BE49-F238E27FC236}">
+                <a16:creationId xmlns:a16="http://schemas.microsoft.com/office/drawing/2014/main" id="{83F87A37-D32D-4D8A-894A-AF20EC163C03}"/>
               </a:ext>
             </a:extLst>
           </p:cNvPr>
@@ -5705,7 +9308,7 @@
                 <a:ea typeface="Arial"/>
                 <a:cs typeface="Arial"/>
               </a:rPr>
-              <a:t>Measured stock integration. Calibration and real-scene fidelity remain incomplete.   3 / 12</a:t>
+              <a:t>Stock integration evidence · offline handoff 11 October 2026   3 / 16</a:t>
             </a:r>
           </a:p>
         </p:txBody>
@@ -5713,7 +9316,7 @@
     </p:spTree>
     <p:extLst>
       <p:ext uri="{BB962C8B-B14F-4D97-AF65-F5344CB8AC3E}">
-        <p14:creationId xmlns:p14="http://schemas.microsoft.com/office/powerpoint/2010/main" val="1558050817"/>
+        <p14:creationId xmlns:p14="http://schemas.microsoft.com/office/powerpoint/2010/main" val="86076031"/>
       </p:ext>
     </p:extLst>
   </p:cSld>
@@ -5741,10 +9344,10 @@
       </p:grpSpPr>
       <p:sp>
         <p:nvSpPr>
-          <p:cNvPr id="7" name="">
-            <a:extLst xmlns:a="http://schemas.openxmlformats.org/drawingml/2006/main">
-              <a:ext uri="{FF2B5EF4-FFF2-40B4-BE49-F238E27FC236}">
-                <a16:creationId xmlns:a16="http://schemas.microsoft.com/office/drawing/2014/main" id="{16C7E52D-81BB-4CEC-AD95-C933C1D4551D}"/>
+          <p:cNvPr id="6" name="">
+            <a:extLst xmlns:a="http://schemas.openxmlformats.org/drawingml/2006/main">
+              <a:ext uri="{FF2B5EF4-FFF2-40B4-BE49-F238E27FC236}">
+                <a16:creationId xmlns:a16="http://schemas.microsoft.com/office/drawing/2014/main" id="{81AAEF0C-8FDB-49A7-BC51-BD4EEDE7F0D2}"/>
               </a:ext>
             </a:extLst>
           </p:cNvPr>
@@ -5802,57 +9405,29 @@
                 <a:ea typeface="Arial"/>
                 <a:cs typeface="Arial"/>
               </a:rPr>
-              <a:t>Both flights completed the route</a:t>
-            </a:r>
-          </a:p>
-        </p:txBody>
-      </p:sp>
-      <p:pic>
-        <p:nvPicPr>
+              <a:t>Algorithms and responsibilities</a:t>
+            </a:r>
+          </a:p>
+        </p:txBody>
+      </p:sp>
+      <p:sp>
+        <p:nvSpPr>
           <p:cNvPr id="2" name="">
             <a:extLst xmlns:a="http://schemas.openxmlformats.org/drawingml/2006/main">
               <a:ext uri="{FF2B5EF4-FFF2-40B4-BE49-F238E27FC236}">
-                <a16:creationId xmlns:a16="http://schemas.microsoft.com/office/drawing/2014/main" id="{1F876755-2587-438D-A201-E49A3BCCBF9B}"/>
-              </a:ext>
-            </a:extLst>
-          </p:cNvPr>
-          <p:cNvPicPr>
-            <a:picLocks xmlns:a="http://schemas.openxmlformats.org/drawingml/2006/main" noChangeAspect="1"/>
-          </p:cNvPicPr>
+                <a16:creationId xmlns:a16="http://schemas.microsoft.com/office/drawing/2014/main" id="{7D797F2D-5DC8-4D2A-B438-75BD1E5B8F44}"/>
+              </a:ext>
+            </a:extLst>
+          </p:cNvPr>
+          <p:cNvSpPr>
+            <a:spLocks xmlns:a="http://schemas.openxmlformats.org/drawingml/2006/main" noGrp="1"/>
+          </p:cNvSpPr>
           <p:nvPr/>
-        </p:nvPicPr>
-        <p:blipFill>
-          <a:blip xmlns:r="http://schemas.openxmlformats.org/officeDocument/2006/relationships" xmlns:a="http://schemas.openxmlformats.org/drawingml/2006/main" r:embed="Rb3273663dc5c4ab9"/>
-          <a:stretch xmlns:a="http://schemas.openxmlformats.org/drawingml/2006/main"/>
-        </p:blipFill>
-        <p:spPr>
-          <a:xfrm xmlns:a="http://schemas.openxmlformats.org/drawingml/2006/main">
-            <a:off x="1643063" y="1381125"/>
-            <a:ext cx="8905875" cy="3238500"/>
-          </a:xfrm>
-          <a:prstGeom xmlns:a="http://schemas.openxmlformats.org/drawingml/2006/main" prst="rect">
-            <a:avLst/>
-          </a:prstGeom>
-        </p:spPr>
-      </p:pic>
-      <p:sp>
-        <p:nvSpPr>
-          <p:cNvPr id="3" name="">
-            <a:extLst xmlns:a="http://schemas.openxmlformats.org/drawingml/2006/main">
-              <a:ext uri="{FF2B5EF4-FFF2-40B4-BE49-F238E27FC236}">
-                <a16:creationId xmlns:a16="http://schemas.microsoft.com/office/drawing/2014/main" id="{B495A653-3A8E-4344-AF47-DF6F7EAF0E93}"/>
-              </a:ext>
-            </a:extLst>
-          </p:cNvPr>
-          <p:cNvSpPr>
-            <a:spLocks xmlns:a="http://schemas.openxmlformats.org/drawingml/2006/main" noGrp="1"/>
-          </p:cNvSpPr>
-          <p:nvPr/>
-        </p:nvSpPr>
-        <p:spPr>
-          <a:xfrm xmlns:a="http://schemas.openxmlformats.org/drawingml/2006/main">
-            <a:off x="685800" y="4762500"/>
-            <a:ext cx="10820400" cy="457200"/>
+        </p:nvSpPr>
+        <p:spPr>
+          <a:xfrm xmlns:a="http://schemas.openxmlformats.org/drawingml/2006/main">
+            <a:off x="685800" y="1666875"/>
+            <a:ext cx="10820400" cy="1066800"/>
           </a:xfrm>
           <a:prstGeom xmlns:a="http://schemas.openxmlformats.org/drawingml/2006/main" prst="rect">
             <a:avLst/>
@@ -5868,7 +9443,7 @@
           </a:bodyPr>
           <a:lstStyle xmlns:a="http://schemas.openxmlformats.org/drawingml/2006/main">
             <a:defPPr>
-              <a:defRPr sz="1500" b="0">
+              <a:defRPr sz="2100" b="0">
                 <a:solidFill>
                   <a:srgbClr val="102D3B"/>
                 </a:solidFill>
@@ -5880,7 +9455,7 @@
           </a:lstStyle>
           <a:p xmlns:a="http://schemas.openxmlformats.org/drawingml/2006/main">
             <a:pPr>
-              <a:defRPr sz="1500" b="0">
+              <a:defRPr sz="2100" b="0">
                 <a:solidFill>
                   <a:srgbClr val="102D3B"/>
                 </a:solidFill>
@@ -5890,7 +9465,7 @@
               </a:defRPr>
             </a:pPr>
             <a:r>
-              <a:rPr sz="1500" b="0">
+              <a:rPr sz="2100" b="0">
                 <a:solidFill>
                   <a:srgbClr val="102D3B"/>
                 </a:solidFill>
@@ -5898,17 +9473,17 @@
                 <a:ea typeface="Arial"/>
                 <a:cs typeface="Arial"/>
               </a:rPr>
-              <a:t>Both full-route passes used fresh PX4 estimates. B1: 38.750 s. B2 with capture: 39.219 s.</a:t>
-            </a:r>
-          </a:p>
-        </p:txBody>
-      </p:sp>
-      <p:sp>
-        <p:nvSpPr>
-          <p:cNvPr id="4" name="">
-            <a:extLst xmlns:a="http://schemas.openxmlformats.org/drawingml/2006/main">
-              <a:ext uri="{FF2B5EF4-FFF2-40B4-BE49-F238E27FC236}">
-                <a16:creationId xmlns:a16="http://schemas.microsoft.com/office/drawing/2014/main" id="{FA18131A-5C03-473C-8D28-821AD6A49C7E}"/>
+              <a:t>Our script advances a target only after fresh estimated position stays inside the tolerance for 2 seconds.</a:t>
+            </a:r>
+          </a:p>
+        </p:txBody>
+      </p:sp>
+      <p:sp>
+        <p:nvSpPr>
+          <p:cNvPr id="3" name="">
+            <a:extLst xmlns:a="http://schemas.openxmlformats.org/drawingml/2006/main">
+              <a:ext uri="{FF2B5EF4-FFF2-40B4-BE49-F238E27FC236}">
+                <a16:creationId xmlns:a16="http://schemas.microsoft.com/office/drawing/2014/main" id="{0F4F00DF-3A07-48E7-930C-896EE6947AA6}"/>
               </a:ext>
             </a:extLst>
           </p:cNvPr>
@@ -5919,8 +9494,8 @@
         </p:nvSpPr>
         <p:spPr>
           <a:xfrm xmlns:a="http://schemas.openxmlformats.org/drawingml/2006/main">
-            <a:off x="685800" y="5238750"/>
-            <a:ext cx="10820400" cy="457200"/>
+            <a:off x="685800" y="2886075"/>
+            <a:ext cx="10820400" cy="1066800"/>
           </a:xfrm>
           <a:prstGeom xmlns:a="http://schemas.openxmlformats.org/drawingml/2006/main" prst="rect">
             <a:avLst/>
@@ -5936,7 +9511,7 @@
           </a:bodyPr>
           <a:lstStyle xmlns:a="http://schemas.openxmlformats.org/drawingml/2006/main">
             <a:defPPr>
-              <a:defRPr sz="1500" b="0">
+              <a:defRPr sz="2100" b="0">
                 <a:solidFill>
                   <a:srgbClr val="344955"/>
                 </a:solidFill>
@@ -5948,7 +9523,7 @@
           </a:lstStyle>
           <a:p xmlns:a="http://schemas.openxmlformats.org/drawingml/2006/main">
             <a:pPr>
-              <a:defRPr sz="1500" b="0">
+              <a:defRPr sz="2100" b="0">
                 <a:solidFill>
                   <a:srgbClr val="344955"/>
                 </a:solidFill>
@@ -5958,7 +9533,7 @@
               </a:defRPr>
             </a:pPr>
             <a:r>
-              <a:rPr sz="1500" b="0">
+              <a:rPr sz="2100" b="0">
                 <a:solidFill>
                   <a:srgbClr val="344955"/>
                 </a:solidFill>
@@ -5966,17 +9541,17 @@
                 <a:ea typeface="Arial"/>
                 <a:cs typeface="Arial"/>
               </a:rPr>
-              <a:t>Route in NED metres: (0,0,-2), (2,0,-2), (2,2,-2), (0,0,-2), land. Each waypoint required ≤0.25 m for 2 s.</a:t>
-            </a:r>
-          </a:p>
-        </p:txBody>
-      </p:sp>
-      <p:sp>
-        <p:nvSpPr>
-          <p:cNvPr id="5" name="">
-            <a:extLst xmlns:a="http://schemas.openxmlformats.org/drawingml/2006/main">
-              <a:ext uri="{FF2B5EF4-FFF2-40B4-BE49-F238E27FC236}">
-                <a16:creationId xmlns:a16="http://schemas.microsoft.com/office/drawing/2014/main" id="{82208016-3B55-4A12-ACE8-67B15783DCEB}"/>
+              <a:t>PX4 estimates motion and uses position, velocity, attitude and rate feedback to generate actuators. CopterSim integrates the stock dynamics.</a:t>
+            </a:r>
+          </a:p>
+        </p:txBody>
+      </p:sp>
+      <p:sp>
+        <p:nvSpPr>
+          <p:cNvPr id="4" name="">
+            <a:extLst xmlns:a="http://schemas.openxmlformats.org/drawingml/2006/main">
+              <a:ext uri="{FF2B5EF4-FFF2-40B4-BE49-F238E27FC236}">
+                <a16:creationId xmlns:a16="http://schemas.microsoft.com/office/drawing/2014/main" id="{274EBD2A-C1AB-45A3-9F21-E96C0C05C860}"/>
               </a:ext>
             </a:extLst>
           </p:cNvPr>
@@ -5987,8 +9562,8 @@
         </p:nvSpPr>
         <p:spPr>
           <a:xfrm xmlns:a="http://schemas.openxmlformats.org/drawingml/2006/main">
-            <a:off x="685800" y="5715000"/>
-            <a:ext cx="10820400" cy="457200"/>
+            <a:off x="685800" y="4105275"/>
+            <a:ext cx="10820400" cy="1066800"/>
           </a:xfrm>
           <a:prstGeom xmlns:a="http://schemas.openxmlformats.org/drawingml/2006/main" prst="rect">
             <a:avLst/>
@@ -6004,7 +9579,7 @@
           </a:bodyPr>
           <a:lstStyle xmlns:a="http://schemas.openxmlformats.org/drawingml/2006/main">
             <a:defPPr>
-              <a:defRPr sz="1500" b="0">
+              <a:defRPr sz="2100" b="0">
                 <a:solidFill>
                   <a:srgbClr val="344955"/>
                 </a:solidFill>
@@ -6016,7 +9591,7 @@
           </a:lstStyle>
           <a:p xmlns:a="http://schemas.openxmlformats.org/drawingml/2006/main">
             <a:pPr>
-              <a:defRPr sz="1500" b="0">
+              <a:defRPr sz="2100" b="0">
                 <a:solidFill>
                   <a:srgbClr val="344955"/>
                 </a:solidFill>
@@ -6026,7 +9601,7 @@
               </a:defRPr>
             </a:pPr>
             <a:r>
-              <a:rPr sz="1500" b="0">
+              <a:rPr sz="2100" b="0">
                 <a:solidFill>
                   <a:srgbClr val="344955"/>
                 </a:solidFill>
@@ -6034,17 +9609,17 @@
                 <a:ea typeface="Arial"/>
                 <a:cs typeface="Arial"/>
               </a:rPr>
-              <a:t>The pass uses fresh PX4 estimates. Independently calibrated truth outcome remains blocked.</a:t>
-            </a:r>
-          </a:p>
-        </p:txBody>
-      </p:sp>
-      <p:sp>
-        <p:nvSpPr>
-          <p:cNvPr id="6" name="">
-            <a:extLst xmlns:a="http://schemas.openxmlformats.org/drawingml/2006/main">
-              <a:ext uri="{FF2B5EF4-FFF2-40B4-BE49-F238E27FC236}">
-                <a16:creationId xmlns:a16="http://schemas.microsoft.com/office/drawing/2014/main" id="{A851E345-177F-415A-BEB6-3F4A2438DC44}"/>
+              <a:t>UE renders scene pixels. A separate process copies frames and writes files. No image-based controller ran.</a:t>
+            </a:r>
+          </a:p>
+        </p:txBody>
+      </p:sp>
+      <p:sp>
+        <p:nvSpPr>
+          <p:cNvPr id="5" name="">
+            <a:extLst xmlns:a="http://schemas.openxmlformats.org/drawingml/2006/main">
+              <a:ext uri="{FF2B5EF4-FFF2-40B4-BE49-F238E27FC236}">
+                <a16:creationId xmlns:a16="http://schemas.microsoft.com/office/drawing/2014/main" id="{81566299-2E90-456F-94F8-C68ACA5B7764}"/>
               </a:ext>
             </a:extLst>
           </p:cNvPr>
@@ -6102,7 +9677,7 @@
                 <a:ea typeface="Arial"/>
                 <a:cs typeface="Arial"/>
               </a:rPr>
-              <a:t>Measured stock integration. Calibration and real-scene fidelity remain incomplete.   4 / 12</a:t>
+              <a:t>Stock integration evidence · offline handoff 11 October 2026   4 / 16</a:t>
             </a:r>
           </a:p>
         </p:txBody>
@@ -6110,7 +9685,7 @@
     </p:spTree>
     <p:extLst>
       <p:ext uri="{BB962C8B-B14F-4D97-AF65-F5344CB8AC3E}">
-        <p14:creationId xmlns:p14="http://schemas.microsoft.com/office/powerpoint/2010/main" val="1132140020"/>
+        <p14:creationId xmlns:p14="http://schemas.microsoft.com/office/powerpoint/2010/main" val="76632696"/>
       </p:ext>
     </p:extLst>
   </p:cSld>
@@ -6141,7 +9716,7 @@
           <p:cNvPr id="7" name="">
             <a:extLst xmlns:a="http://schemas.openxmlformats.org/drawingml/2006/main">
               <a:ext uri="{FF2B5EF4-FFF2-40B4-BE49-F238E27FC236}">
-                <a16:creationId xmlns:a16="http://schemas.microsoft.com/office/drawing/2014/main" id="{9967CF92-2BCF-425D-934C-E5E0D42AB1DE}"/>
+                <a16:creationId xmlns:a16="http://schemas.microsoft.com/office/drawing/2014/main" id="{93AAAB9F-E30E-4C70-BF59-C218FDBBCD3C}"/>
               </a:ext>
             </a:extLst>
           </p:cNvPr>
@@ -6199,7 +9774,7 @@
                 <a:ea typeface="Arial"/>
                 <a:cs typeface="Arial"/>
               </a:rPr>
-              <a:t>Capture comparison stays limited</a:t>
+              <a:t>Both flights completed the route</a:t>
             </a:r>
           </a:p>
         </p:txBody>
@@ -6209,7 +9784,7 @@
           <p:cNvPr id="2" name="">
             <a:extLst xmlns:a="http://schemas.openxmlformats.org/drawingml/2006/main">
               <a:ext uri="{FF2B5EF4-FFF2-40B4-BE49-F238E27FC236}">
-                <a16:creationId xmlns:a16="http://schemas.microsoft.com/office/drawing/2014/main" id="{2625DD2A-BDF8-44CE-9662-E1FC2E9B87DB}"/>
+                <a16:creationId xmlns:a16="http://schemas.microsoft.com/office/drawing/2014/main" id="{C5AF7FB2-4649-4175-95E8-7B7A95C5DAEB}"/>
               </a:ext>
             </a:extLst>
           </p:cNvPr>
@@ -6219,13 +9794,13 @@
           <p:nvPr/>
         </p:nvPicPr>
         <p:blipFill>
-          <a:blip xmlns:r="http://schemas.openxmlformats.org/officeDocument/2006/relationships" xmlns:a="http://schemas.openxmlformats.org/drawingml/2006/main" r:embed="Rc5e1e838cc894358"/>
+          <a:blip xmlns:r="http://schemas.openxmlformats.org/officeDocument/2006/relationships" xmlns:a="http://schemas.openxmlformats.org/drawingml/2006/main" r:embed="Ref2198c0944f4d03"/>
           <a:stretch xmlns:a="http://schemas.openxmlformats.org/drawingml/2006/main"/>
         </p:blipFill>
         <p:spPr>
           <a:xfrm xmlns:a="http://schemas.openxmlformats.org/drawingml/2006/main">
-            <a:off x="2857500" y="1381125"/>
-            <a:ext cx="6477000" cy="3238500"/>
+            <a:off x="1643063" y="1381125"/>
+            <a:ext cx="8905875" cy="3238500"/>
           </a:xfrm>
           <a:prstGeom xmlns:a="http://schemas.openxmlformats.org/drawingml/2006/main" prst="rect">
             <a:avLst/>
@@ -6237,7 +9812,7 @@
           <p:cNvPr id="3" name="">
             <a:extLst xmlns:a="http://schemas.openxmlformats.org/drawingml/2006/main">
               <a:ext uri="{FF2B5EF4-FFF2-40B4-BE49-F238E27FC236}">
-                <a16:creationId xmlns:a16="http://schemas.microsoft.com/office/drawing/2014/main" id="{FC426688-C4BC-47B8-8FB1-78BB4892655E}"/>
+                <a16:creationId xmlns:a16="http://schemas.microsoft.com/office/drawing/2014/main" id="{B30781BC-1957-4EDE-8D0D-904F6F9F798D}"/>
               </a:ext>
             </a:extLst>
           </p:cNvPr>
@@ -6295,7 +9870,7 @@
                 <a:ea typeface="Arial"/>
                 <a:cs typeface="Arial"/>
               </a:rPr>
-              <a:t>Mean setpoint interval: 100.022 ms without capture, 100.034 ms with capture.</a:t>
+              <a:t>B1 without capture: 38.750 s. B2 with RGB: 39.219 s. Both minimum integration and full-route outcomes passed.</a:t>
             </a:r>
           </a:p>
         </p:txBody>
@@ -6305,7 +9880,7 @@
           <p:cNvPr id="4" name="">
             <a:extLst xmlns:a="http://schemas.openxmlformats.org/drawingml/2006/main">
               <a:ext uri="{FF2B5EF4-FFF2-40B4-BE49-F238E27FC236}">
-                <a16:creationId xmlns:a16="http://schemas.microsoft.com/office/drawing/2014/main" id="{2F54BF65-9883-40B0-B81B-453EA52DBB83}"/>
+                <a16:creationId xmlns:a16="http://schemas.microsoft.com/office/drawing/2014/main" id="{DA490D68-100C-4420-80B7-74B7F9F77794}"/>
               </a:ext>
             </a:extLst>
           </p:cNvPr>
@@ -6363,7 +9938,7 @@
                 <a:ea typeface="Arial"/>
                 <a:cs typeface="Arial"/>
               </a:rPr>
-              <a:t>Maximum tick lateness: 12 ms versus 16 ms. Neither run had a tick more than 100 ms late. State gaps peaked at 125 ms and 110 ms.</a:t>
+              <a:t>NED metres: (0,0,-2), (2,0,-2), (2,2,-2), (0,0,-2), land. Each leg required error ≤0.25 m for 2 s.</a:t>
             </a:r>
           </a:p>
         </p:txBody>
@@ -6373,7 +9948,7 @@
           <p:cNvPr id="5" name="">
             <a:extLst xmlns:a="http://schemas.openxmlformats.org/drawingml/2006/main">
               <a:ext uri="{FF2B5EF4-FFF2-40B4-BE49-F238E27FC236}">
-                <a16:creationId xmlns:a16="http://schemas.microsoft.com/office/drawing/2014/main" id="{A8940660-BE5C-4BE5-A4A8-0AFB07D2B4C5}"/>
+                <a16:creationId xmlns:a16="http://schemas.microsoft.com/office/drawing/2014/main" id="{E08AA8CB-406A-4334-849F-5442694238CE}"/>
               </a:ext>
             </a:extLst>
           </p:cNvPr>
@@ -6431,7 +10006,7 @@
                 <a:ea typeface="Arial"/>
                 <a:cs typeface="Arial"/>
               </a:rPr>
-              <a:t>Cleanup workers hit 15 s despite confirmation summaries. Raw cleanup logs are empty. Queue repair needs retesting.</a:t>
+              <a:t>Fresh PX4 estimates provide the measurement basis. Landing and disarming are retained in the raw flight records.</a:t>
             </a:r>
           </a:p>
         </p:txBody>
@@ -6441,7 +10016,7 @@
           <p:cNvPr id="6" name="">
             <a:extLst xmlns:a="http://schemas.openxmlformats.org/drawingml/2006/main">
               <a:ext uri="{FF2B5EF4-FFF2-40B4-BE49-F238E27FC236}">
-                <a16:creationId xmlns:a16="http://schemas.microsoft.com/office/drawing/2014/main" id="{F22BD44D-3A4E-42CB-A49E-AE41F237469C}"/>
+                <a16:creationId xmlns:a16="http://schemas.microsoft.com/office/drawing/2014/main" id="{C8A7E05E-1066-47B4-AA34-1F9483C4D440}"/>
               </a:ext>
             </a:extLst>
           </p:cNvPr>
@@ -6499,7 +10074,7 @@
                 <a:ea typeface="Arial"/>
                 <a:cs typeface="Arial"/>
               </a:rPr>
-              <a:t>Two sequential runs do not isolate capture overhead. Cleanup logging is incomplete.   5 / 12</a:t>
+              <a:t>Stock integration evidence · offline handoff 11 October 2026   5 / 16</a:t>
             </a:r>
           </a:p>
         </p:txBody>
@@ -6507,7 +10082,7 @@
     </p:spTree>
     <p:extLst>
       <p:ext uri="{BB962C8B-B14F-4D97-AF65-F5344CB8AC3E}">
-        <p14:creationId xmlns:p14="http://schemas.microsoft.com/office/powerpoint/2010/main" val="840042843"/>
+        <p14:creationId xmlns:p14="http://schemas.microsoft.com/office/powerpoint/2010/main" val="1059093372"/>
       </p:ext>
     </p:extLst>
   </p:cSld>
@@ -6538,7 +10113,7 @@
           <p:cNvPr id="7" name="">
             <a:extLst xmlns:a="http://schemas.openxmlformats.org/drawingml/2006/main">
               <a:ext uri="{FF2B5EF4-FFF2-40B4-BE49-F238E27FC236}">
-                <a16:creationId xmlns:a16="http://schemas.microsoft.com/office/drawing/2014/main" id="{C88EC07E-B90D-4DF9-BCC6-CA5821669A19}"/>
+                <a16:creationId xmlns:a16="http://schemas.microsoft.com/office/drawing/2014/main" id="{CDFFFDD3-F963-428B-BA5B-E51267CAA5E3}"/>
               </a:ext>
             </a:extLst>
           </p:cNvPr>
@@ -6596,7 +10171,7 @@
                 <a:ea typeface="Arial"/>
                 <a:cs typeface="Arial"/>
               </a:rPr>
-              <a:t>Flight and observations share a run</a:t>
+              <a:t>Control timing with concurrent RGB</a:t>
             </a:r>
           </a:p>
         </p:txBody>
@@ -6606,7 +10181,7 @@
           <p:cNvPr id="2" name="">
             <a:extLst xmlns:a="http://schemas.openxmlformats.org/drawingml/2006/main">
               <a:ext uri="{FF2B5EF4-FFF2-40B4-BE49-F238E27FC236}">
-                <a16:creationId xmlns:a16="http://schemas.microsoft.com/office/drawing/2014/main" id="{C3005313-08F0-49A6-A9ED-90DE38028DC6}"/>
+                <a16:creationId xmlns:a16="http://schemas.microsoft.com/office/drawing/2014/main" id="{1AC1D53D-E8A0-413F-865B-A1865945C391}"/>
               </a:ext>
             </a:extLst>
           </p:cNvPr>
@@ -6616,13 +10191,13 @@
           <p:nvPr/>
         </p:nvPicPr>
         <p:blipFill>
-          <a:blip xmlns:r="http://schemas.openxmlformats.org/officeDocument/2006/relationships" xmlns:a="http://schemas.openxmlformats.org/drawingml/2006/main" r:embed="R0d7bd4685cea40e8"/>
+          <a:blip xmlns:r="http://schemas.openxmlformats.org/officeDocument/2006/relationships" xmlns:a="http://schemas.openxmlformats.org/drawingml/2006/main" r:embed="R08c0f8a946f747a3"/>
           <a:stretch xmlns:a="http://schemas.openxmlformats.org/drawingml/2006/main"/>
         </p:blipFill>
         <p:spPr>
           <a:xfrm xmlns:a="http://schemas.openxmlformats.org/drawingml/2006/main">
-            <a:off x="5810250" y="1674019"/>
-            <a:ext cx="5695950" cy="4271963"/>
+            <a:off x="2857500" y="1381125"/>
+            <a:ext cx="6477000" cy="3238500"/>
           </a:xfrm>
           <a:prstGeom xmlns:a="http://schemas.openxmlformats.org/drawingml/2006/main" prst="rect">
             <a:avLst/>
@@ -6634,7 +10209,7 @@
           <p:cNvPr id="3" name="">
             <a:extLst xmlns:a="http://schemas.openxmlformats.org/drawingml/2006/main">
               <a:ext uri="{FF2B5EF4-FFF2-40B4-BE49-F238E27FC236}">
-                <a16:creationId xmlns:a16="http://schemas.microsoft.com/office/drawing/2014/main" id="{55F82894-3FAD-4369-9E57-C66EDA57E77C}"/>
+                <a16:creationId xmlns:a16="http://schemas.microsoft.com/office/drawing/2014/main" id="{91F99101-7687-49B0-814F-F6A100C251D9}"/>
               </a:ext>
             </a:extLst>
           </p:cNvPr>
@@ -6645,8 +10220,8 @@
         </p:nvSpPr>
         <p:spPr>
           <a:xfrm xmlns:a="http://schemas.openxmlformats.org/drawingml/2006/main">
-            <a:off x="685800" y="1666875"/>
-            <a:ext cx="4667250" cy="1257300"/>
+            <a:off x="685800" y="4762500"/>
+            <a:ext cx="10820400" cy="457200"/>
           </a:xfrm>
           <a:prstGeom xmlns:a="http://schemas.openxmlformats.org/drawingml/2006/main" prst="rect">
             <a:avLst/>
@@ -6662,7 +10237,7 @@
           </a:bodyPr>
           <a:lstStyle xmlns:a="http://schemas.openxmlformats.org/drawingml/2006/main">
             <a:defPPr>
-              <a:defRPr sz="1875" b="0">
+              <a:defRPr sz="1500" b="0">
                 <a:solidFill>
                   <a:srgbClr val="102D3B"/>
                 </a:solidFill>
@@ -6674,7 +10249,7 @@
           </a:lstStyle>
           <a:p xmlns:a="http://schemas.openxmlformats.org/drawingml/2006/main">
             <a:pPr>
-              <a:defRPr sz="1875" b="0">
+              <a:defRPr sz="1500" b="0">
                 <a:solidFill>
                   <a:srgbClr val="102D3B"/>
                 </a:solidFill>
@@ -6684,7 +10259,7 @@
               </a:defRPr>
             </a:pPr>
             <a:r>
-              <a:rPr sz="1875" b="0">
+              <a:rPr sz="1500" b="0">
                 <a:solidFill>
                   <a:srgbClr val="102D3B"/>
                 </a:solidFill>
@@ -6692,7 +10267,7 @@
                 <a:ea typeface="Arial"/>
                 <a:cs typeface="Arial"/>
               </a:rPr>
-              <a:t>B2 saved 365 mounted-camera RGB frames while the vehicle completed the route.</a:t>
+              <a:t>Mean target intervals: B1 100.022 ms, B2 100.034 ms. Maximum intervals: 109 ms and 110 ms.</a:t>
             </a:r>
           </a:p>
         </p:txBody>
@@ -6702,7 +10277,7 @@
           <p:cNvPr id="4" name="">
             <a:extLst xmlns:a="http://schemas.openxmlformats.org/drawingml/2006/main">
               <a:ext uri="{FF2B5EF4-FFF2-40B4-BE49-F238E27FC236}">
-                <a16:creationId xmlns:a16="http://schemas.microsoft.com/office/drawing/2014/main" id="{E8F99B42-9169-45F5-9B59-94F267A016F4}"/>
+                <a16:creationId xmlns:a16="http://schemas.microsoft.com/office/drawing/2014/main" id="{DAAFA4BE-380C-4DEB-86C4-E8AFD4A3096D}"/>
               </a:ext>
             </a:extLst>
           </p:cNvPr>
@@ -6713,8 +10288,8 @@
         </p:nvSpPr>
         <p:spPr>
           <a:xfrm xmlns:a="http://schemas.openxmlformats.org/drawingml/2006/main">
-            <a:off x="685800" y="3048000"/>
-            <a:ext cx="4667250" cy="1257300"/>
+            <a:off x="685800" y="5238750"/>
+            <a:ext cx="10820400" cy="457200"/>
           </a:xfrm>
           <a:prstGeom xmlns:a="http://schemas.openxmlformats.org/drawingml/2006/main" prst="rect">
             <a:avLst/>
@@ -6730,7 +10305,7 @@
           </a:bodyPr>
           <a:lstStyle xmlns:a="http://schemas.openxmlformats.org/drawingml/2006/main">
             <a:defPPr>
-              <a:defRPr sz="1875" b="0">
+              <a:defRPr sz="1500" b="0">
                 <a:solidFill>
                   <a:srgbClr val="344955"/>
                 </a:solidFill>
@@ -6742,7 +10317,7 @@
           </a:lstStyle>
           <a:p xmlns:a="http://schemas.openxmlformats.org/drawingml/2006/main">
             <a:pPr>
-              <a:defRPr sz="1875" b="0">
+              <a:defRPr sz="1500" b="0">
                 <a:solidFill>
                   <a:srgbClr val="344955"/>
                 </a:solidFill>
@@ -6752,7 +10327,7 @@
               </a:defRPr>
             </a:pPr>
             <a:r>
-              <a:rPr sz="1875" b="0">
+              <a:rPr sz="1500" b="0">
                 <a:solidFill>
                   <a:srgbClr val="344955"/>
                 </a:solidFill>
@@ -6760,7 +10335,7 @@
                 <a:ea typeface="Arial"/>
                 <a:cs typeface="Arial"/>
               </a:rPr>
-              <a:t>Trace records include setpoints, ACKs, mode/armed state, estimates, body truth, camera metadata and frame IDs.</a:t>
+              <a:t>Maximum tick lateness: 12 ms and 16 ms. Neither run exceeded 100 ms. Position gaps peaked at 125 ms and 110 ms.</a:t>
             </a:r>
           </a:p>
         </p:txBody>
@@ -6770,7 +10345,7 @@
           <p:cNvPr id="5" name="">
             <a:extLst xmlns:a="http://schemas.openxmlformats.org/drawingml/2006/main">
               <a:ext uri="{FF2B5EF4-FFF2-40B4-BE49-F238E27FC236}">
-                <a16:creationId xmlns:a16="http://schemas.microsoft.com/office/drawing/2014/main" id="{33E6DAB5-7489-4156-AC88-B0DA793B6394}"/>
+                <a16:creationId xmlns:a16="http://schemas.microsoft.com/office/drawing/2014/main" id="{AD7271C4-452B-4823-B11A-039C66DCA8B9}"/>
               </a:ext>
             </a:extLst>
           </p:cNvPr>
@@ -6781,8 +10356,8 @@
         </p:nvSpPr>
         <p:spPr>
           <a:xfrm xmlns:a="http://schemas.openxmlformats.org/drawingml/2006/main">
-            <a:off x="685800" y="4429125"/>
-            <a:ext cx="4667250" cy="1257300"/>
+            <a:off x="685800" y="5715000"/>
+            <a:ext cx="10820400" cy="457200"/>
           </a:xfrm>
           <a:prstGeom xmlns:a="http://schemas.openxmlformats.org/drawingml/2006/main" prst="rect">
             <a:avLst/>
@@ -6798,7 +10373,7 @@
           </a:bodyPr>
           <a:lstStyle xmlns:a="http://schemas.openxmlformats.org/drawingml/2006/main">
             <a:defPPr>
-              <a:defRPr sz="1875" b="0">
+              <a:defRPr sz="1500" b="0">
                 <a:solidFill>
                   <a:srgbClr val="344955"/>
                 </a:solidFill>
@@ -6810,7 +10385,7 @@
           </a:lstStyle>
           <a:p xmlns:a="http://schemas.openxmlformats.org/drawingml/2006/main">
             <a:pPr>
-              <a:defRPr sz="1875" b="0">
+              <a:defRPr sz="1500" b="0">
                 <a:solidFill>
                   <a:srgbClr val="344955"/>
                 </a:solidFill>
@@ -6820,7 +10395,7 @@
               </a:defRPr>
             </a:pPr>
             <a:r>
-              <a:rPr sz="1875" b="0">
+              <a:rPr sz="1500" b="0">
                 <a:solidFill>
                   <a:srgbClr val="344955"/>
                 </a:solidFill>
@@ -6828,7 +10403,7 @@
                 <a:ea typeface="Arial"/>
                 <a:cs typeface="Arial"/>
               </a:rPr>
-              <a:t>Acquisition-time camera pose remains unknown. RGB recording did not drive the waypoint controller.</a:t>
+              <a:t>These two sequential flights do not isolate capture overhead. Reset state, leg durations and scheduler timing also differ.</a:t>
             </a:r>
           </a:p>
         </p:txBody>
@@ -6838,7 +10413,7 @@
           <p:cNvPr id="6" name="">
             <a:extLst xmlns:a="http://schemas.openxmlformats.org/drawingml/2006/main">
               <a:ext uri="{FF2B5EF4-FFF2-40B4-BE49-F238E27FC236}">
-                <a16:creationId xmlns:a16="http://schemas.microsoft.com/office/drawing/2014/main" id="{2C177CDC-4BDE-4866-9BAD-023BA3C3A438}"/>
+                <a16:creationId xmlns:a16="http://schemas.microsoft.com/office/drawing/2014/main" id="{9D9C89D5-7893-47E8-A546-9C2DC1D2A2CC}"/>
               </a:ext>
             </a:extLst>
           </p:cNvPr>
@@ -6896,7 +10471,7 @@
                 <a:ea typeface="Arial"/>
                 <a:cs typeface="Arial"/>
               </a:rPr>
-              <a:t>Measured stock integration. Calibration and real-scene fidelity remain incomplete.   6 / 12</a:t>
+              <a:t>Stock integration evidence · offline handoff 11 October 2026   6 / 16</a:t>
             </a:r>
           </a:p>
         </p:txBody>
@@ -6904,7 +10479,7 @@
     </p:spTree>
     <p:extLst>
       <p:ext uri="{BB962C8B-B14F-4D97-AF65-F5344CB8AC3E}">
-        <p14:creationId xmlns:p14="http://schemas.microsoft.com/office/powerpoint/2010/main" val="1309873790"/>
+        <p14:creationId xmlns:p14="http://schemas.microsoft.com/office/powerpoint/2010/main" val="1799422625"/>
       </p:ext>
     </p:extLst>
   </p:cSld>
@@ -6932,10 +10507,10 @@
       </p:grpSpPr>
       <p:sp>
         <p:nvSpPr>
-          <p:cNvPr id="7" name="">
-            <a:extLst xmlns:a="http://schemas.openxmlformats.org/drawingml/2006/main">
-              <a:ext uri="{FF2B5EF4-FFF2-40B4-BE49-F238E27FC236}">
-                <a16:creationId xmlns:a16="http://schemas.microsoft.com/office/drawing/2014/main" id="{208B5601-4EBF-46F0-A68B-A772D8E13926}"/>
+          <p:cNvPr id="10" name="">
+            <a:extLst xmlns:a="http://schemas.openxmlformats.org/drawingml/2006/main">
+              <a:ext uri="{FF2B5EF4-FFF2-40B4-BE49-F238E27FC236}">
+                <a16:creationId xmlns:a16="http://schemas.microsoft.com/office/drawing/2014/main" id="{4C4D6959-1D3F-4B63-8D75-E21EA39B3BA7}"/>
               </a:ext>
             </a:extLst>
           </p:cNvPr>
@@ -6993,7 +10568,7 @@
                 <a:ea typeface="Arial"/>
                 <a:cs typeface="Arial"/>
               </a:rPr>
-              <a:t>Camera geometry exposed our defect</a:t>
+              <a:t>Playable native RGB recordings</a:t>
             </a:r>
           </a:p>
         </p:txBody>
@@ -7003,7 +10578,7 @@
           <p:cNvPr id="2" name="">
             <a:extLst xmlns:a="http://schemas.openxmlformats.org/drawingml/2006/main">
               <a:ext uri="{FF2B5EF4-FFF2-40B4-BE49-F238E27FC236}">
-                <a16:creationId xmlns:a16="http://schemas.microsoft.com/office/drawing/2014/main" id="{5C9E947D-ADB3-44E9-A235-F409CEE76698}"/>
+                <a16:creationId xmlns:a16="http://schemas.microsoft.com/office/drawing/2014/main" id="{FFF3D97A-6A45-440D-9D7E-A1D02944C259}"/>
               </a:ext>
             </a:extLst>
           </p:cNvPr>
@@ -7013,7 +10588,7 @@
           <p:nvPr/>
         </p:nvPicPr>
         <p:blipFill>
-          <a:blip xmlns:r="http://schemas.openxmlformats.org/officeDocument/2006/relationships" xmlns:a="http://schemas.openxmlformats.org/drawingml/2006/main" r:embed="Ra19ca00809c84d63"/>
+          <a:blip xmlns:r="http://schemas.openxmlformats.org/officeDocument/2006/relationships" xmlns:a="http://schemas.openxmlformats.org/drawingml/2006/main" r:embed="R216d40d9a9984016"/>
           <a:stretch xmlns:a="http://schemas.openxmlformats.org/drawingml/2006/main"/>
         </p:blipFill>
         <p:spPr>
@@ -7031,7 +10606,7 @@
           <p:cNvPr id="3" name="">
             <a:extLst xmlns:a="http://schemas.openxmlformats.org/drawingml/2006/main">
               <a:ext uri="{FF2B5EF4-FFF2-40B4-BE49-F238E27FC236}">
-                <a16:creationId xmlns:a16="http://schemas.microsoft.com/office/drawing/2014/main" id="{1F98B8DB-B54E-4889-A9CD-EB8F09ACC898}"/>
+                <a16:creationId xmlns:a16="http://schemas.microsoft.com/office/drawing/2014/main" id="{512AA2E9-57E6-4332-88C8-C89A2FF74A52}"/>
               </a:ext>
             </a:extLst>
           </p:cNvPr>
@@ -7089,7 +10664,7 @@
                 <a:ea typeface="Arial"/>
                 <a:cs typeface="Arial"/>
               </a:rPr>
-              <a:t>A1 and A2 saved 260 and 261 frames. A1 captured 25.797 seconds, short of the requested 26.</a:t>
+              <a:t>A1: 260 frames, 26.0 s playback. Capture was short at 25.797 s and rotations were invalid.</a:t>
             </a:r>
           </a:p>
         </p:txBody>
@@ -7099,7 +10674,7 @@
           <p:cNvPr id="4" name="">
             <a:extLst xmlns:a="http://schemas.openxmlformats.org/drawingml/2006/main">
               <a:ext uri="{FF2B5EF4-FFF2-40B4-BE49-F238E27FC236}">
-                <a16:creationId xmlns:a16="http://schemas.microsoft.com/office/drawing/2014/main" id="{1674CA49-A21B-46FC-AA10-5FFA588E6AB2}"/>
+                <a16:creationId xmlns:a16="http://schemas.microsoft.com/office/drawing/2014/main" id="{0CE61DB5-E36F-457A-8DAC-9EE79007510F}"/>
               </a:ext>
             </a:extLst>
           </p:cNvPr>
@@ -7157,7 +10732,7 @@
                 <a:ea typeface="Arial"/>
                 <a:cs typeface="Arial"/>
               </a:rPr>
-              <a:t>Our adapter converted degrees to radians for a degree field. The intended 15° yaw and 10° pitch were not executed.</a:t>
+              <a:t>A2: 261 frames, 26.1 s playback. Rotations were invalid. B2: 365 frames, 36.5 s playback during its route.</a:t>
             </a:r>
           </a:p>
         </p:txBody>
@@ -7167,7 +10742,7 @@
           <p:cNvPr id="5" name="">
             <a:extLst xmlns:a="http://schemas.openxmlformats.org/drawingml/2006/main">
               <a:ext uri="{FF2B5EF4-FFF2-40B4-BE49-F238E27FC236}">
-                <a16:creationId xmlns:a16="http://schemas.microsoft.com/office/drawing/2014/main" id="{CDB604CA-579E-48F4-B30E-DA385D2D1B65}"/>
+                <a16:creationId xmlns:a16="http://schemas.microsoft.com/office/drawing/2014/main" id="{1153FFCA-D909-4B9A-822D-6B8C74979293}"/>
               </a:ext>
             </a:extLst>
           </p:cNvPr>
@@ -7225,7 +10800,7 @@
                 <a:ea typeface="Arial"/>
                 <a:cs typeface="Arial"/>
               </a:rPr>
-              <a:t>Local duration and degree fixes passed helper tests. They need a simulator retest. Pose repeatability and projection checks remain blocked.</a:t>
+              <a:t>Rate test: 300 post-warmup frames, 10.013 Hz. Videos use fixed 10 FPS playback including warmup. Acquisition time is unknown.</a:t>
             </a:r>
           </a:p>
         </p:txBody>
@@ -7235,7 +10810,205 @@
           <p:cNvPr id="6" name="">
             <a:extLst xmlns:a="http://schemas.openxmlformats.org/drawingml/2006/main">
               <a:ext uri="{FF2B5EF4-FFF2-40B4-BE49-F238E27FC236}">
-                <a16:creationId xmlns:a16="http://schemas.microsoft.com/office/drawing/2014/main" id="{06AB5910-46E8-4AE9-BA3E-03C647D89F4A}"/>
+                <a16:creationId xmlns:a16="http://schemas.microsoft.com/office/drawing/2014/main" id="{B97172AE-0BDA-4BBE-8F3D-EFDB6A28CB0D}"/>
+              </a:ext>
+            </a:extLst>
+          </p:cNvPr>
+          <p:cNvSpPr>
+            <a:spLocks xmlns:a="http://schemas.openxmlformats.org/drawingml/2006/main" noGrp="1"/>
+          </p:cNvSpPr>
+          <p:nvPr/>
+        </p:nvSpPr>
+        <p:spPr>
+          <a:xfrm xmlns:a="http://schemas.openxmlformats.org/drawingml/2006/main">
+            <a:off x="685800" y="5934075"/>
+            <a:ext cx="1571625" cy="304800"/>
+          </a:xfrm>
+          <a:prstGeom xmlns:a="http://schemas.openxmlformats.org/drawingml/2006/main" prst="rect">
+            <a:avLst/>
+          </a:prstGeom>
+          <a:noFill xmlns:a="http://schemas.openxmlformats.org/drawingml/2006/main"/>
+          <a:ln xmlns:a="http://schemas.openxmlformats.org/drawingml/2006/main" w="0">
+            <a:noFill/>
+          </a:ln>
+        </p:spPr>
+        <p:txBody>
+          <a:bodyPr xmlns:a="http://schemas.openxmlformats.org/drawingml/2006/main">
+            <a:noAutofit/>
+          </a:bodyPr>
+          <a:lstStyle xmlns:a="http://schemas.openxmlformats.org/drawingml/2006/main">
+            <a:defPPr>
+              <a:defRPr sz="1650" b="0">
+                <a:solidFill>
+                  <a:srgbClr val="2563EB"/>
+                </a:solidFill>
+                <a:latin typeface="Arial"/>
+                <a:ea typeface="Arial"/>
+                <a:cs typeface="Arial"/>
+              </a:defRPr>
+            </a:defPPr>
+          </a:lstStyle>
+          <a:p xmlns:a="http://schemas.openxmlformats.org/drawingml/2006/main">
+            <a:pPr>
+              <a:defRPr sz="1650" b="0">
+                <a:solidFill>
+                  <a:srgbClr val="2563EB"/>
+                </a:solidFill>
+                <a:latin typeface="Arial"/>
+                <a:ea typeface="Arial"/>
+                <a:cs typeface="Arial"/>
+              </a:defRPr>
+            </a:pPr>
+            <a:r>
+              <a:rPr u="sng">
+                <a:solidFill>
+                  <a:srgbClr val="2563EB"/>
+                </a:solidFill>
+                <a:hlinkClick xmlns:r="http://schemas.openxmlformats.org/officeDocument/2006/relationships" r:id="Rc1423426fd40469d"/>
+              </a:rPr>
+              <a:t>A1 video</a:t>
+            </a:r>
+          </a:p>
+        </p:txBody>
+      </p:sp>
+      <p:sp>
+        <p:nvSpPr>
+          <p:cNvPr id="7" name="">
+            <a:extLst xmlns:a="http://schemas.openxmlformats.org/drawingml/2006/main">
+              <a:ext uri="{FF2B5EF4-FFF2-40B4-BE49-F238E27FC236}">
+                <a16:creationId xmlns:a16="http://schemas.microsoft.com/office/drawing/2014/main" id="{2901F13D-5EF1-452D-B319-E2FB5B628A97}"/>
+              </a:ext>
+            </a:extLst>
+          </p:cNvPr>
+          <p:cNvSpPr>
+            <a:spLocks xmlns:a="http://schemas.openxmlformats.org/drawingml/2006/main" noGrp="1"/>
+          </p:cNvSpPr>
+          <p:nvPr/>
+        </p:nvSpPr>
+        <p:spPr>
+          <a:xfrm xmlns:a="http://schemas.openxmlformats.org/drawingml/2006/main">
+            <a:off x="2381250" y="5934075"/>
+            <a:ext cx="1571625" cy="304800"/>
+          </a:xfrm>
+          <a:prstGeom xmlns:a="http://schemas.openxmlformats.org/drawingml/2006/main" prst="rect">
+            <a:avLst/>
+          </a:prstGeom>
+          <a:noFill xmlns:a="http://schemas.openxmlformats.org/drawingml/2006/main"/>
+          <a:ln xmlns:a="http://schemas.openxmlformats.org/drawingml/2006/main" w="0">
+            <a:noFill/>
+          </a:ln>
+        </p:spPr>
+        <p:txBody>
+          <a:bodyPr xmlns:a="http://schemas.openxmlformats.org/drawingml/2006/main">
+            <a:noAutofit/>
+          </a:bodyPr>
+          <a:lstStyle xmlns:a="http://schemas.openxmlformats.org/drawingml/2006/main">
+            <a:defPPr>
+              <a:defRPr sz="1650" b="0">
+                <a:solidFill>
+                  <a:srgbClr val="2563EB"/>
+                </a:solidFill>
+                <a:latin typeface="Arial"/>
+                <a:ea typeface="Arial"/>
+                <a:cs typeface="Arial"/>
+              </a:defRPr>
+            </a:defPPr>
+          </a:lstStyle>
+          <a:p xmlns:a="http://schemas.openxmlformats.org/drawingml/2006/main">
+            <a:pPr>
+              <a:defRPr sz="1650" b="0">
+                <a:solidFill>
+                  <a:srgbClr val="2563EB"/>
+                </a:solidFill>
+                <a:latin typeface="Arial"/>
+                <a:ea typeface="Arial"/>
+                <a:cs typeface="Arial"/>
+              </a:defRPr>
+            </a:pPr>
+            <a:r>
+              <a:rPr u="sng">
+                <a:solidFill>
+                  <a:srgbClr val="2563EB"/>
+                </a:solidFill>
+                <a:hlinkClick xmlns:r="http://schemas.openxmlformats.org/officeDocument/2006/relationships" r:id="R7b422d749b6f4804"/>
+              </a:rPr>
+              <a:t>A2 video</a:t>
+            </a:r>
+          </a:p>
+        </p:txBody>
+      </p:sp>
+      <p:sp>
+        <p:nvSpPr>
+          <p:cNvPr id="8" name="">
+            <a:extLst xmlns:a="http://schemas.openxmlformats.org/drawingml/2006/main">
+              <a:ext uri="{FF2B5EF4-FFF2-40B4-BE49-F238E27FC236}">
+                <a16:creationId xmlns:a16="http://schemas.microsoft.com/office/drawing/2014/main" id="{B6128F85-EDB6-4EC5-9752-2F9D5EC2C9A5}"/>
+              </a:ext>
+            </a:extLst>
+          </p:cNvPr>
+          <p:cNvSpPr>
+            <a:spLocks xmlns:a="http://schemas.openxmlformats.org/drawingml/2006/main" noGrp="1"/>
+          </p:cNvSpPr>
+          <p:nvPr/>
+        </p:nvSpPr>
+        <p:spPr>
+          <a:xfrm xmlns:a="http://schemas.openxmlformats.org/drawingml/2006/main">
+            <a:off x="4076700" y="5934075"/>
+            <a:ext cx="1571625" cy="304800"/>
+          </a:xfrm>
+          <a:prstGeom xmlns:a="http://schemas.openxmlformats.org/drawingml/2006/main" prst="rect">
+            <a:avLst/>
+          </a:prstGeom>
+          <a:noFill xmlns:a="http://schemas.openxmlformats.org/drawingml/2006/main"/>
+          <a:ln xmlns:a="http://schemas.openxmlformats.org/drawingml/2006/main" w="0">
+            <a:noFill/>
+          </a:ln>
+        </p:spPr>
+        <p:txBody>
+          <a:bodyPr xmlns:a="http://schemas.openxmlformats.org/drawingml/2006/main">
+            <a:noAutofit/>
+          </a:bodyPr>
+          <a:lstStyle xmlns:a="http://schemas.openxmlformats.org/drawingml/2006/main">
+            <a:defPPr>
+              <a:defRPr sz="1650" b="0">
+                <a:solidFill>
+                  <a:srgbClr val="2563EB"/>
+                </a:solidFill>
+                <a:latin typeface="Arial"/>
+                <a:ea typeface="Arial"/>
+                <a:cs typeface="Arial"/>
+              </a:defRPr>
+            </a:defPPr>
+          </a:lstStyle>
+          <a:p xmlns:a="http://schemas.openxmlformats.org/drawingml/2006/main">
+            <a:pPr>
+              <a:defRPr sz="1650" b="0">
+                <a:solidFill>
+                  <a:srgbClr val="2563EB"/>
+                </a:solidFill>
+                <a:latin typeface="Arial"/>
+                <a:ea typeface="Arial"/>
+                <a:cs typeface="Arial"/>
+              </a:defRPr>
+            </a:pPr>
+            <a:r>
+              <a:rPr u="sng">
+                <a:solidFill>
+                  <a:srgbClr val="2563EB"/>
+                </a:solidFill>
+                <a:hlinkClick xmlns:r="http://schemas.openxmlformats.org/officeDocument/2006/relationships" r:id="Re8230d57ba83427b"/>
+              </a:rPr>
+              <a:t>B2 video</a:t>
+            </a:r>
+          </a:p>
+        </p:txBody>
+      </p:sp>
+      <p:sp>
+        <p:nvSpPr>
+          <p:cNvPr id="9" name="">
+            <a:extLst xmlns:a="http://schemas.openxmlformats.org/drawingml/2006/main">
+              <a:ext uri="{FF2B5EF4-FFF2-40B4-BE49-F238E27FC236}">
+                <a16:creationId xmlns:a16="http://schemas.microsoft.com/office/drawing/2014/main" id="{C8E1AFBC-FD96-4124-A9B7-6FA21459BE64}"/>
               </a:ext>
             </a:extLst>
           </p:cNvPr>
@@ -7293,7 +11066,7 @@
                 <a:ea typeface="Arial"/>
                 <a:cs typeface="Arial"/>
               </a:rPr>
-              <a:t>Measured stock integration. Calibration and real-scene fidelity remain incomplete.   7 / 12</a:t>
+              <a:t>Stock integration evidence · offline handoff 11 October 2026   7 / 16</a:t>
             </a:r>
           </a:p>
         </p:txBody>
@@ -7301,7 +11074,7 @@
     </p:spTree>
     <p:extLst>
       <p:ext uri="{BB962C8B-B14F-4D97-AF65-F5344CB8AC3E}">
-        <p14:creationId xmlns:p14="http://schemas.microsoft.com/office/powerpoint/2010/main" val="1376311131"/>
+        <p14:creationId xmlns:p14="http://schemas.microsoft.com/office/powerpoint/2010/main" val="976083932"/>
       </p:ext>
     </p:extLst>
   </p:cSld>
@@ -7332,7 +11105,7 @@
           <p:cNvPr id="7" name="">
             <a:extLst xmlns:a="http://schemas.openxmlformats.org/drawingml/2006/main">
               <a:ext uri="{FF2B5EF4-FFF2-40B4-BE49-F238E27FC236}">
-                <a16:creationId xmlns:a16="http://schemas.microsoft.com/office/drawing/2014/main" id="{5BC446D2-C432-414B-8C93-13007C5125A2}"/>
+                <a16:creationId xmlns:a16="http://schemas.microsoft.com/office/drawing/2014/main" id="{E2568FE3-A0EB-4C2D-B4A5-03061CE27731}"/>
               </a:ext>
             </a:extLst>
           </p:cNvPr>
@@ -7390,7 +11163,7 @@
                 <a:ea typeface="Arial"/>
                 <a:cs typeface="Arial"/>
               </a:rPr>
-              <a:t>Native capture meets the rate request</a:t>
+              <a:t>Worked record trace: B2 frame 182</a:t>
             </a:r>
           </a:p>
         </p:txBody>
@@ -7400,7 +11173,7 @@
           <p:cNvPr id="2" name="">
             <a:extLst xmlns:a="http://schemas.openxmlformats.org/drawingml/2006/main">
               <a:ext uri="{FF2B5EF4-FFF2-40B4-BE49-F238E27FC236}">
-                <a16:creationId xmlns:a16="http://schemas.microsoft.com/office/drawing/2014/main" id="{6C06E90D-EF86-4D8F-AF8F-6E3B1739E5C5}"/>
+                <a16:creationId xmlns:a16="http://schemas.microsoft.com/office/drawing/2014/main" id="{F1D54B0C-1AC2-418D-9DAF-2BC97AEFD0BB}"/>
               </a:ext>
             </a:extLst>
           </p:cNvPr>
@@ -7410,13 +11183,13 @@
           <p:nvPr/>
         </p:nvPicPr>
         <p:blipFill>
-          <a:blip xmlns:r="http://schemas.openxmlformats.org/officeDocument/2006/relationships" xmlns:a="http://schemas.openxmlformats.org/drawingml/2006/main" r:embed="Rb68a96f121144338"/>
+          <a:blip xmlns:r="http://schemas.openxmlformats.org/officeDocument/2006/relationships" xmlns:a="http://schemas.openxmlformats.org/drawingml/2006/main" r:embed="R5de65a3d33dc40c7"/>
           <a:stretch xmlns:a="http://schemas.openxmlformats.org/drawingml/2006/main"/>
         </p:blipFill>
         <p:spPr>
           <a:xfrm xmlns:a="http://schemas.openxmlformats.org/drawingml/2006/main">
-            <a:off x="1238250" y="1381125"/>
-            <a:ext cx="9715500" cy="3238500"/>
+            <a:off x="5810250" y="1674019"/>
+            <a:ext cx="5695950" cy="4271963"/>
           </a:xfrm>
           <a:prstGeom xmlns:a="http://schemas.openxmlformats.org/drawingml/2006/main" prst="rect">
             <a:avLst/>
@@ -7428,7 +11201,7 @@
           <p:cNvPr id="3" name="">
             <a:extLst xmlns:a="http://schemas.openxmlformats.org/drawingml/2006/main">
               <a:ext uri="{FF2B5EF4-FFF2-40B4-BE49-F238E27FC236}">
-                <a16:creationId xmlns:a16="http://schemas.microsoft.com/office/drawing/2014/main" id="{892526ED-03D7-4232-B7FC-E62FA3B2E0F4}"/>
+                <a16:creationId xmlns:a16="http://schemas.microsoft.com/office/drawing/2014/main" id="{54D515D8-C08C-4264-AC0B-97B5531ABED3}"/>
               </a:ext>
             </a:extLst>
           </p:cNvPr>
@@ -7439,8 +11212,8 @@
         </p:nvSpPr>
         <p:spPr>
           <a:xfrm xmlns:a="http://schemas.openxmlformats.org/drawingml/2006/main">
-            <a:off x="685800" y="4762500"/>
-            <a:ext cx="10820400" cy="457200"/>
+            <a:off x="685800" y="1666875"/>
+            <a:ext cx="4667250" cy="1257300"/>
           </a:xfrm>
           <a:prstGeom xmlns:a="http://schemas.openxmlformats.org/drawingml/2006/main" prst="rect">
             <a:avLst/>
@@ -7456,7 +11229,7 @@
           </a:bodyPr>
           <a:lstStyle xmlns:a="http://schemas.openxmlformats.org/drawingml/2006/main">
             <a:defPPr>
-              <a:defRPr sz="1500" b="0">
+              <a:defRPr sz="1875" b="0">
                 <a:solidFill>
                   <a:srgbClr val="102D3B"/>
                 </a:solidFill>
@@ -7468,7 +11241,7 @@
           </a:lstStyle>
           <a:p xmlns:a="http://schemas.openxmlformats.org/drawingml/2006/main">
             <a:pPr>
-              <a:defRPr sz="1500" b="0">
+              <a:defRPr sz="1875" b="0">
                 <a:solidFill>
                   <a:srgbClr val="102D3B"/>
                 </a:solidFill>
@@ -7478,7 +11251,7 @@
               </a:defRPr>
             </a:pPr>
             <a:r>
-              <a:rPr sz="1500" b="0">
+              <a:rPr sz="1875" b="0">
                 <a:solidFill>
                   <a:srgbClr val="102D3B"/>
                 </a:solidFill>
@@ -7486,7 +11259,7 @@
                 <a:ea typeface="Arial"/>
                 <a:cs typeface="Arial"/>
               </a:rPr>
-              <a:t>The 35 s test included 5 s warmup and 300 post-warmup frames. Delivered record rate was 10.013 Hz.</a:t>
+              <a:t>Target (2,2,-2) at UTC 1791674187.681857. Nearby PX4 estimate: (1.985,1.743,-1.999) m. OFFBOARD and armed.</a:t>
             </a:r>
           </a:p>
         </p:txBody>
@@ -7496,7 +11269,7 @@
           <p:cNvPr id="4" name="">
             <a:extLst xmlns:a="http://schemas.openxmlformats.org/drawingml/2006/main">
               <a:ext uri="{FF2B5EF4-FFF2-40B4-BE49-F238E27FC236}">
-                <a16:creationId xmlns:a16="http://schemas.microsoft.com/office/drawing/2014/main" id="{1AE71055-C267-4F83-BACE-8D4810CD68A0}"/>
+                <a16:creationId xmlns:a16="http://schemas.microsoft.com/office/drawing/2014/main" id="{F86EC1B0-7A20-49A6-A2DE-6916580EC8A5}"/>
               </a:ext>
             </a:extLst>
           </p:cNvPr>
@@ -7507,8 +11280,8 @@
         </p:nvSpPr>
         <p:spPr>
           <a:xfrm xmlns:a="http://schemas.openxmlformats.org/drawingml/2006/main">
-            <a:off x="685800" y="5238750"/>
-            <a:ext cx="10820400" cy="457200"/>
+            <a:off x="685800" y="3048000"/>
+            <a:ext cx="4667250" cy="1257300"/>
           </a:xfrm>
           <a:prstGeom xmlns:a="http://schemas.openxmlformats.org/drawingml/2006/main" prst="rect">
             <a:avLst/>
@@ -7524,7 +11297,7 @@
           </a:bodyPr>
           <a:lstStyle xmlns:a="http://schemas.openxmlformats.org/drawingml/2006/main">
             <a:defPPr>
-              <a:defRPr sz="1500" b="0">
+              <a:defRPr sz="1875" b="0">
                 <a:solidFill>
                   <a:srgbClr val="344955"/>
                 </a:solidFill>
@@ -7536,7 +11309,7 @@
           </a:lstStyle>
           <a:p xmlns:a="http://schemas.openxmlformats.org/drawingml/2006/main">
             <a:pPr>
-              <a:defRPr sz="1500" b="0">
+              <a:defRPr sz="1875" b="0">
                 <a:solidFill>
                   <a:srgbClr val="344955"/>
                 </a:solidFill>
@@ -7546,7 +11319,7 @@
               </a:defRPr>
             </a:pPr>
             <a:r>
-              <a:rPr sz="1500" b="0">
+              <a:rPr sz="1875" b="0">
                 <a:solidFill>
                   <a:srgbClr val="344955"/>
                 </a:solidFill>
@@ -7554,7 +11327,7 @@
                 <a:ea typeface="Arial"/>
                 <a:cs typeface="Arial"/>
               </a:rPr>
-              <a:t>No duplicate native timestamps or post-warmup receipt gaps above 150 ms occurred in the saved rate sequence.</a:t>
+              <a:t>Native body: (2.035,1.695,-10.042). Camera: (2.335,1.684,-10.193). Their map origin differs from PX4 local NED.</a:t>
             </a:r>
           </a:p>
         </p:txBody>
@@ -7564,7 +11337,7 @@
           <p:cNvPr id="5" name="">
             <a:extLst xmlns:a="http://schemas.openxmlformats.org/drawingml/2006/main">
               <a:ext uri="{FF2B5EF4-FFF2-40B4-BE49-F238E27FC236}">
-                <a16:creationId xmlns:a16="http://schemas.microsoft.com/office/drawing/2014/main" id="{B12DEDA5-8087-49F1-94A1-D452E213B389}"/>
+                <a16:creationId xmlns:a16="http://schemas.microsoft.com/office/drawing/2014/main" id="{88E6C59A-B7F7-4223-871E-9FDC5B49499A}"/>
               </a:ext>
             </a:extLst>
           </p:cNvPr>
@@ -7575,8 +11348,8 @@
         </p:nvSpPr>
         <p:spPr>
           <a:xfrm xmlns:a="http://schemas.openxmlformats.org/drawingml/2006/main">
-            <a:off x="685800" y="5715000"/>
-            <a:ext cx="10820400" cy="457200"/>
+            <a:off x="685800" y="4429125"/>
+            <a:ext cx="4667250" cy="1257300"/>
           </a:xfrm>
           <a:prstGeom xmlns:a="http://schemas.openxmlformats.org/drawingml/2006/main" prst="rect">
             <a:avLst/>
@@ -7592,7 +11365,7 @@
           </a:bodyPr>
           <a:lstStyle xmlns:a="http://schemas.openxmlformats.org/drawingml/2006/main">
             <a:defPPr>
-              <a:defRPr sz="1500" b="0">
+              <a:defRPr sz="1875" b="0">
                 <a:solidFill>
                   <a:srgbClr val="344955"/>
                 </a:solidFill>
@@ -7604,7 +11377,7 @@
           </a:lstStyle>
           <a:p xmlns:a="http://schemas.openxmlformats.org/drawingml/2006/main">
             <a:pPr>
-              <a:defRPr sz="1500" b="0">
+              <a:defRPr sz="1875" b="0">
                 <a:solidFill>
                   <a:srgbClr val="344955"/>
                 </a:solidFill>
@@ -7614,7 +11387,7 @@
               </a:defRPr>
             </a:pPr>
             <a:r>
-              <a:rPr sz="1500" b="0">
+              <a:rPr sz="1875" b="0">
                 <a:solidFill>
                   <a:srgbClr val="344955"/>
                 </a:solidFill>
@@ -7622,7 +11395,7 @@
                 <a:ea typeface="Arial"/>
                 <a:cs typeface="Arial"/>
               </a:rPr>
-              <a:t>A2 first image had an old-looking clock value before a large jump. Clock ownership and acquisition latency remain unresolved.</a:t>
+              <a:t>Frame clock 239.352. Camera clock 239.392. Body clock 239.405. Receiver-near illustration only. Acquisition pose is unknown.</a:t>
             </a:r>
           </a:p>
         </p:txBody>
@@ -7632,7 +11405,7 @@
           <p:cNvPr id="6" name="">
             <a:extLst xmlns:a="http://schemas.openxmlformats.org/drawingml/2006/main">
               <a:ext uri="{FF2B5EF4-FFF2-40B4-BE49-F238E27FC236}">
-                <a16:creationId xmlns:a16="http://schemas.microsoft.com/office/drawing/2014/main" id="{90E556F6-0A3B-473E-9600-387991902929}"/>
+                <a16:creationId xmlns:a16="http://schemas.microsoft.com/office/drawing/2014/main" id="{55365377-26BE-455C-BD43-4C74628EDD18}"/>
               </a:ext>
             </a:extLst>
           </p:cNvPr>
@@ -7690,7 +11463,7 @@
                 <a:ea typeface="Arial"/>
                 <a:cs typeface="Arial"/>
               </a:rPr>
-              <a:t>Measured stock integration. Calibration and real-scene fidelity remain incomplete.   8 / 12</a:t>
+              <a:t>Concurrent records demonstrated · acquisition-time association unverified   8 / 16</a:t>
             </a:r>
           </a:p>
         </p:txBody>
@@ -7698,7 +11471,7 @@
     </p:spTree>
     <p:extLst>
       <p:ext uri="{BB962C8B-B14F-4D97-AF65-F5344CB8AC3E}">
-        <p14:creationId xmlns:p14="http://schemas.microsoft.com/office/powerpoint/2010/main" val="92643123"/>
+        <p14:creationId xmlns:p14="http://schemas.microsoft.com/office/powerpoint/2010/main" val="335005061"/>
       </p:ext>
     </p:extLst>
   </p:cSld>
@@ -7729,7 +11502,7 @@
           <p:cNvPr id="7" name="">
             <a:extLst xmlns:a="http://schemas.openxmlformats.org/drawingml/2006/main">
               <a:ext uri="{FF2B5EF4-FFF2-40B4-BE49-F238E27FC236}">
-                <a16:creationId xmlns:a16="http://schemas.microsoft.com/office/drawing/2014/main" id="{9AD4832A-0A90-43D6-A300-C4A3574220DE}"/>
+                <a16:creationId xmlns:a16="http://schemas.microsoft.com/office/drawing/2014/main" id="{E8A0843A-B252-4352-AF74-F452B92E2558}"/>
               </a:ext>
             </a:extLst>
           </p:cNvPr>
@@ -7787,7 +11560,7 @@
                 <a:ea typeface="Arial"/>
                 <a:cs typeface="Arial"/>
               </a:rPr>
-              <a:t>Resource measurements fit this workload</a:t>
+              <a:t>Camera results and authored defects</a:t>
             </a:r>
           </a:p>
         </p:txBody>
@@ -7797,7 +11570,7 @@
           <p:cNvPr id="2" name="">
             <a:extLst xmlns:a="http://schemas.openxmlformats.org/drawingml/2006/main">
               <a:ext uri="{FF2B5EF4-FFF2-40B4-BE49-F238E27FC236}">
-                <a16:creationId xmlns:a16="http://schemas.microsoft.com/office/drawing/2014/main" id="{FDC2B62F-75E5-4D66-91AE-30D72CC248A1}"/>
+                <a16:creationId xmlns:a16="http://schemas.microsoft.com/office/drawing/2014/main" id="{DFD2E3CD-FE93-42C8-AA35-E231483B81B9}"/>
               </a:ext>
             </a:extLst>
           </p:cNvPr>
@@ -7807,13 +11580,13 @@
           <p:nvPr/>
         </p:nvPicPr>
         <p:blipFill>
-          <a:blip xmlns:r="http://schemas.openxmlformats.org/officeDocument/2006/relationships" xmlns:a="http://schemas.openxmlformats.org/drawingml/2006/main" r:embed="R5453a6845cee4dd7"/>
+          <a:blip xmlns:r="http://schemas.openxmlformats.org/officeDocument/2006/relationships" xmlns:a="http://schemas.openxmlformats.org/drawingml/2006/main" r:embed="R50ddb478258940e9"/>
           <a:stretch xmlns:a="http://schemas.openxmlformats.org/drawingml/2006/main"/>
         </p:blipFill>
         <p:spPr>
           <a:xfrm xmlns:a="http://schemas.openxmlformats.org/drawingml/2006/main">
-            <a:off x="698500" y="1381125"/>
-            <a:ext cx="10795000" cy="3238500"/>
+            <a:off x="5810250" y="1674019"/>
+            <a:ext cx="5695950" cy="4271963"/>
           </a:xfrm>
           <a:prstGeom xmlns:a="http://schemas.openxmlformats.org/drawingml/2006/main" prst="rect">
             <a:avLst/>
@@ -7825,7 +11598,7 @@
           <p:cNvPr id="3" name="">
             <a:extLst xmlns:a="http://schemas.openxmlformats.org/drawingml/2006/main">
               <a:ext uri="{FF2B5EF4-FFF2-40B4-BE49-F238E27FC236}">
-                <a16:creationId xmlns:a16="http://schemas.microsoft.com/office/drawing/2014/main" id="{1133AB91-A90F-40A4-8DEB-1525A63ACC3A}"/>
+                <a16:creationId xmlns:a16="http://schemas.microsoft.com/office/drawing/2014/main" id="{0A30779C-4111-4414-A8FD-ABEA1CECE3E7}"/>
               </a:ext>
             </a:extLst>
           </p:cNvPr>
@@ -7836,8 +11609,8 @@
         </p:nvSpPr>
         <p:spPr>
           <a:xfrm xmlns:a="http://schemas.openxmlformats.org/drawingml/2006/main">
-            <a:off x="685800" y="4762500"/>
-            <a:ext cx="10820400" cy="457200"/>
+            <a:off x="685800" y="1666875"/>
+            <a:ext cx="4667250" cy="1257300"/>
           </a:xfrm>
           <a:prstGeom xmlns:a="http://schemas.openxmlformats.org/drawingml/2006/main" prst="rect">
             <a:avLst/>
@@ -7853,7 +11626,7 @@
           </a:bodyPr>
           <a:lstStyle xmlns:a="http://schemas.openxmlformats.org/drawingml/2006/main">
             <a:defPPr>
-              <a:defRPr sz="1500" b="0">
+              <a:defRPr sz="1875" b="0">
                 <a:solidFill>
                   <a:srgbClr val="102D3B"/>
                 </a:solidFill>
@@ -7865,7 +11638,7 @@
           </a:lstStyle>
           <a:p xmlns:a="http://schemas.openxmlformats.org/drawingml/2006/main">
             <a:pPr>
-              <a:defRPr sz="1500" b="0">
+              <a:defRPr sz="1875" b="0">
                 <a:solidFill>
                   <a:srgbClr val="102D3B"/>
                 </a:solidFill>
@@ -7875,7 +11648,7 @@
               </a:defRPr>
             </a:pPr>
             <a:r>
-              <a:rPr sz="1500" b="0">
+              <a:rPr sz="1875" b="0">
                 <a:solidFill>
                   <a:srgbClr val="102D3B"/>
                 </a:solidFill>
@@ -7883,7 +11656,7 @@
                 <a:ea typeface="Arial"/>
                 <a:cs typeface="Arial"/>
               </a:rPr>
-              <a:t>Peak GPU allocation in the sample windows: 1,761 MiB and 1,758 MiB. Mean utilization: 16.93% and 17.47%.</a:t>
+              <a:t>The degree field received radians. Intended yaw 15° and pitch 10° became about 0.262° and 0.172°.</a:t>
             </a:r>
           </a:p>
         </p:txBody>
@@ -7893,7 +11666,7 @@
           <p:cNvPr id="4" name="">
             <a:extLst xmlns:a="http://schemas.openxmlformats.org/drawingml/2006/main">
               <a:ext uri="{FF2B5EF4-FFF2-40B4-BE49-F238E27FC236}">
-                <a16:creationId xmlns:a16="http://schemas.microsoft.com/office/drawing/2014/main" id="{2CD5676B-34C1-4282-803F-74ABE496ED2D}"/>
+                <a16:creationId xmlns:a16="http://schemas.microsoft.com/office/drawing/2014/main" id="{489B669C-2906-4CAE-96BE-350A675D1CE6}"/>
               </a:ext>
             </a:extLst>
           </p:cNvPr>
@@ -7904,8 +11677,8 @@
         </p:nvSpPr>
         <p:spPr>
           <a:xfrm xmlns:a="http://schemas.openxmlformats.org/drawingml/2006/main">
-            <a:off x="685800" y="5238750"/>
-            <a:ext cx="10820400" cy="457200"/>
+            <a:off x="685800" y="3048000"/>
+            <a:ext cx="4667250" cy="1257300"/>
           </a:xfrm>
           <a:prstGeom xmlns:a="http://schemas.openxmlformats.org/drawingml/2006/main" prst="rect">
             <a:avLst/>
@@ -7921,7 +11694,7 @@
           </a:bodyPr>
           <a:lstStyle xmlns:a="http://schemas.openxmlformats.org/drawingml/2006/main">
             <a:defPPr>
-              <a:defRPr sz="1500" b="0">
+              <a:defRPr sz="1875" b="0">
                 <a:solidFill>
                   <a:srgbClr val="344955"/>
                 </a:solidFill>
@@ -7933,7 +11706,7 @@
           </a:lstStyle>
           <a:p xmlns:a="http://schemas.openxmlformats.org/drawingml/2006/main">
             <a:pPr>
-              <a:defRPr sz="1500" b="0">
+              <a:defRPr sz="1875" b="0">
                 <a:solidFill>
                   <a:srgbClr val="344955"/>
                 </a:solidFill>
@@ -7943,7 +11716,7 @@
               </a:defRPr>
             </a:pPr>
             <a:r>
-              <a:rPr sz="1500" b="0">
+              <a:rPr sz="1875" b="0">
                 <a:solidFill>
                   <a:srgbClr val="344955"/>
                 </a:solidFill>
@@ -7951,7 +11724,7 @@
                 <a:ea typeface="Arial"/>
                 <a:cs typeface="Arial"/>
               </a:rPr>
-              <a:t>The host had 8 logical CPUs, 32 GB RAM and a 400 GB SSD. Driver 596.86, reported L4 memory 23,034 MiB.</a:t>
+              <a:t>Our local angle and duration fixes have not run on Windows. The unexported duration-only retest still used wrong angles.</a:t>
             </a:r>
           </a:p>
         </p:txBody>
@@ -7961,7 +11734,7 @@
           <p:cNvPr id="5" name="">
             <a:extLst xmlns:a="http://schemas.openxmlformats.org/drawingml/2006/main">
               <a:ext uri="{FF2B5EF4-FFF2-40B4-BE49-F238E27FC236}">
-                <a16:creationId xmlns:a16="http://schemas.microsoft.com/office/drawing/2014/main" id="{68C06772-D392-43BE-BEB0-BDC36718B3B9}"/>
+                <a16:creationId xmlns:a16="http://schemas.microsoft.com/office/drawing/2014/main" id="{9DD8C662-69F4-477B-8E4D-0A937E1BDA87}"/>
               </a:ext>
             </a:extLst>
           </p:cNvPr>
@@ -7972,8 +11745,8 @@
         </p:nvSpPr>
         <p:spPr>
           <a:xfrm xmlns:a="http://schemas.openxmlformats.org/drawingml/2006/main">
-            <a:off x="685800" y="5715000"/>
-            <a:ext cx="10820400" cy="457200"/>
+            <a:off x="685800" y="4429125"/>
+            <a:ext cx="4667250" cy="1257300"/>
           </a:xfrm>
           <a:prstGeom xmlns:a="http://schemas.openxmlformats.org/drawingml/2006/main" prst="rect">
             <a:avLst/>
@@ -7989,7 +11762,7 @@
           </a:bodyPr>
           <a:lstStyle xmlns:a="http://schemas.openxmlformats.org/drawingml/2006/main">
             <a:defPPr>
-              <a:defRPr sz="1500" b="0">
+              <a:defRPr sz="1875" b="0">
                 <a:solidFill>
                   <a:srgbClr val="344955"/>
                 </a:solidFill>
@@ -8001,7 +11774,7 @@
           </a:lstStyle>
           <a:p xmlns:a="http://schemas.openxmlformats.org/drawingml/2006/main">
             <a:pPr>
-              <a:defRPr sz="1500" b="0">
+              <a:defRPr sz="1875" b="0">
                 <a:solidFill>
                   <a:srgbClr val="344955"/>
                 </a:solidFill>
@@ -8011,7 +11784,7 @@
               </a:defRPr>
             </a:pPr>
             <a:r>
-              <a:rPr sz="1500" b="0">
+              <a:rPr sz="1875" b="0">
                 <a:solidFill>
                   <a:srgbClr val="344955"/>
                 </a:solidFill>
@@ -8019,7 +11792,7 @@
                 <a:ea typeface="Arial"/>
                 <a:cs typeface="Arial"/>
               </a:rPr>
-              <a:t>Polling includes preflight, Moonlight and desktop. B2 sampling ended mid-flight. Minimum VRAM and renderer-only throughput remain unmeasured.</a:t>
+              <a:t>Repeatability and projected-feature criteria remain incomplete. Native pose metadata does not establish calibrated acquisition pose.</a:t>
             </a:r>
           </a:p>
         </p:txBody>
@@ -8029,7 +11802,7 @@
           <p:cNvPr id="6" name="">
             <a:extLst xmlns:a="http://schemas.openxmlformats.org/drawingml/2006/main">
               <a:ext uri="{FF2B5EF4-FFF2-40B4-BE49-F238E27FC236}">
-                <a16:creationId xmlns:a16="http://schemas.microsoft.com/office/drawing/2014/main" id="{131A7B2E-C251-4AE4-AB57-2982DE983AF5}"/>
+                <a16:creationId xmlns:a16="http://schemas.microsoft.com/office/drawing/2014/main" id="{24290DBF-99AE-4A8D-AB58-3330B1508CFD}"/>
               </a:ext>
             </a:extLst>
           </p:cNvPr>
@@ -8087,7 +11860,7 @@
                 <a:ea typeface="Arial"/>
                 <a:cs typeface="Arial"/>
               </a:rPr>
-              <a:t>Measured stock integration. Calibration and real-scene fidelity remain incomplete.   9 / 12</a:t>
+              <a:t>Stock integration evidence · offline handoff 11 October 2026   9 / 16</a:t>
             </a:r>
           </a:p>
         </p:txBody>
@@ -8095,7 +11868,7 @@
     </p:spTree>
     <p:extLst>
       <p:ext uri="{BB962C8B-B14F-4D97-AF65-F5344CB8AC3E}">
-        <p14:creationId xmlns:p14="http://schemas.microsoft.com/office/powerpoint/2010/main" val="1580006418"/>
+        <p14:creationId xmlns:p14="http://schemas.microsoft.com/office/powerpoint/2010/main" val="370590335"/>
       </p:ext>
     </p:extLst>
   </p:cSld>
